--- a/output/Devoir N°2_redesigned.pptx
+++ b/output/Devoir N°2_redesigned.pptx
@@ -2262,7 +2262,7 @@
             <p:par>
               <p:cTn id="10" fill="hold" presetID="10" presetClass="entr" presetSubtype="0" dur="600" nodeType="clickEffect">
                 <p:stCondLst>
-                  <p:cond delay="0" evt="onClick"/>
+                  <p:cond evt="onClick" delay="0"/>
                 </p:stCondLst>
                 <p:childTnLst/>
               </p:cTn>
@@ -2340,7 +2340,7 @@
               </p:cTn>
             </p:par>
             <p:par>
-              <p:cTn id="20" fill="hold" presetID="10" presetClass="entr" presetSubtype="0" dur="700" nodeType="clickEffect">
+              <p:cTn id="20" fill="hold" presetID="10" presetClass="entr" presetSubtype="0" dur="600" nodeType="clickEffect">
                 <p:stCondLst>
                   <p:cond delay="2000"/>
                 </p:stCondLst>
@@ -3569,8 +3569,8 @@
         </p:nvSpPr>
         <p:spPr>
           <a:xfrm>
-            <a:off x="467556" y="79532"/>
-            <a:ext cx="1833644" cy="36576"/>
+            <a:off x="597092" y="88895"/>
+            <a:ext cx="2357286" cy="36576"/>
           </a:xfrm>
           <a:prstGeom prst="rect">
             <a:avLst/>
@@ -3615,9 +3615,9 @@
         <p:cTn id="1" dur="indefinite" restart="whenNotActive" nodeType="tmRoot">
           <p:childTnLst>
             <p:par>
-              <p:cTn id="10" fill="hold" presetID="10" presetClass="entr" presetSubtype="0" dur="700" nodeType="clickEffect">
-                <p:stCondLst>
-                  <p:cond delay="0" evt="onClick"/>
+              <p:cTn id="10" fill="hold" presetID="10" presetClass="entr" presetSubtype="0" dur="600" nodeType="clickEffect">
+                <p:stCondLst>
+                  <p:cond evt="onClick" delay="0"/>
                 </p:stCondLst>
                 <p:childTnLst/>
               </p:cTn>
@@ -3695,7 +3695,7 @@
               </p:cTn>
             </p:par>
             <p:par>
-              <p:cTn id="20" fill="hold" presetID="10" presetClass="entr" presetSubtype="0" dur="500" nodeType="clickEffect">
+              <p:cTn id="20" fill="hold" presetID="10" presetClass="entr" presetSubtype="0" dur="600" nodeType="clickEffect">
                 <p:stCondLst>
                   <p:cond delay="2000"/>
                 </p:stCondLst>
@@ -4688,6 +4688,208 @@
   <p:clrMapOvr>
     <a:masterClrMapping/>
   </p:clrMapOvr>
+  <p:timing>
+    <p:tnLst>
+      <p:par>
+        <p:cTn id="1" dur="indefinite" restart="whenNotActive" nodeType="tmRoot">
+          <p:childTnLst>
+            <p:par>
+              <p:cTn id="10" fill="hold" presetID="10" presetClass="entr" presetSubtype="0" dur="600" nodeType="clickEffect">
+                <p:stCondLst>
+                  <p:cond evt="onClick" delay="0"/>
+                </p:stCondLst>
+                <p:childTnLst/>
+              </p:cTn>
+            </p:par>
+            <p:par>
+              <p:cTn id="11" fill="hold" presetID="10" presetClass="entr" presetSubtype="0" dur="600" nodeType="clickEffect">
+                <p:stCondLst>
+                  <p:cond delay="200"/>
+                </p:stCondLst>
+                <p:childTnLst/>
+              </p:cTn>
+            </p:par>
+            <p:par>
+              <p:cTn id="12" fill="hold" presetID="10" presetClass="entr" presetSubtype="0" dur="600" nodeType="clickEffect">
+                <p:stCondLst>
+                  <p:cond delay="400"/>
+                </p:stCondLst>
+                <p:childTnLst/>
+              </p:cTn>
+            </p:par>
+            <p:par>
+              <p:cTn id="13" fill="hold" presetID="10" presetClass="entr" presetSubtype="0" dur="600" nodeType="clickEffect">
+                <p:stCondLst>
+                  <p:cond delay="600"/>
+                </p:stCondLst>
+                <p:childTnLst/>
+              </p:cTn>
+            </p:par>
+            <p:par>
+              <p:cTn id="14" fill="hold" presetID="10" presetClass="entr" presetSubtype="0" dur="600" nodeType="clickEffect">
+                <p:stCondLst>
+                  <p:cond delay="800"/>
+                </p:stCondLst>
+                <p:childTnLst/>
+              </p:cTn>
+            </p:par>
+            <p:par>
+              <p:cTn id="15" fill="hold" presetID="10" presetClass="entr" presetSubtype="0" dur="600" nodeType="clickEffect">
+                <p:stCondLst>
+                  <p:cond delay="1000"/>
+                </p:stCondLst>
+                <p:childTnLst/>
+              </p:cTn>
+            </p:par>
+            <p:par>
+              <p:cTn id="16" fill="hold" presetID="10" presetClass="entr" presetSubtype="0" dur="600" nodeType="clickEffect">
+                <p:stCondLst>
+                  <p:cond delay="1200"/>
+                </p:stCondLst>
+                <p:childTnLst/>
+              </p:cTn>
+            </p:par>
+            <p:par>
+              <p:cTn id="17" fill="hold" presetID="10" presetClass="entr" presetSubtype="0" dur="600" nodeType="clickEffect">
+                <p:stCondLst>
+                  <p:cond delay="1400"/>
+                </p:stCondLst>
+                <p:childTnLst/>
+              </p:cTn>
+            </p:par>
+            <p:par>
+              <p:cTn id="18" fill="hold" presetID="10" presetClass="entr" presetSubtype="0" dur="600" nodeType="clickEffect">
+                <p:stCondLst>
+                  <p:cond delay="1600"/>
+                </p:stCondLst>
+                <p:childTnLst/>
+              </p:cTn>
+            </p:par>
+            <p:par>
+              <p:cTn id="19" fill="hold" presetID="10" presetClass="entr" presetSubtype="0" dur="600" nodeType="clickEffect">
+                <p:stCondLst>
+                  <p:cond delay="1800"/>
+                </p:stCondLst>
+                <p:childTnLst/>
+              </p:cTn>
+            </p:par>
+            <p:par>
+              <p:cTn id="20" fill="hold" presetID="10" presetClass="entr" presetSubtype="0" dur="600" nodeType="clickEffect">
+                <p:stCondLst>
+                  <p:cond delay="2000"/>
+                </p:stCondLst>
+                <p:childTnLst/>
+              </p:cTn>
+            </p:par>
+            <p:par>
+              <p:cTn id="21" fill="hold" presetID="10" presetClass="entr" presetSubtype="0" dur="700" nodeType="clickEffect">
+                <p:stCondLst>
+                  <p:cond delay="2200"/>
+                </p:stCondLst>
+                <p:childTnLst/>
+              </p:cTn>
+            </p:par>
+            <p:par>
+              <p:cTn id="22" fill="hold" presetID="10" presetClass="entr" presetSubtype="0" dur="600" nodeType="clickEffect">
+                <p:stCondLst>
+                  <p:cond delay="2400"/>
+                </p:stCondLst>
+                <p:childTnLst/>
+              </p:cTn>
+            </p:par>
+            <p:par>
+              <p:cTn id="23" fill="hold" presetID="10" presetClass="entr" presetSubtype="0" dur="600" nodeType="clickEffect">
+                <p:stCondLst>
+                  <p:cond delay="2600"/>
+                </p:stCondLst>
+                <p:childTnLst/>
+              </p:cTn>
+            </p:par>
+            <p:par>
+              <p:cTn id="24" fill="hold" presetID="10" presetClass="entr" presetSubtype="0" dur="600" nodeType="clickEffect">
+                <p:stCondLst>
+                  <p:cond delay="2800"/>
+                </p:stCondLst>
+                <p:childTnLst/>
+              </p:cTn>
+            </p:par>
+            <p:par>
+              <p:cTn id="25" fill="hold" presetID="10" presetClass="entr" presetSubtype="0" dur="600" nodeType="clickEffect">
+                <p:stCondLst>
+                  <p:cond delay="3000"/>
+                </p:stCondLst>
+                <p:childTnLst/>
+              </p:cTn>
+            </p:par>
+            <p:par>
+              <p:cTn id="26" fill="hold" presetID="10" presetClass="entr" presetSubtype="0" dur="600" nodeType="clickEffect">
+                <p:stCondLst>
+                  <p:cond delay="3200"/>
+                </p:stCondLst>
+                <p:childTnLst/>
+              </p:cTn>
+            </p:par>
+            <p:par>
+              <p:cTn id="27" fill="hold" presetID="10" presetClass="entr" presetSubtype="0" dur="600" nodeType="clickEffect">
+                <p:stCondLst>
+                  <p:cond delay="3400"/>
+                </p:stCondLst>
+                <p:childTnLst/>
+              </p:cTn>
+            </p:par>
+            <p:par>
+              <p:cTn id="28" fill="hold" presetID="10" presetClass="entr" presetSubtype="0" dur="600" nodeType="clickEffect">
+                <p:stCondLst>
+                  <p:cond delay="3600"/>
+                </p:stCondLst>
+                <p:childTnLst/>
+              </p:cTn>
+            </p:par>
+            <p:par>
+              <p:cTn id="29" fill="hold" presetID="10" presetClass="entr" presetSubtype="0" dur="600" nodeType="clickEffect">
+                <p:stCondLst>
+                  <p:cond delay="3800"/>
+                </p:stCondLst>
+                <p:childTnLst/>
+              </p:cTn>
+            </p:par>
+            <p:par>
+              <p:cTn id="30" fill="hold" presetID="10" presetClass="entr" presetSubtype="0" dur="700" nodeType="clickEffect">
+                <p:stCondLst>
+                  <p:cond delay="4000"/>
+                </p:stCondLst>
+                <p:childTnLst/>
+              </p:cTn>
+            </p:par>
+            <p:par>
+              <p:cTn id="31" fill="hold" presetID="10" presetClass="entr" presetSubtype="0" dur="600" nodeType="clickEffect">
+                <p:stCondLst>
+                  <p:cond delay="4200"/>
+                </p:stCondLst>
+                <p:childTnLst/>
+              </p:cTn>
+            </p:par>
+            <p:par>
+              <p:cTn id="32" fill="hold" presetID="10" presetClass="entr" presetSubtype="0" dur="600" nodeType="clickEffect">
+                <p:stCondLst>
+                  <p:cond delay="4400"/>
+                </p:stCondLst>
+                <p:childTnLst/>
+              </p:cTn>
+            </p:par>
+            <p:par>
+              <p:cTn id="33" fill="hold" presetID="10" presetClass="entr" presetSubtype="0" dur="600" nodeType="clickEffect">
+                <p:stCondLst>
+                  <p:cond delay="4600"/>
+                </p:stCondLst>
+                <p:childTnLst/>
+              </p:cTn>
+            </p:par>
+          </p:childTnLst>
+        </p:cTn>
+      </p:par>
+    </p:tnLst>
+  </p:timing>
 </p:sld>
 </file>
 
@@ -5639,8 +5841,8 @@
         </p:nvSpPr>
         <p:spPr>
           <a:xfrm>
-            <a:off x="557418" y="103400"/>
-            <a:ext cx="2470819" cy="36576"/>
+            <a:off x="783598" y="132177"/>
+            <a:ext cx="2986825" cy="36576"/>
           </a:xfrm>
           <a:prstGeom prst="rect">
             <a:avLst/>
@@ -5685,9 +5887,9 @@
         <p:cTn id="1" dur="indefinite" restart="whenNotActive" nodeType="tmRoot">
           <p:childTnLst>
             <p:par>
-              <p:cTn id="10" fill="hold" presetID="10" presetClass="entr" presetSubtype="0" dur="600" nodeType="clickEffect">
-                <p:stCondLst>
-                  <p:cond delay="0" evt="onClick"/>
+              <p:cTn id="10" fill="hold" presetID="10" presetClass="entr" presetSubtype="0" dur="500" nodeType="clickEffect">
+                <p:stCondLst>
+                  <p:cond evt="onClick" delay="0"/>
                 </p:stCondLst>
                 <p:childTnLst/>
               </p:cTn>
@@ -5741,7 +5943,7 @@
               </p:cTn>
             </p:par>
             <p:par>
-              <p:cTn id="17" fill="hold" presetID="10" presetClass="entr" presetSubtype="0" dur="600" nodeType="clickEffect">
+              <p:cTn id="17" fill="hold" presetID="10" presetClass="entr" presetSubtype="0" dur="700" nodeType="clickEffect">
                 <p:stCondLst>
                   <p:cond delay="1400"/>
                 </p:stCondLst>
@@ -5749,7 +5951,7 @@
               </p:cTn>
             </p:par>
             <p:par>
-              <p:cTn id="18" fill="hold" presetID="10" presetClass="entr" presetSubtype="0" dur="600" nodeType="clickEffect">
+              <p:cTn id="18" fill="hold" presetID="10" presetClass="entr" presetSubtype="0" dur="700" nodeType="clickEffect">
                 <p:stCondLst>
                   <p:cond delay="1600"/>
                 </p:stCondLst>
@@ -5773,7 +5975,7 @@
               </p:cTn>
             </p:par>
             <p:par>
-              <p:cTn id="21" fill="hold" presetID="10" presetClass="entr" presetSubtype="0" dur="500" nodeType="clickEffect">
+              <p:cTn id="21" fill="hold" presetID="10" presetClass="entr" presetSubtype="0" dur="600" nodeType="clickEffect">
                 <p:stCondLst>
                   <p:cond delay="2200"/>
                 </p:stCondLst>
@@ -5829,7 +6031,7 @@
               </p:cTn>
             </p:par>
             <p:par>
-              <p:cTn id="28" fill="hold" presetID="10" presetClass="entr" presetSubtype="0" dur="700" nodeType="clickEffect">
+              <p:cTn id="28" fill="hold" presetID="10" presetClass="entr" presetSubtype="0" dur="600" nodeType="clickEffect">
                 <p:stCondLst>
                   <p:cond delay="3600"/>
                 </p:stCondLst>
@@ -7052,8 +7254,8 @@
         </p:nvSpPr>
         <p:spPr>
           <a:xfrm>
-            <a:off x="794007" y="122229"/>
-            <a:ext cx="2122346" cy="36576"/>
+            <a:off x="852051" y="135197"/>
+            <a:ext cx="1679796" cy="36576"/>
           </a:xfrm>
           <a:prstGeom prst="rect">
             <a:avLst/>
@@ -7100,7 +7302,7 @@
             <p:par>
               <p:cTn id="10" fill="hold" presetID="10" presetClass="entr" presetSubtype="0" dur="600" nodeType="clickEffect">
                 <p:stCondLst>
-                  <p:cond delay="0" evt="onClick"/>
+                  <p:cond evt="onClick" delay="0"/>
                 </p:stCondLst>
                 <p:childTnLst/>
               </p:cTn>
@@ -7146,7 +7348,7 @@
               </p:cTn>
             </p:par>
             <p:par>
-              <p:cTn id="16" fill="hold" presetID="10" presetClass="entr" presetSubtype="0" dur="500" nodeType="clickEffect">
+              <p:cTn id="16" fill="hold" presetID="10" presetClass="entr" presetSubtype="0" dur="600" nodeType="clickEffect">
                 <p:stCondLst>
                   <p:cond delay="1200"/>
                 </p:stCondLst>
@@ -7186,7 +7388,7 @@
               </p:cTn>
             </p:par>
             <p:par>
-              <p:cTn id="21" fill="hold" presetID="10" presetClass="entr" presetSubtype="0" dur="600" nodeType="clickEffect">
+              <p:cTn id="21" fill="hold" presetID="10" presetClass="entr" presetSubtype="0" dur="500" nodeType="clickEffect">
                 <p:stCondLst>
                   <p:cond delay="2200"/>
                 </p:stCondLst>
@@ -7194,7 +7396,7 @@
               </p:cTn>
             </p:par>
             <p:par>
-              <p:cTn id="22" fill="hold" presetID="10" presetClass="entr" presetSubtype="0" dur="600" nodeType="clickEffect">
+              <p:cTn id="22" fill="hold" presetID="10" presetClass="entr" presetSubtype="0" dur="500" nodeType="clickEffect">
                 <p:stCondLst>
                   <p:cond delay="2400"/>
                 </p:stCondLst>
@@ -7202,7 +7404,7 @@
               </p:cTn>
             </p:par>
             <p:par>
-              <p:cTn id="23" fill="hold" presetID="10" presetClass="entr" presetSubtype="0" dur="500" nodeType="clickEffect">
+              <p:cTn id="23" fill="hold" presetID="10" presetClass="entr" presetSubtype="0" dur="600" nodeType="clickEffect">
                 <p:stCondLst>
                   <p:cond delay="2600"/>
                 </p:stCondLst>
@@ -7210,7 +7412,7 @@
               </p:cTn>
             </p:par>
             <p:par>
-              <p:cTn id="24" fill="hold" presetID="10" presetClass="entr" presetSubtype="0" dur="500" nodeType="clickEffect">
+              <p:cTn id="24" fill="hold" presetID="10" presetClass="entr" presetSubtype="0" dur="600" nodeType="clickEffect">
                 <p:stCondLst>
                   <p:cond delay="2800"/>
                 </p:stCondLst>
@@ -7234,7 +7436,7 @@
               </p:cTn>
             </p:par>
             <p:par>
-              <p:cTn id="27" fill="hold" presetID="10" presetClass="entr" presetSubtype="0" dur="600" nodeType="clickEffect">
+              <p:cTn id="27" fill="hold" presetID="10" presetClass="entr" presetSubtype="0" dur="500" nodeType="clickEffect">
                 <p:stCondLst>
                   <p:cond delay="3400"/>
                 </p:stCondLst>
@@ -7266,7 +7468,7 @@
               </p:cTn>
             </p:par>
             <p:par>
-              <p:cTn id="31" fill="hold" presetID="10" presetClass="entr" presetSubtype="0" dur="500" nodeType="clickEffect">
+              <p:cTn id="31" fill="hold" presetID="10" presetClass="entr" presetSubtype="0" dur="600" nodeType="clickEffect">
                 <p:stCondLst>
                   <p:cond delay="4200"/>
                 </p:stCondLst>
@@ -7282,7 +7484,7 @@
               </p:cTn>
             </p:par>
             <p:par>
-              <p:cTn id="33" fill="hold" presetID="10" presetClass="entr" presetSubtype="0" dur="600" nodeType="clickEffect">
+              <p:cTn id="33" fill="hold" presetID="10" presetClass="entr" presetSubtype="0" dur="500" nodeType="clickEffect">
                 <p:stCondLst>
                   <p:cond delay="4600"/>
                 </p:stCondLst>
@@ -8499,8 +8701,8 @@
         </p:nvSpPr>
         <p:spPr>
           <a:xfrm>
-            <a:off x="747707" y="85779"/>
-            <a:ext cx="2649177" cy="36576"/>
+            <a:off x="658509" y="107236"/>
+            <a:ext cx="1610452" cy="36576"/>
           </a:xfrm>
           <a:prstGeom prst="rect">
             <a:avLst/>
@@ -8547,7 +8749,7 @@
             <p:par>
               <p:cTn id="10" fill="hold" presetID="10" presetClass="entr" presetSubtype="0" dur="600" nodeType="clickEffect">
                 <p:stCondLst>
-                  <p:cond delay="0" evt="onClick"/>
+                  <p:cond evt="onClick" delay="0"/>
                 </p:stCondLst>
                 <p:childTnLst/>
               </p:cTn>
@@ -8561,7 +8763,7 @@
               </p:cTn>
             </p:par>
             <p:par>
-              <p:cTn id="12" fill="hold" presetID="10" presetClass="entr" presetSubtype="0" dur="600" nodeType="clickEffect">
+              <p:cTn id="12" fill="hold" presetID="10" presetClass="entr" presetSubtype="0" dur="700" nodeType="clickEffect">
                 <p:stCondLst>
                   <p:cond delay="400"/>
                 </p:stCondLst>
@@ -8585,7 +8787,7 @@
               </p:cTn>
             </p:par>
             <p:par>
-              <p:cTn id="15" fill="hold" presetID="10" presetClass="entr" presetSubtype="0" dur="600" nodeType="clickEffect">
+              <p:cTn id="15" fill="hold" presetID="10" presetClass="entr" presetSubtype="0" dur="500" nodeType="clickEffect">
                 <p:stCondLst>
                   <p:cond delay="1000"/>
                 </p:stCondLst>
@@ -8681,7 +8883,7 @@
               </p:cTn>
             </p:par>
             <p:par>
-              <p:cTn id="27" fill="hold" presetID="10" presetClass="entr" presetSubtype="0" dur="500" nodeType="clickEffect">
+              <p:cTn id="27" fill="hold" presetID="10" presetClass="entr" presetSubtype="0" dur="600" nodeType="clickEffect">
                 <p:stCondLst>
                   <p:cond delay="3400"/>
                 </p:stCondLst>
@@ -8705,7 +8907,7 @@
               </p:cTn>
             </p:par>
             <p:par>
-              <p:cTn id="30" fill="hold" presetID="10" presetClass="entr" presetSubtype="0" dur="600" nodeType="clickEffect">
+              <p:cTn id="30" fill="hold" presetID="10" presetClass="entr" presetSubtype="0" dur="500" nodeType="clickEffect">
                 <p:stCondLst>
                   <p:cond delay="4000"/>
                 </p:stCondLst>
@@ -8729,7 +8931,7 @@
               </p:cTn>
             </p:par>
             <p:par>
-              <p:cTn id="33" fill="hold" presetID="10" presetClass="entr" presetSubtype="0" dur="600" nodeType="clickEffect">
+              <p:cTn id="33" fill="hold" presetID="10" presetClass="entr" presetSubtype="0" dur="700" nodeType="clickEffect">
                 <p:stCondLst>
                   <p:cond delay="4600"/>
                 </p:stCondLst>
@@ -9697,7 +9899,7 @@
             <p:par>
               <p:cTn id="10" fill="hold" presetID="10" presetClass="entr" presetSubtype="0" dur="600" nodeType="clickEffect">
                 <p:stCondLst>
-                  <p:cond delay="0" evt="onClick"/>
+                  <p:cond evt="onClick" delay="0"/>
                 </p:stCondLst>
                 <p:childTnLst/>
               </p:cTn>
@@ -9719,7 +9921,7 @@
               </p:cTn>
             </p:par>
             <p:par>
-              <p:cTn id="13" fill="hold" presetID="10" presetClass="entr" presetSubtype="0" dur="600" nodeType="clickEffect">
+              <p:cTn id="13" fill="hold" presetID="10" presetClass="entr" presetSubtype="0" dur="700" nodeType="clickEffect">
                 <p:stCondLst>
                   <p:cond delay="600"/>
                 </p:stCondLst>
@@ -9743,7 +9945,7 @@
               </p:cTn>
             </p:par>
             <p:par>
-              <p:cTn id="16" fill="hold" presetID="10" presetClass="entr" presetSubtype="0" dur="600" nodeType="clickEffect">
+              <p:cTn id="16" fill="hold" presetID="10" presetClass="entr" presetSubtype="0" dur="700" nodeType="clickEffect">
                 <p:stCondLst>
                   <p:cond delay="1200"/>
                 </p:stCondLst>
@@ -9815,7 +10017,7 @@
               </p:cTn>
             </p:par>
             <p:par>
-              <p:cTn id="25" fill="hold" presetID="10" presetClass="entr" presetSubtype="0" dur="700" nodeType="clickEffect">
+              <p:cTn id="25" fill="hold" presetID="10" presetClass="entr" presetSubtype="0" dur="600" nodeType="clickEffect">
                 <p:stCondLst>
                   <p:cond delay="3000"/>
                 </p:stCondLst>
@@ -9839,7 +10041,7 @@
               </p:cTn>
             </p:par>
             <p:par>
-              <p:cTn id="28" fill="hold" presetID="10" presetClass="entr" presetSubtype="0" dur="600" nodeType="clickEffect">
+              <p:cTn id="28" fill="hold" presetID="10" presetClass="entr" presetSubtype="0" dur="500" nodeType="clickEffect">
                 <p:stCondLst>
                   <p:cond delay="3600"/>
                 </p:stCondLst>
@@ -10936,8 +11138,8 @@
         </p:nvSpPr>
         <p:spPr>
           <a:xfrm>
-            <a:off x="711838" y="128202"/>
-            <a:ext cx="2046150" cy="36576"/>
+            <a:off x="593069" y="101455"/>
+            <a:ext cx="1914588" cy="36576"/>
           </a:xfrm>
           <a:prstGeom prst="rect">
             <a:avLst/>
@@ -10984,13 +11186,13 @@
             <p:par>
               <p:cTn id="10" fill="hold" presetID="10" presetClass="entr" presetSubtype="0" dur="600" nodeType="clickEffect">
                 <p:stCondLst>
-                  <p:cond delay="0" evt="onClick"/>
-                </p:stCondLst>
-                <p:childTnLst/>
-              </p:cTn>
-            </p:par>
-            <p:par>
-              <p:cTn id="11" fill="hold" presetID="10" presetClass="entr" presetSubtype="0" dur="500" nodeType="clickEffect">
+                  <p:cond evt="onClick" delay="0"/>
+                </p:stCondLst>
+                <p:childTnLst/>
+              </p:cTn>
+            </p:par>
+            <p:par>
+              <p:cTn id="11" fill="hold" presetID="10" presetClass="entr" presetSubtype="0" dur="600" nodeType="clickEffect">
                 <p:stCondLst>
                   <p:cond delay="200"/>
                 </p:stCondLst>
@@ -11014,7 +11216,7 @@
               </p:cTn>
             </p:par>
             <p:par>
-              <p:cTn id="14" fill="hold" presetID="10" presetClass="entr" presetSubtype="0" dur="700" nodeType="clickEffect">
+              <p:cTn id="14" fill="hold" presetID="10" presetClass="entr" presetSubtype="0" dur="600" nodeType="clickEffect">
                 <p:stCondLst>
                   <p:cond delay="800"/>
                 </p:stCondLst>
@@ -11054,7 +11256,7 @@
               </p:cTn>
             </p:par>
             <p:par>
-              <p:cTn id="19" fill="hold" presetID="10" presetClass="entr" presetSubtype="0" dur="600" nodeType="clickEffect">
+              <p:cTn id="19" fill="hold" presetID="10" presetClass="entr" presetSubtype="0" dur="500" nodeType="clickEffect">
                 <p:stCondLst>
                   <p:cond delay="1800"/>
                 </p:stCondLst>
@@ -11198,7 +11400,7 @@
               </p:cTn>
             </p:par>
             <p:par>
-              <p:cTn id="37" fill="hold" presetID="10" presetClass="entr" presetSubtype="0" dur="600" nodeType="clickEffect">
+              <p:cTn id="37" fill="hold" presetID="10" presetClass="entr" presetSubtype="0" dur="700" nodeType="clickEffect">
                 <p:stCondLst>
                   <p:cond delay="5400"/>
                 </p:stCondLst>
@@ -12160,8 +12362,8 @@
         </p:nvSpPr>
         <p:spPr>
           <a:xfrm>
-            <a:off x="894292" y="114100"/>
-            <a:ext cx="1765894" cy="36576"/>
+            <a:off x="701874" y="120304"/>
+            <a:ext cx="1922544" cy="36576"/>
           </a:xfrm>
           <a:prstGeom prst="rect">
             <a:avLst/>
@@ -12208,7 +12410,7 @@
             <p:par>
               <p:cTn id="10" fill="hold" presetID="10" presetClass="entr" presetSubtype="0" dur="600" nodeType="clickEffect">
                 <p:stCondLst>
-                  <p:cond delay="0" evt="onClick"/>
+                  <p:cond evt="onClick" delay="0"/>
                 </p:stCondLst>
                 <p:childTnLst/>
               </p:cTn>
@@ -12222,7 +12424,7 @@
               </p:cTn>
             </p:par>
             <p:par>
-              <p:cTn id="12" fill="hold" presetID="10" presetClass="entr" presetSubtype="0" dur="700" nodeType="clickEffect">
+              <p:cTn id="12" fill="hold" presetID="10" presetClass="entr" presetSubtype="0" dur="600" nodeType="clickEffect">
                 <p:stCondLst>
                   <p:cond delay="400"/>
                 </p:stCondLst>
@@ -12246,7 +12448,7 @@
               </p:cTn>
             </p:par>
             <p:par>
-              <p:cTn id="15" fill="hold" presetID="10" presetClass="entr" presetSubtype="0" dur="700" nodeType="clickEffect">
+              <p:cTn id="15" fill="hold" presetID="10" presetClass="entr" presetSubtype="0" dur="600" nodeType="clickEffect">
                 <p:stCondLst>
                   <p:cond delay="1000"/>
                 </p:stCondLst>
@@ -12254,7 +12456,7 @@
               </p:cTn>
             </p:par>
             <p:par>
-              <p:cTn id="16" fill="hold" presetID="10" presetClass="entr" presetSubtype="0" dur="500" nodeType="clickEffect">
+              <p:cTn id="16" fill="hold" presetID="10" presetClass="entr" presetSubtype="0" dur="600" nodeType="clickEffect">
                 <p:stCondLst>
                   <p:cond delay="1200"/>
                 </p:stCondLst>
@@ -12262,7 +12464,7 @@
               </p:cTn>
             </p:par>
             <p:par>
-              <p:cTn id="17" fill="hold" presetID="10" presetClass="entr" presetSubtype="0" dur="600" nodeType="clickEffect">
+              <p:cTn id="17" fill="hold" presetID="10" presetClass="entr" presetSubtype="0" dur="700" nodeType="clickEffect">
                 <p:stCondLst>
                   <p:cond delay="1400"/>
                 </p:stCondLst>
@@ -12302,7 +12504,7 @@
               </p:cTn>
             </p:par>
             <p:par>
-              <p:cTn id="22" fill="hold" presetID="10" presetClass="entr" presetSubtype="0" dur="600" nodeType="clickEffect">
+              <p:cTn id="22" fill="hold" presetID="10" presetClass="entr" presetSubtype="0" dur="500" nodeType="clickEffect">
                 <p:stCondLst>
                   <p:cond delay="2400"/>
                 </p:stCondLst>
@@ -12310,7 +12512,7 @@
               </p:cTn>
             </p:par>
             <p:par>
-              <p:cTn id="23" fill="hold" presetID="10" presetClass="entr" presetSubtype="0" dur="600" nodeType="clickEffect">
+              <p:cTn id="23" fill="hold" presetID="10" presetClass="entr" presetSubtype="0" dur="500" nodeType="clickEffect">
                 <p:stCondLst>
                   <p:cond delay="2600"/>
                 </p:stCondLst>
@@ -12326,7 +12528,7 @@
               </p:cTn>
             </p:par>
             <p:par>
-              <p:cTn id="25" fill="hold" presetID="10" presetClass="entr" presetSubtype="0" dur="700" nodeType="clickEffect">
+              <p:cTn id="25" fill="hold" presetID="10" presetClass="entr" presetSubtype="0" dur="600" nodeType="clickEffect">
                 <p:stCondLst>
                   <p:cond delay="3000"/>
                 </p:stCondLst>
@@ -12350,7 +12552,7 @@
               </p:cTn>
             </p:par>
             <p:par>
-              <p:cTn id="28" fill="hold" presetID="10" presetClass="entr" presetSubtype="0" dur="500" nodeType="clickEffect">
+              <p:cTn id="28" fill="hold" presetID="10" presetClass="entr" presetSubtype="0" dur="600" nodeType="clickEffect">
                 <p:stCondLst>
                   <p:cond delay="3600"/>
                 </p:stCondLst>
@@ -12635,8 +12837,8 @@
         </p:nvSpPr>
         <p:spPr>
           <a:xfrm>
-            <a:off x="825070" y="122418"/>
-            <a:ext cx="2163126" cy="36576"/>
+            <a:off x="466105" y="115935"/>
+            <a:ext cx="1688648" cy="36576"/>
           </a:xfrm>
           <a:prstGeom prst="rect">
             <a:avLst/>
@@ -12675,80 +12877,6 @@
   <p:clrMapOvr>
     <a:masterClrMapping/>
   </p:clrMapOvr>
-  <p:timing>
-    <p:tnLst>
-      <p:par>
-        <p:cTn id="1" dur="indefinite" restart="whenNotActive" nodeType="tmRoot">
-          <p:childTnLst>
-            <p:par>
-              <p:cTn id="10" fill="hold" presetID="10" presetClass="entr" presetSubtype="0" dur="700" nodeType="clickEffect">
-                <p:stCondLst>
-                  <p:cond delay="0" evt="onClick"/>
-                </p:stCondLst>
-                <p:childTnLst/>
-              </p:cTn>
-            </p:par>
-            <p:par>
-              <p:cTn id="11" fill="hold" presetID="10" presetClass="entr" presetSubtype="0" dur="500" nodeType="clickEffect">
-                <p:stCondLst>
-                  <p:cond delay="200"/>
-                </p:stCondLst>
-                <p:childTnLst/>
-              </p:cTn>
-            </p:par>
-            <p:par>
-              <p:cTn id="12" fill="hold" presetID="10" presetClass="entr" presetSubtype="0" dur="600" nodeType="clickEffect">
-                <p:stCondLst>
-                  <p:cond delay="400"/>
-                </p:stCondLst>
-                <p:childTnLst/>
-              </p:cTn>
-            </p:par>
-            <p:par>
-              <p:cTn id="13" fill="hold" presetID="10" presetClass="entr" presetSubtype="0" dur="600" nodeType="clickEffect">
-                <p:stCondLst>
-                  <p:cond delay="600"/>
-                </p:stCondLst>
-                <p:childTnLst/>
-              </p:cTn>
-            </p:par>
-            <p:par>
-              <p:cTn id="14" fill="hold" presetID="10" presetClass="entr" presetSubtype="0" dur="700" nodeType="clickEffect">
-                <p:stCondLst>
-                  <p:cond delay="800"/>
-                </p:stCondLst>
-                <p:childTnLst/>
-              </p:cTn>
-            </p:par>
-            <p:par>
-              <p:cTn id="15" fill="hold" presetID="10" presetClass="entr" presetSubtype="0" dur="600" nodeType="clickEffect">
-                <p:stCondLst>
-                  <p:cond delay="1000"/>
-                </p:stCondLst>
-                <p:childTnLst/>
-              </p:cTn>
-            </p:par>
-            <p:par>
-              <p:cTn id="16" fill="hold" presetID="10" presetClass="entr" presetSubtype="0" dur="600" nodeType="clickEffect">
-                <p:stCondLst>
-                  <p:cond delay="1200"/>
-                </p:stCondLst>
-                <p:childTnLst/>
-              </p:cTn>
-            </p:par>
-            <p:par>
-              <p:cTn id="17" fill="hold" presetID="10" presetClass="entr" presetSubtype="0" dur="600" nodeType="clickEffect">
-                <p:stCondLst>
-                  <p:cond delay="1400"/>
-                </p:stCondLst>
-                <p:childTnLst/>
-              </p:cTn>
-            </p:par>
-          </p:childTnLst>
-        </p:cTn>
-      </p:par>
-    </p:tnLst>
-  </p:timing>
 </p:sld>
 </file>
 
@@ -13759,8 +13887,8 @@
         </p:nvSpPr>
         <p:spPr>
           <a:xfrm>
-            <a:off x="708902" y="115557"/>
-            <a:ext cx="2779435" cy="36576"/>
+            <a:off x="593332" y="111815"/>
+            <a:ext cx="1980389" cy="36576"/>
           </a:xfrm>
           <a:prstGeom prst="rect">
             <a:avLst/>
@@ -13799,6 +13927,192 @@
   <p:clrMapOvr>
     <a:masterClrMapping/>
   </p:clrMapOvr>
+  <p:timing>
+    <p:tnLst>
+      <p:par>
+        <p:cTn id="1" dur="indefinite" restart="whenNotActive" nodeType="tmRoot">
+          <p:childTnLst>
+            <p:par>
+              <p:cTn id="10" fill="hold" presetID="10" presetClass="entr" presetSubtype="0" dur="600" nodeType="clickEffect">
+                <p:stCondLst>
+                  <p:cond evt="onClick" delay="0"/>
+                </p:stCondLst>
+                <p:childTnLst/>
+              </p:cTn>
+            </p:par>
+            <p:par>
+              <p:cTn id="11" fill="hold" presetID="10" presetClass="entr" presetSubtype="0" dur="600" nodeType="clickEffect">
+                <p:stCondLst>
+                  <p:cond delay="200"/>
+                </p:stCondLst>
+                <p:childTnLst/>
+              </p:cTn>
+            </p:par>
+            <p:par>
+              <p:cTn id="12" fill="hold" presetID="10" presetClass="entr" presetSubtype="0" dur="600" nodeType="clickEffect">
+                <p:stCondLst>
+                  <p:cond delay="400"/>
+                </p:stCondLst>
+                <p:childTnLst/>
+              </p:cTn>
+            </p:par>
+            <p:par>
+              <p:cTn id="13" fill="hold" presetID="10" presetClass="entr" presetSubtype="0" dur="600" nodeType="clickEffect">
+                <p:stCondLst>
+                  <p:cond delay="600"/>
+                </p:stCondLst>
+                <p:childTnLst/>
+              </p:cTn>
+            </p:par>
+            <p:par>
+              <p:cTn id="14" fill="hold" presetID="10" presetClass="entr" presetSubtype="0" dur="600" nodeType="clickEffect">
+                <p:stCondLst>
+                  <p:cond delay="800"/>
+                </p:stCondLst>
+                <p:childTnLst/>
+              </p:cTn>
+            </p:par>
+            <p:par>
+              <p:cTn id="15" fill="hold" presetID="10" presetClass="entr" presetSubtype="0" dur="600" nodeType="clickEffect">
+                <p:stCondLst>
+                  <p:cond delay="1000"/>
+                </p:stCondLst>
+                <p:childTnLst/>
+              </p:cTn>
+            </p:par>
+            <p:par>
+              <p:cTn id="16" fill="hold" presetID="10" presetClass="entr" presetSubtype="0" dur="600" nodeType="clickEffect">
+                <p:stCondLst>
+                  <p:cond delay="1200"/>
+                </p:stCondLst>
+                <p:childTnLst/>
+              </p:cTn>
+            </p:par>
+            <p:par>
+              <p:cTn id="17" fill="hold" presetID="10" presetClass="entr" presetSubtype="0" dur="600" nodeType="clickEffect">
+                <p:stCondLst>
+                  <p:cond delay="1400"/>
+                </p:stCondLst>
+                <p:childTnLst/>
+              </p:cTn>
+            </p:par>
+            <p:par>
+              <p:cTn id="18" fill="hold" presetID="10" presetClass="entr" presetSubtype="0" dur="600" nodeType="clickEffect">
+                <p:stCondLst>
+                  <p:cond delay="1600"/>
+                </p:stCondLst>
+                <p:childTnLst/>
+              </p:cTn>
+            </p:par>
+            <p:par>
+              <p:cTn id="19" fill="hold" presetID="10" presetClass="entr" presetSubtype="0" dur="600" nodeType="clickEffect">
+                <p:stCondLst>
+                  <p:cond delay="1800"/>
+                </p:stCondLst>
+                <p:childTnLst/>
+              </p:cTn>
+            </p:par>
+            <p:par>
+              <p:cTn id="20" fill="hold" presetID="10" presetClass="entr" presetSubtype="0" dur="600" nodeType="clickEffect">
+                <p:stCondLst>
+                  <p:cond delay="2000"/>
+                </p:stCondLst>
+                <p:childTnLst/>
+              </p:cTn>
+            </p:par>
+            <p:par>
+              <p:cTn id="21" fill="hold" presetID="10" presetClass="entr" presetSubtype="0" dur="600" nodeType="clickEffect">
+                <p:stCondLst>
+                  <p:cond delay="2200"/>
+                </p:stCondLst>
+                <p:childTnLst/>
+              </p:cTn>
+            </p:par>
+            <p:par>
+              <p:cTn id="22" fill="hold" presetID="10" presetClass="entr" presetSubtype="0" dur="600" nodeType="clickEffect">
+                <p:stCondLst>
+                  <p:cond delay="2400"/>
+                </p:stCondLst>
+                <p:childTnLst/>
+              </p:cTn>
+            </p:par>
+            <p:par>
+              <p:cTn id="23" fill="hold" presetID="10" presetClass="entr" presetSubtype="0" dur="600" nodeType="clickEffect">
+                <p:stCondLst>
+                  <p:cond delay="2600"/>
+                </p:stCondLst>
+                <p:childTnLst/>
+              </p:cTn>
+            </p:par>
+            <p:par>
+              <p:cTn id="24" fill="hold" presetID="10" presetClass="entr" presetSubtype="0" dur="600" nodeType="clickEffect">
+                <p:stCondLst>
+                  <p:cond delay="2800"/>
+                </p:stCondLst>
+                <p:childTnLst/>
+              </p:cTn>
+            </p:par>
+            <p:par>
+              <p:cTn id="25" fill="hold" presetID="10" presetClass="entr" presetSubtype="0" dur="600" nodeType="clickEffect">
+                <p:stCondLst>
+                  <p:cond delay="3000"/>
+                </p:stCondLst>
+                <p:childTnLst/>
+              </p:cTn>
+            </p:par>
+            <p:par>
+              <p:cTn id="26" fill="hold" presetID="10" presetClass="entr" presetSubtype="0" dur="600" nodeType="clickEffect">
+                <p:stCondLst>
+                  <p:cond delay="3200"/>
+                </p:stCondLst>
+                <p:childTnLst/>
+              </p:cTn>
+            </p:par>
+            <p:par>
+              <p:cTn id="27" fill="hold" presetID="10" presetClass="entr" presetSubtype="0" dur="600" nodeType="clickEffect">
+                <p:stCondLst>
+                  <p:cond delay="3400"/>
+                </p:stCondLst>
+                <p:childTnLst/>
+              </p:cTn>
+            </p:par>
+            <p:par>
+              <p:cTn id="28" fill="hold" presetID="10" presetClass="entr" presetSubtype="0" dur="600" nodeType="clickEffect">
+                <p:stCondLst>
+                  <p:cond delay="3600"/>
+                </p:stCondLst>
+                <p:childTnLst/>
+              </p:cTn>
+            </p:par>
+            <p:par>
+              <p:cTn id="29" fill="hold" presetID="10" presetClass="entr" presetSubtype="0" dur="700" nodeType="clickEffect">
+                <p:stCondLst>
+                  <p:cond delay="3800"/>
+                </p:stCondLst>
+                <p:childTnLst/>
+              </p:cTn>
+            </p:par>
+            <p:par>
+              <p:cTn id="30" fill="hold" presetID="10" presetClass="entr" presetSubtype="0" dur="600" nodeType="clickEffect">
+                <p:stCondLst>
+                  <p:cond delay="4000"/>
+                </p:stCondLst>
+                <p:childTnLst/>
+              </p:cTn>
+            </p:par>
+            <p:par>
+              <p:cTn id="31" fill="hold" presetID="10" presetClass="entr" presetSubtype="0" dur="600" nodeType="clickEffect">
+                <p:stCondLst>
+                  <p:cond delay="4200"/>
+                </p:stCondLst>
+                <p:childTnLst/>
+              </p:cTn>
+            </p:par>
+          </p:childTnLst>
+        </p:cTn>
+      </p:par>
+    </p:tnLst>
+  </p:timing>
 </p:sld>
 </file>
 
@@ -14809,232 +15123,6 @@
   <p:clrMapOvr>
     <a:masterClrMapping/>
   </p:clrMapOvr>
-  <p:timing>
-    <p:tnLst>
-      <p:par>
-        <p:cTn id="1" dur="indefinite" restart="whenNotActive" nodeType="tmRoot">
-          <p:childTnLst>
-            <p:par>
-              <p:cTn id="10" fill="hold" presetID="10" presetClass="entr" presetSubtype="0" dur="600" nodeType="clickEffect">
-                <p:stCondLst>
-                  <p:cond delay="0" evt="onClick"/>
-                </p:stCondLst>
-                <p:childTnLst/>
-              </p:cTn>
-            </p:par>
-            <p:par>
-              <p:cTn id="11" fill="hold" presetID="10" presetClass="entr" presetSubtype="0" dur="600" nodeType="clickEffect">
-                <p:stCondLst>
-                  <p:cond delay="200"/>
-                </p:stCondLst>
-                <p:childTnLst/>
-              </p:cTn>
-            </p:par>
-            <p:par>
-              <p:cTn id="12" fill="hold" presetID="10" presetClass="entr" presetSubtype="0" dur="600" nodeType="clickEffect">
-                <p:stCondLst>
-                  <p:cond delay="400"/>
-                </p:stCondLst>
-                <p:childTnLst/>
-              </p:cTn>
-            </p:par>
-            <p:par>
-              <p:cTn id="13" fill="hold" presetID="10" presetClass="entr" presetSubtype="0" dur="600" nodeType="clickEffect">
-                <p:stCondLst>
-                  <p:cond delay="600"/>
-                </p:stCondLst>
-                <p:childTnLst/>
-              </p:cTn>
-            </p:par>
-            <p:par>
-              <p:cTn id="14" fill="hold" presetID="10" presetClass="entr" presetSubtype="0" dur="600" nodeType="clickEffect">
-                <p:stCondLst>
-                  <p:cond delay="800"/>
-                </p:stCondLst>
-                <p:childTnLst/>
-              </p:cTn>
-            </p:par>
-            <p:par>
-              <p:cTn id="15" fill="hold" presetID="10" presetClass="entr" presetSubtype="0" dur="600" nodeType="clickEffect">
-                <p:stCondLst>
-                  <p:cond delay="1000"/>
-                </p:stCondLst>
-                <p:childTnLst/>
-              </p:cTn>
-            </p:par>
-            <p:par>
-              <p:cTn id="16" fill="hold" presetID="10" presetClass="entr" presetSubtype="0" dur="500" nodeType="clickEffect">
-                <p:stCondLst>
-                  <p:cond delay="1200"/>
-                </p:stCondLst>
-                <p:childTnLst/>
-              </p:cTn>
-            </p:par>
-            <p:par>
-              <p:cTn id="17" fill="hold" presetID="10" presetClass="entr" presetSubtype="0" dur="700" nodeType="clickEffect">
-                <p:stCondLst>
-                  <p:cond delay="1400"/>
-                </p:stCondLst>
-                <p:childTnLst/>
-              </p:cTn>
-            </p:par>
-            <p:par>
-              <p:cTn id="18" fill="hold" presetID="10" presetClass="entr" presetSubtype="0" dur="600" nodeType="clickEffect">
-                <p:stCondLst>
-                  <p:cond delay="1600"/>
-                </p:stCondLst>
-                <p:childTnLst/>
-              </p:cTn>
-            </p:par>
-            <p:par>
-              <p:cTn id="19" fill="hold" presetID="10" presetClass="entr" presetSubtype="0" dur="600" nodeType="clickEffect">
-                <p:stCondLst>
-                  <p:cond delay="1800"/>
-                </p:stCondLst>
-                <p:childTnLst/>
-              </p:cTn>
-            </p:par>
-            <p:par>
-              <p:cTn id="20" fill="hold" presetID="10" presetClass="entr" presetSubtype="0" dur="500" nodeType="clickEffect">
-                <p:stCondLst>
-                  <p:cond delay="2000"/>
-                </p:stCondLst>
-                <p:childTnLst/>
-              </p:cTn>
-            </p:par>
-            <p:par>
-              <p:cTn id="21" fill="hold" presetID="10" presetClass="entr" presetSubtype="0" dur="600" nodeType="clickEffect">
-                <p:stCondLst>
-                  <p:cond delay="2200"/>
-                </p:stCondLst>
-                <p:childTnLst/>
-              </p:cTn>
-            </p:par>
-            <p:par>
-              <p:cTn id="22" fill="hold" presetID="10" presetClass="entr" presetSubtype="0" dur="600" nodeType="clickEffect">
-                <p:stCondLst>
-                  <p:cond delay="2400"/>
-                </p:stCondLst>
-                <p:childTnLst/>
-              </p:cTn>
-            </p:par>
-            <p:par>
-              <p:cTn id="23" fill="hold" presetID="10" presetClass="entr" presetSubtype="0" dur="600" nodeType="clickEffect">
-                <p:stCondLst>
-                  <p:cond delay="2600"/>
-                </p:stCondLst>
-                <p:childTnLst/>
-              </p:cTn>
-            </p:par>
-            <p:par>
-              <p:cTn id="24" fill="hold" presetID="10" presetClass="entr" presetSubtype="0" dur="600" nodeType="clickEffect">
-                <p:stCondLst>
-                  <p:cond delay="2800"/>
-                </p:stCondLst>
-                <p:childTnLst/>
-              </p:cTn>
-            </p:par>
-            <p:par>
-              <p:cTn id="25" fill="hold" presetID="10" presetClass="entr" presetSubtype="0" dur="500" nodeType="clickEffect">
-                <p:stCondLst>
-                  <p:cond delay="3000"/>
-                </p:stCondLst>
-                <p:childTnLst/>
-              </p:cTn>
-            </p:par>
-            <p:par>
-              <p:cTn id="26" fill="hold" presetID="10" presetClass="entr" presetSubtype="0" dur="600" nodeType="clickEffect">
-                <p:stCondLst>
-                  <p:cond delay="3200"/>
-                </p:stCondLst>
-                <p:childTnLst/>
-              </p:cTn>
-            </p:par>
-            <p:par>
-              <p:cTn id="27" fill="hold" presetID="10" presetClass="entr" presetSubtype="0" dur="600" nodeType="clickEffect">
-                <p:stCondLst>
-                  <p:cond delay="3400"/>
-                </p:stCondLst>
-                <p:childTnLst/>
-              </p:cTn>
-            </p:par>
-            <p:par>
-              <p:cTn id="28" fill="hold" presetID="10" presetClass="entr" presetSubtype="0" dur="600" nodeType="clickEffect">
-                <p:stCondLst>
-                  <p:cond delay="3600"/>
-                </p:stCondLst>
-                <p:childTnLst/>
-              </p:cTn>
-            </p:par>
-            <p:par>
-              <p:cTn id="29" fill="hold" presetID="10" presetClass="entr" presetSubtype="0" dur="600" nodeType="clickEffect">
-                <p:stCondLst>
-                  <p:cond delay="3800"/>
-                </p:stCondLst>
-                <p:childTnLst/>
-              </p:cTn>
-            </p:par>
-            <p:par>
-              <p:cTn id="30" fill="hold" presetID="10" presetClass="entr" presetSubtype="0" dur="600" nodeType="clickEffect">
-                <p:stCondLst>
-                  <p:cond delay="4000"/>
-                </p:stCondLst>
-                <p:childTnLst/>
-              </p:cTn>
-            </p:par>
-            <p:par>
-              <p:cTn id="31" fill="hold" presetID="10" presetClass="entr" presetSubtype="0" dur="600" nodeType="clickEffect">
-                <p:stCondLst>
-                  <p:cond delay="4200"/>
-                </p:stCondLst>
-                <p:childTnLst/>
-              </p:cTn>
-            </p:par>
-            <p:par>
-              <p:cTn id="32" fill="hold" presetID="10" presetClass="entr" presetSubtype="0" dur="700" nodeType="clickEffect">
-                <p:stCondLst>
-                  <p:cond delay="4400"/>
-                </p:stCondLst>
-                <p:childTnLst/>
-              </p:cTn>
-            </p:par>
-            <p:par>
-              <p:cTn id="33" fill="hold" presetID="10" presetClass="entr" presetSubtype="0" dur="600" nodeType="clickEffect">
-                <p:stCondLst>
-                  <p:cond delay="4600"/>
-                </p:stCondLst>
-                <p:childTnLst/>
-              </p:cTn>
-            </p:par>
-            <p:par>
-              <p:cTn id="34" fill="hold" presetID="10" presetClass="entr" presetSubtype="0" dur="600" nodeType="clickEffect">
-                <p:stCondLst>
-                  <p:cond delay="4800"/>
-                </p:stCondLst>
-                <p:childTnLst/>
-              </p:cTn>
-            </p:par>
-            <p:par>
-              <p:cTn id="35" fill="hold" presetID="10" presetClass="entr" presetSubtype="0" dur="600" nodeType="clickEffect">
-                <p:stCondLst>
-                  <p:cond delay="5000"/>
-                </p:stCondLst>
-                <p:childTnLst/>
-              </p:cTn>
-            </p:par>
-            <p:par>
-              <p:cTn id="36" fill="hold" presetID="10" presetClass="entr" presetSubtype="0" dur="600" nodeType="clickEffect">
-                <p:stCondLst>
-                  <p:cond delay="5200"/>
-                </p:stCondLst>
-                <p:childTnLst/>
-              </p:cTn>
-            </p:par>
-          </p:childTnLst>
-        </p:cTn>
-      </p:par>
-    </p:tnLst>
-  </p:timing>
 </p:sld>
 </file>
 
@@ -15884,8 +15972,8 @@
         </p:nvSpPr>
         <p:spPr>
           <a:xfrm>
-            <a:off x="770633" y="88473"/>
-            <a:ext cx="3114261" cy="36576"/>
+            <a:off x="482972" y="131602"/>
+            <a:ext cx="2388952" cy="36576"/>
           </a:xfrm>
           <a:prstGeom prst="rect">
             <a:avLst/>
@@ -15932,7 +16020,7 @@
             <p:par>
               <p:cTn id="10" fill="hold" presetID="10" presetClass="entr" presetSubtype="0" dur="600" nodeType="clickEffect">
                 <p:stCondLst>
-                  <p:cond delay="0" evt="onClick"/>
+                  <p:cond evt="onClick" delay="0"/>
                 </p:stCondLst>
                 <p:childTnLst/>
               </p:cTn>
@@ -17347,8 +17435,8 @@
         </p:nvSpPr>
         <p:spPr>
           <a:xfrm>
-            <a:off x="470082" y="82657"/>
-            <a:ext cx="1858696" cy="36576"/>
+            <a:off x="783792" y="84982"/>
+            <a:ext cx="1821004" cy="36576"/>
           </a:xfrm>
           <a:prstGeom prst="rect">
             <a:avLst/>
@@ -17395,7 +17483,7 @@
             <p:par>
               <p:cTn id="10" fill="hold" presetID="10" presetClass="entr" presetSubtype="0" dur="600" nodeType="clickEffect">
                 <p:stCondLst>
-                  <p:cond delay="0" evt="onClick"/>
+                  <p:cond evt="onClick" delay="0"/>
                 </p:stCondLst>
                 <p:childTnLst/>
               </p:cTn>
@@ -17441,7 +17529,7 @@
               </p:cTn>
             </p:par>
             <p:par>
-              <p:cTn id="16" fill="hold" presetID="10" presetClass="entr" presetSubtype="0" dur="600" nodeType="clickEffect">
+              <p:cTn id="16" fill="hold" presetID="10" presetClass="entr" presetSubtype="0" dur="700" nodeType="clickEffect">
                 <p:stCondLst>
                   <p:cond delay="1200"/>
                 </p:stCondLst>
@@ -17718,8 +17806,8 @@
         </p:nvSpPr>
         <p:spPr>
           <a:xfrm>
-            <a:off x="751810" y="132989"/>
-            <a:ext cx="2541463" cy="36576"/>
+            <a:off x="776836" y="130472"/>
+            <a:ext cx="1605314" cy="36576"/>
           </a:xfrm>
           <a:prstGeom prst="rect">
             <a:avLst/>
@@ -17766,13 +17854,13 @@
             <p:par>
               <p:cTn id="10" fill="hold" presetID="10" presetClass="entr" presetSubtype="0" dur="600" nodeType="clickEffect">
                 <p:stCondLst>
-                  <p:cond delay="0" evt="onClick"/>
-                </p:stCondLst>
-                <p:childTnLst/>
-              </p:cTn>
-            </p:par>
-            <p:par>
-              <p:cTn id="11" fill="hold" presetID="10" presetClass="entr" presetSubtype="0" dur="500" nodeType="clickEffect">
+                  <p:cond evt="onClick" delay="0"/>
+                </p:stCondLst>
+                <p:childTnLst/>
+              </p:cTn>
+            </p:par>
+            <p:par>
+              <p:cTn id="11" fill="hold" presetID="10" presetClass="entr" presetSubtype="0" dur="600" nodeType="clickEffect">
                 <p:stCondLst>
                   <p:cond delay="200"/>
                 </p:stCondLst>
@@ -17788,7 +17876,7 @@
               </p:cTn>
             </p:par>
             <p:par>
-              <p:cTn id="13" fill="hold" presetID="10" presetClass="entr" presetSubtype="0" dur="600" nodeType="clickEffect">
+              <p:cTn id="13" fill="hold" presetID="10" presetClass="entr" presetSubtype="0" dur="500" nodeType="clickEffect">
                 <p:stCondLst>
                   <p:cond delay="600"/>
                 </p:stCondLst>

--- a/output/Devoir N°2_redesigned.pptx
+++ b/output/Devoir N°2_redesigned.pptx
@@ -2254,112 +2254,9 @@
   <p:clrMapOvr>
     <a:masterClrMapping/>
   </p:clrMapOvr>
-  <p:timing>
-    <p:tnLst>
-      <p:par>
-        <p:cTn id="1" dur="indefinite" restart="whenNotActive" nodeType="tmRoot">
-          <p:childTnLst>
-            <p:par>
-              <p:cTn id="10" fill="hold" presetID="10" presetClass="entr" presetSubtype="0" dur="600" nodeType="clickEffect">
-                <p:stCondLst>
-                  <p:cond evt="onClick" delay="0"/>
-                </p:stCondLst>
-                <p:childTnLst/>
-              </p:cTn>
-            </p:par>
-            <p:par>
-              <p:cTn id="11" fill="hold" presetID="10" presetClass="entr" presetSubtype="0" dur="600" nodeType="clickEffect">
-                <p:stCondLst>
-                  <p:cond delay="200"/>
-                </p:stCondLst>
-                <p:childTnLst/>
-              </p:cTn>
-            </p:par>
-            <p:par>
-              <p:cTn id="12" fill="hold" presetID="10" presetClass="entr" presetSubtype="0" dur="600" nodeType="clickEffect">
-                <p:stCondLst>
-                  <p:cond delay="400"/>
-                </p:stCondLst>
-                <p:childTnLst/>
-              </p:cTn>
-            </p:par>
-            <p:par>
-              <p:cTn id="13" fill="hold" presetID="10" presetClass="entr" presetSubtype="0" dur="600" nodeType="clickEffect">
-                <p:stCondLst>
-                  <p:cond delay="600"/>
-                </p:stCondLst>
-                <p:childTnLst/>
-              </p:cTn>
-            </p:par>
-            <p:par>
-              <p:cTn id="14" fill="hold" presetID="10" presetClass="entr" presetSubtype="0" dur="600" nodeType="clickEffect">
-                <p:stCondLst>
-                  <p:cond delay="800"/>
-                </p:stCondLst>
-                <p:childTnLst/>
-              </p:cTn>
-            </p:par>
-            <p:par>
-              <p:cTn id="15" fill="hold" presetID="10" presetClass="entr" presetSubtype="0" dur="600" nodeType="clickEffect">
-                <p:stCondLst>
-                  <p:cond delay="1000"/>
-                </p:stCondLst>
-                <p:childTnLst/>
-              </p:cTn>
-            </p:par>
-            <p:par>
-              <p:cTn id="16" fill="hold" presetID="10" presetClass="entr" presetSubtype="0" dur="600" nodeType="clickEffect">
-                <p:stCondLst>
-                  <p:cond delay="1200"/>
-                </p:stCondLst>
-                <p:childTnLst/>
-              </p:cTn>
-            </p:par>
-            <p:par>
-              <p:cTn id="17" fill="hold" presetID="10" presetClass="entr" presetSubtype="0" dur="600" nodeType="clickEffect">
-                <p:stCondLst>
-                  <p:cond delay="1400"/>
-                </p:stCondLst>
-                <p:childTnLst/>
-              </p:cTn>
-            </p:par>
-            <p:par>
-              <p:cTn id="18" fill="hold" presetID="10" presetClass="entr" presetSubtype="0" dur="600" nodeType="clickEffect">
-                <p:stCondLst>
-                  <p:cond delay="1600"/>
-                </p:stCondLst>
-                <p:childTnLst/>
-              </p:cTn>
-            </p:par>
-            <p:par>
-              <p:cTn id="19" fill="hold" presetID="10" presetClass="entr" presetSubtype="0" dur="600" nodeType="clickEffect">
-                <p:stCondLst>
-                  <p:cond delay="1800"/>
-                </p:stCondLst>
-                <p:childTnLst/>
-              </p:cTn>
-            </p:par>
-            <p:par>
-              <p:cTn id="20" fill="hold" presetID="10" presetClass="entr" presetSubtype="0" dur="600" nodeType="clickEffect">
-                <p:stCondLst>
-                  <p:cond delay="2000"/>
-                </p:stCondLst>
-                <p:childTnLst/>
-              </p:cTn>
-            </p:par>
-            <p:par>
-              <p:cTn id="21" fill="hold" presetID="10" presetClass="entr" presetSubtype="0" dur="600" nodeType="clickEffect">
-                <p:stCondLst>
-                  <p:cond delay="2200"/>
-                </p:stCondLst>
-                <p:childTnLst/>
-              </p:cTn>
-            </p:par>
-          </p:childTnLst>
-        </p:cTn>
-      </p:par>
-    </p:tnLst>
-  </p:timing>
+  <p:transition spd="med" dur="461">
+    <p:fade/>
+  </p:transition>
 </p:sld>
 </file>
 
@@ -3569,8 +3466,8 @@
         </p:nvSpPr>
         <p:spPr>
           <a:xfrm>
-            <a:off x="597092" y="88895"/>
-            <a:ext cx="2357286" cy="36576"/>
+            <a:off x="790591" y="114409"/>
+            <a:ext cx="3066708" cy="36576"/>
           </a:xfrm>
           <a:prstGeom prst="rect">
             <a:avLst/>
@@ -3609,104 +3506,9 @@
   <p:clrMapOvr>
     <a:masterClrMapping/>
   </p:clrMapOvr>
-  <p:timing>
-    <p:tnLst>
-      <p:par>
-        <p:cTn id="1" dur="indefinite" restart="whenNotActive" nodeType="tmRoot">
-          <p:childTnLst>
-            <p:par>
-              <p:cTn id="10" fill="hold" presetID="10" presetClass="entr" presetSubtype="0" dur="600" nodeType="clickEffect">
-                <p:stCondLst>
-                  <p:cond evt="onClick" delay="0"/>
-                </p:stCondLst>
-                <p:childTnLst/>
-              </p:cTn>
-            </p:par>
-            <p:par>
-              <p:cTn id="11" fill="hold" presetID="10" presetClass="entr" presetSubtype="0" dur="600" nodeType="clickEffect">
-                <p:stCondLst>
-                  <p:cond delay="200"/>
-                </p:stCondLst>
-                <p:childTnLst/>
-              </p:cTn>
-            </p:par>
-            <p:par>
-              <p:cTn id="12" fill="hold" presetID="10" presetClass="entr" presetSubtype="0" dur="600" nodeType="clickEffect">
-                <p:stCondLst>
-                  <p:cond delay="400"/>
-                </p:stCondLst>
-                <p:childTnLst/>
-              </p:cTn>
-            </p:par>
-            <p:par>
-              <p:cTn id="13" fill="hold" presetID="10" presetClass="entr" presetSubtype="0" dur="600" nodeType="clickEffect">
-                <p:stCondLst>
-                  <p:cond delay="600"/>
-                </p:stCondLst>
-                <p:childTnLst/>
-              </p:cTn>
-            </p:par>
-            <p:par>
-              <p:cTn id="14" fill="hold" presetID="10" presetClass="entr" presetSubtype="0" dur="600" nodeType="clickEffect">
-                <p:stCondLst>
-                  <p:cond delay="800"/>
-                </p:stCondLst>
-                <p:childTnLst/>
-              </p:cTn>
-            </p:par>
-            <p:par>
-              <p:cTn id="15" fill="hold" presetID="10" presetClass="entr" presetSubtype="0" dur="600" nodeType="clickEffect">
-                <p:stCondLst>
-                  <p:cond delay="1000"/>
-                </p:stCondLst>
-                <p:childTnLst/>
-              </p:cTn>
-            </p:par>
-            <p:par>
-              <p:cTn id="16" fill="hold" presetID="10" presetClass="entr" presetSubtype="0" dur="600" nodeType="clickEffect">
-                <p:stCondLst>
-                  <p:cond delay="1200"/>
-                </p:stCondLst>
-                <p:childTnLst/>
-              </p:cTn>
-            </p:par>
-            <p:par>
-              <p:cTn id="17" fill="hold" presetID="10" presetClass="entr" presetSubtype="0" dur="600" nodeType="clickEffect">
-                <p:stCondLst>
-                  <p:cond delay="1400"/>
-                </p:stCondLst>
-                <p:childTnLst/>
-              </p:cTn>
-            </p:par>
-            <p:par>
-              <p:cTn id="18" fill="hold" presetID="10" presetClass="entr" presetSubtype="0" dur="600" nodeType="clickEffect">
-                <p:stCondLst>
-                  <p:cond delay="1600"/>
-                </p:stCondLst>
-                <p:childTnLst/>
-              </p:cTn>
-            </p:par>
-            <p:par>
-              <p:cTn id="19" fill="hold" presetID="10" presetClass="entr" presetSubtype="0" dur="600" nodeType="clickEffect">
-                <p:stCondLst>
-                  <p:cond delay="1800"/>
-                </p:stCondLst>
-                <p:childTnLst/>
-              </p:cTn>
-            </p:par>
-            <p:par>
-              <p:cTn id="20" fill="hold" presetID="10" presetClass="entr" presetSubtype="0" dur="600" nodeType="clickEffect">
-                <p:stCondLst>
-                  <p:cond delay="2000"/>
-                </p:stCondLst>
-                <p:childTnLst/>
-              </p:cTn>
-            </p:par>
-          </p:childTnLst>
-        </p:cTn>
-      </p:par>
-    </p:tnLst>
-  </p:timing>
+  <p:transition spd="med" dur="524">
+    <p:fade/>
+  </p:transition>
 </p:sld>
 </file>
 
@@ -4688,208 +4490,6 @@
   <p:clrMapOvr>
     <a:masterClrMapping/>
   </p:clrMapOvr>
-  <p:timing>
-    <p:tnLst>
-      <p:par>
-        <p:cTn id="1" dur="indefinite" restart="whenNotActive" nodeType="tmRoot">
-          <p:childTnLst>
-            <p:par>
-              <p:cTn id="10" fill="hold" presetID="10" presetClass="entr" presetSubtype="0" dur="600" nodeType="clickEffect">
-                <p:stCondLst>
-                  <p:cond evt="onClick" delay="0"/>
-                </p:stCondLst>
-                <p:childTnLst/>
-              </p:cTn>
-            </p:par>
-            <p:par>
-              <p:cTn id="11" fill="hold" presetID="10" presetClass="entr" presetSubtype="0" dur="600" nodeType="clickEffect">
-                <p:stCondLst>
-                  <p:cond delay="200"/>
-                </p:stCondLst>
-                <p:childTnLst/>
-              </p:cTn>
-            </p:par>
-            <p:par>
-              <p:cTn id="12" fill="hold" presetID="10" presetClass="entr" presetSubtype="0" dur="600" nodeType="clickEffect">
-                <p:stCondLst>
-                  <p:cond delay="400"/>
-                </p:stCondLst>
-                <p:childTnLst/>
-              </p:cTn>
-            </p:par>
-            <p:par>
-              <p:cTn id="13" fill="hold" presetID="10" presetClass="entr" presetSubtype="0" dur="600" nodeType="clickEffect">
-                <p:stCondLst>
-                  <p:cond delay="600"/>
-                </p:stCondLst>
-                <p:childTnLst/>
-              </p:cTn>
-            </p:par>
-            <p:par>
-              <p:cTn id="14" fill="hold" presetID="10" presetClass="entr" presetSubtype="0" dur="600" nodeType="clickEffect">
-                <p:stCondLst>
-                  <p:cond delay="800"/>
-                </p:stCondLst>
-                <p:childTnLst/>
-              </p:cTn>
-            </p:par>
-            <p:par>
-              <p:cTn id="15" fill="hold" presetID="10" presetClass="entr" presetSubtype="0" dur="600" nodeType="clickEffect">
-                <p:stCondLst>
-                  <p:cond delay="1000"/>
-                </p:stCondLst>
-                <p:childTnLst/>
-              </p:cTn>
-            </p:par>
-            <p:par>
-              <p:cTn id="16" fill="hold" presetID="10" presetClass="entr" presetSubtype="0" dur="600" nodeType="clickEffect">
-                <p:stCondLst>
-                  <p:cond delay="1200"/>
-                </p:stCondLst>
-                <p:childTnLst/>
-              </p:cTn>
-            </p:par>
-            <p:par>
-              <p:cTn id="17" fill="hold" presetID="10" presetClass="entr" presetSubtype="0" dur="600" nodeType="clickEffect">
-                <p:stCondLst>
-                  <p:cond delay="1400"/>
-                </p:stCondLst>
-                <p:childTnLst/>
-              </p:cTn>
-            </p:par>
-            <p:par>
-              <p:cTn id="18" fill="hold" presetID="10" presetClass="entr" presetSubtype="0" dur="600" nodeType="clickEffect">
-                <p:stCondLst>
-                  <p:cond delay="1600"/>
-                </p:stCondLst>
-                <p:childTnLst/>
-              </p:cTn>
-            </p:par>
-            <p:par>
-              <p:cTn id="19" fill="hold" presetID="10" presetClass="entr" presetSubtype="0" dur="600" nodeType="clickEffect">
-                <p:stCondLst>
-                  <p:cond delay="1800"/>
-                </p:stCondLst>
-                <p:childTnLst/>
-              </p:cTn>
-            </p:par>
-            <p:par>
-              <p:cTn id="20" fill="hold" presetID="10" presetClass="entr" presetSubtype="0" dur="600" nodeType="clickEffect">
-                <p:stCondLst>
-                  <p:cond delay="2000"/>
-                </p:stCondLst>
-                <p:childTnLst/>
-              </p:cTn>
-            </p:par>
-            <p:par>
-              <p:cTn id="21" fill="hold" presetID="10" presetClass="entr" presetSubtype="0" dur="700" nodeType="clickEffect">
-                <p:stCondLst>
-                  <p:cond delay="2200"/>
-                </p:stCondLst>
-                <p:childTnLst/>
-              </p:cTn>
-            </p:par>
-            <p:par>
-              <p:cTn id="22" fill="hold" presetID="10" presetClass="entr" presetSubtype="0" dur="600" nodeType="clickEffect">
-                <p:stCondLst>
-                  <p:cond delay="2400"/>
-                </p:stCondLst>
-                <p:childTnLst/>
-              </p:cTn>
-            </p:par>
-            <p:par>
-              <p:cTn id="23" fill="hold" presetID="10" presetClass="entr" presetSubtype="0" dur="600" nodeType="clickEffect">
-                <p:stCondLst>
-                  <p:cond delay="2600"/>
-                </p:stCondLst>
-                <p:childTnLst/>
-              </p:cTn>
-            </p:par>
-            <p:par>
-              <p:cTn id="24" fill="hold" presetID="10" presetClass="entr" presetSubtype="0" dur="600" nodeType="clickEffect">
-                <p:stCondLst>
-                  <p:cond delay="2800"/>
-                </p:stCondLst>
-                <p:childTnLst/>
-              </p:cTn>
-            </p:par>
-            <p:par>
-              <p:cTn id="25" fill="hold" presetID="10" presetClass="entr" presetSubtype="0" dur="600" nodeType="clickEffect">
-                <p:stCondLst>
-                  <p:cond delay="3000"/>
-                </p:stCondLst>
-                <p:childTnLst/>
-              </p:cTn>
-            </p:par>
-            <p:par>
-              <p:cTn id="26" fill="hold" presetID="10" presetClass="entr" presetSubtype="0" dur="600" nodeType="clickEffect">
-                <p:stCondLst>
-                  <p:cond delay="3200"/>
-                </p:stCondLst>
-                <p:childTnLst/>
-              </p:cTn>
-            </p:par>
-            <p:par>
-              <p:cTn id="27" fill="hold" presetID="10" presetClass="entr" presetSubtype="0" dur="600" nodeType="clickEffect">
-                <p:stCondLst>
-                  <p:cond delay="3400"/>
-                </p:stCondLst>
-                <p:childTnLst/>
-              </p:cTn>
-            </p:par>
-            <p:par>
-              <p:cTn id="28" fill="hold" presetID="10" presetClass="entr" presetSubtype="0" dur="600" nodeType="clickEffect">
-                <p:stCondLst>
-                  <p:cond delay="3600"/>
-                </p:stCondLst>
-                <p:childTnLst/>
-              </p:cTn>
-            </p:par>
-            <p:par>
-              <p:cTn id="29" fill="hold" presetID="10" presetClass="entr" presetSubtype="0" dur="600" nodeType="clickEffect">
-                <p:stCondLst>
-                  <p:cond delay="3800"/>
-                </p:stCondLst>
-                <p:childTnLst/>
-              </p:cTn>
-            </p:par>
-            <p:par>
-              <p:cTn id="30" fill="hold" presetID="10" presetClass="entr" presetSubtype="0" dur="700" nodeType="clickEffect">
-                <p:stCondLst>
-                  <p:cond delay="4000"/>
-                </p:stCondLst>
-                <p:childTnLst/>
-              </p:cTn>
-            </p:par>
-            <p:par>
-              <p:cTn id="31" fill="hold" presetID="10" presetClass="entr" presetSubtype="0" dur="600" nodeType="clickEffect">
-                <p:stCondLst>
-                  <p:cond delay="4200"/>
-                </p:stCondLst>
-                <p:childTnLst/>
-              </p:cTn>
-            </p:par>
-            <p:par>
-              <p:cTn id="32" fill="hold" presetID="10" presetClass="entr" presetSubtype="0" dur="600" nodeType="clickEffect">
-                <p:stCondLst>
-                  <p:cond delay="4400"/>
-                </p:stCondLst>
-                <p:childTnLst/>
-              </p:cTn>
-            </p:par>
-            <p:par>
-              <p:cTn id="33" fill="hold" presetID="10" presetClass="entr" presetSubtype="0" dur="600" nodeType="clickEffect">
-                <p:stCondLst>
-                  <p:cond delay="4600"/>
-                </p:stCondLst>
-                <p:childTnLst/>
-              </p:cTn>
-            </p:par>
-          </p:childTnLst>
-        </p:cTn>
-      </p:par>
-    </p:tnLst>
-  </p:timing>
 </p:sld>
 </file>
 
@@ -5841,8 +5441,8 @@
         </p:nvSpPr>
         <p:spPr>
           <a:xfrm>
-            <a:off x="783598" y="132177"/>
-            <a:ext cx="2986825" cy="36576"/>
+            <a:off x="720578" y="125684"/>
+            <a:ext cx="2620796" cy="36576"/>
           </a:xfrm>
           <a:prstGeom prst="rect">
             <a:avLst/>
@@ -5881,216 +5481,9 @@
   <p:clrMapOvr>
     <a:masterClrMapping/>
   </p:clrMapOvr>
-  <p:timing>
-    <p:tnLst>
-      <p:par>
-        <p:cTn id="1" dur="indefinite" restart="whenNotActive" nodeType="tmRoot">
-          <p:childTnLst>
-            <p:par>
-              <p:cTn id="10" fill="hold" presetID="10" presetClass="entr" presetSubtype="0" dur="500" nodeType="clickEffect">
-                <p:stCondLst>
-                  <p:cond evt="onClick" delay="0"/>
-                </p:stCondLst>
-                <p:childTnLst/>
-              </p:cTn>
-            </p:par>
-            <p:par>
-              <p:cTn id="11" fill="hold" presetID="10" presetClass="entr" presetSubtype="0" dur="600" nodeType="clickEffect">
-                <p:stCondLst>
-                  <p:cond delay="200"/>
-                </p:stCondLst>
-                <p:childTnLst/>
-              </p:cTn>
-            </p:par>
-            <p:par>
-              <p:cTn id="12" fill="hold" presetID="10" presetClass="entr" presetSubtype="0" dur="600" nodeType="clickEffect">
-                <p:stCondLst>
-                  <p:cond delay="400"/>
-                </p:stCondLst>
-                <p:childTnLst/>
-              </p:cTn>
-            </p:par>
-            <p:par>
-              <p:cTn id="13" fill="hold" presetID="10" presetClass="entr" presetSubtype="0" dur="600" nodeType="clickEffect">
-                <p:stCondLst>
-                  <p:cond delay="600"/>
-                </p:stCondLst>
-                <p:childTnLst/>
-              </p:cTn>
-            </p:par>
-            <p:par>
-              <p:cTn id="14" fill="hold" presetID="10" presetClass="entr" presetSubtype="0" dur="600" nodeType="clickEffect">
-                <p:stCondLst>
-                  <p:cond delay="800"/>
-                </p:stCondLst>
-                <p:childTnLst/>
-              </p:cTn>
-            </p:par>
-            <p:par>
-              <p:cTn id="15" fill="hold" presetID="10" presetClass="entr" presetSubtype="0" dur="600" nodeType="clickEffect">
-                <p:stCondLst>
-                  <p:cond delay="1000"/>
-                </p:stCondLst>
-                <p:childTnLst/>
-              </p:cTn>
-            </p:par>
-            <p:par>
-              <p:cTn id="16" fill="hold" presetID="10" presetClass="entr" presetSubtype="0" dur="600" nodeType="clickEffect">
-                <p:stCondLst>
-                  <p:cond delay="1200"/>
-                </p:stCondLst>
-                <p:childTnLst/>
-              </p:cTn>
-            </p:par>
-            <p:par>
-              <p:cTn id="17" fill="hold" presetID="10" presetClass="entr" presetSubtype="0" dur="700" nodeType="clickEffect">
-                <p:stCondLst>
-                  <p:cond delay="1400"/>
-                </p:stCondLst>
-                <p:childTnLst/>
-              </p:cTn>
-            </p:par>
-            <p:par>
-              <p:cTn id="18" fill="hold" presetID="10" presetClass="entr" presetSubtype="0" dur="700" nodeType="clickEffect">
-                <p:stCondLst>
-                  <p:cond delay="1600"/>
-                </p:stCondLst>
-                <p:childTnLst/>
-              </p:cTn>
-            </p:par>
-            <p:par>
-              <p:cTn id="19" fill="hold" presetID="10" presetClass="entr" presetSubtype="0" dur="600" nodeType="clickEffect">
-                <p:stCondLst>
-                  <p:cond delay="1800"/>
-                </p:stCondLst>
-                <p:childTnLst/>
-              </p:cTn>
-            </p:par>
-            <p:par>
-              <p:cTn id="20" fill="hold" presetID="10" presetClass="entr" presetSubtype="0" dur="600" nodeType="clickEffect">
-                <p:stCondLst>
-                  <p:cond delay="2000"/>
-                </p:stCondLst>
-                <p:childTnLst/>
-              </p:cTn>
-            </p:par>
-            <p:par>
-              <p:cTn id="21" fill="hold" presetID="10" presetClass="entr" presetSubtype="0" dur="600" nodeType="clickEffect">
-                <p:stCondLst>
-                  <p:cond delay="2200"/>
-                </p:stCondLst>
-                <p:childTnLst/>
-              </p:cTn>
-            </p:par>
-            <p:par>
-              <p:cTn id="22" fill="hold" presetID="10" presetClass="entr" presetSubtype="0" dur="600" nodeType="clickEffect">
-                <p:stCondLst>
-                  <p:cond delay="2400"/>
-                </p:stCondLst>
-                <p:childTnLst/>
-              </p:cTn>
-            </p:par>
-            <p:par>
-              <p:cTn id="23" fill="hold" presetID="10" presetClass="entr" presetSubtype="0" dur="600" nodeType="clickEffect">
-                <p:stCondLst>
-                  <p:cond delay="2600"/>
-                </p:stCondLst>
-                <p:childTnLst/>
-              </p:cTn>
-            </p:par>
-            <p:par>
-              <p:cTn id="24" fill="hold" presetID="10" presetClass="entr" presetSubtype="0" dur="600" nodeType="clickEffect">
-                <p:stCondLst>
-                  <p:cond delay="2800"/>
-                </p:stCondLst>
-                <p:childTnLst/>
-              </p:cTn>
-            </p:par>
-            <p:par>
-              <p:cTn id="25" fill="hold" presetID="10" presetClass="entr" presetSubtype="0" dur="600" nodeType="clickEffect">
-                <p:stCondLst>
-                  <p:cond delay="3000"/>
-                </p:stCondLst>
-                <p:childTnLst/>
-              </p:cTn>
-            </p:par>
-            <p:par>
-              <p:cTn id="26" fill="hold" presetID="10" presetClass="entr" presetSubtype="0" dur="600" nodeType="clickEffect">
-                <p:stCondLst>
-                  <p:cond delay="3200"/>
-                </p:stCondLst>
-                <p:childTnLst/>
-              </p:cTn>
-            </p:par>
-            <p:par>
-              <p:cTn id="27" fill="hold" presetID="10" presetClass="entr" presetSubtype="0" dur="600" nodeType="clickEffect">
-                <p:stCondLst>
-                  <p:cond delay="3400"/>
-                </p:stCondLst>
-                <p:childTnLst/>
-              </p:cTn>
-            </p:par>
-            <p:par>
-              <p:cTn id="28" fill="hold" presetID="10" presetClass="entr" presetSubtype="0" dur="600" nodeType="clickEffect">
-                <p:stCondLst>
-                  <p:cond delay="3600"/>
-                </p:stCondLst>
-                <p:childTnLst/>
-              </p:cTn>
-            </p:par>
-            <p:par>
-              <p:cTn id="29" fill="hold" presetID="10" presetClass="entr" presetSubtype="0" dur="600" nodeType="clickEffect">
-                <p:stCondLst>
-                  <p:cond delay="3800"/>
-                </p:stCondLst>
-                <p:childTnLst/>
-              </p:cTn>
-            </p:par>
-            <p:par>
-              <p:cTn id="30" fill="hold" presetID="10" presetClass="entr" presetSubtype="0" dur="600" nodeType="clickEffect">
-                <p:stCondLst>
-                  <p:cond delay="4000"/>
-                </p:stCondLst>
-                <p:childTnLst/>
-              </p:cTn>
-            </p:par>
-            <p:par>
-              <p:cTn id="31" fill="hold" presetID="10" presetClass="entr" presetSubtype="0" dur="600" nodeType="clickEffect">
-                <p:stCondLst>
-                  <p:cond delay="4200"/>
-                </p:stCondLst>
-                <p:childTnLst/>
-              </p:cTn>
-            </p:par>
-            <p:par>
-              <p:cTn id="32" fill="hold" presetID="10" presetClass="entr" presetSubtype="0" dur="600" nodeType="clickEffect">
-                <p:stCondLst>
-                  <p:cond delay="4400"/>
-                </p:stCondLst>
-                <p:childTnLst/>
-              </p:cTn>
-            </p:par>
-            <p:par>
-              <p:cTn id="33" fill="hold" presetID="10" presetClass="entr" presetSubtype="0" dur="600" nodeType="clickEffect">
-                <p:stCondLst>
-                  <p:cond delay="4600"/>
-                </p:stCondLst>
-                <p:childTnLst/>
-              </p:cTn>
-            </p:par>
-            <p:par>
-              <p:cTn id="34" fill="hold" presetID="10" presetClass="entr" presetSubtype="0" dur="600" nodeType="clickEffect">
-                <p:stCondLst>
-                  <p:cond delay="4800"/>
-                </p:stCondLst>
-                <p:childTnLst/>
-              </p:cTn>
-            </p:par>
-          </p:childTnLst>
-        </p:cTn>
-      </p:par>
-    </p:tnLst>
-  </p:timing>
+  <p:transition spd="med" dur="546">
+    <p:fade/>
+  </p:transition>
 </p:sld>
 </file>
 
@@ -7254,8 +6647,8 @@
         </p:nvSpPr>
         <p:spPr>
           <a:xfrm>
-            <a:off x="852051" y="135197"/>
-            <a:ext cx="1679796" cy="36576"/>
+            <a:off x="803612" y="93581"/>
+            <a:ext cx="2902184" cy="36576"/>
           </a:xfrm>
           <a:prstGeom prst="rect">
             <a:avLst/>
@@ -7294,272 +6687,9 @@
   <p:clrMapOvr>
     <a:masterClrMapping/>
   </p:clrMapOvr>
-  <p:timing>
-    <p:tnLst>
-      <p:par>
-        <p:cTn id="1" dur="indefinite" restart="whenNotActive" nodeType="tmRoot">
-          <p:childTnLst>
-            <p:par>
-              <p:cTn id="10" fill="hold" presetID="10" presetClass="entr" presetSubtype="0" dur="600" nodeType="clickEffect">
-                <p:stCondLst>
-                  <p:cond evt="onClick" delay="0"/>
-                </p:stCondLst>
-                <p:childTnLst/>
-              </p:cTn>
-            </p:par>
-            <p:par>
-              <p:cTn id="11" fill="hold" presetID="10" presetClass="entr" presetSubtype="0" dur="600" nodeType="clickEffect">
-                <p:stCondLst>
-                  <p:cond delay="200"/>
-                </p:stCondLst>
-                <p:childTnLst/>
-              </p:cTn>
-            </p:par>
-            <p:par>
-              <p:cTn id="12" fill="hold" presetID="10" presetClass="entr" presetSubtype="0" dur="600" nodeType="clickEffect">
-                <p:stCondLst>
-                  <p:cond delay="400"/>
-                </p:stCondLst>
-                <p:childTnLst/>
-              </p:cTn>
-            </p:par>
-            <p:par>
-              <p:cTn id="13" fill="hold" presetID="10" presetClass="entr" presetSubtype="0" dur="600" nodeType="clickEffect">
-                <p:stCondLst>
-                  <p:cond delay="600"/>
-                </p:stCondLst>
-                <p:childTnLst/>
-              </p:cTn>
-            </p:par>
-            <p:par>
-              <p:cTn id="14" fill="hold" presetID="10" presetClass="entr" presetSubtype="0" dur="600" nodeType="clickEffect">
-                <p:stCondLst>
-                  <p:cond delay="800"/>
-                </p:stCondLst>
-                <p:childTnLst/>
-              </p:cTn>
-            </p:par>
-            <p:par>
-              <p:cTn id="15" fill="hold" presetID="10" presetClass="entr" presetSubtype="0" dur="600" nodeType="clickEffect">
-                <p:stCondLst>
-                  <p:cond delay="1000"/>
-                </p:stCondLst>
-                <p:childTnLst/>
-              </p:cTn>
-            </p:par>
-            <p:par>
-              <p:cTn id="16" fill="hold" presetID="10" presetClass="entr" presetSubtype="0" dur="600" nodeType="clickEffect">
-                <p:stCondLst>
-                  <p:cond delay="1200"/>
-                </p:stCondLst>
-                <p:childTnLst/>
-              </p:cTn>
-            </p:par>
-            <p:par>
-              <p:cTn id="17" fill="hold" presetID="10" presetClass="entr" presetSubtype="0" dur="600" nodeType="clickEffect">
-                <p:stCondLst>
-                  <p:cond delay="1400"/>
-                </p:stCondLst>
-                <p:childTnLst/>
-              </p:cTn>
-            </p:par>
-            <p:par>
-              <p:cTn id="18" fill="hold" presetID="10" presetClass="entr" presetSubtype="0" dur="600" nodeType="clickEffect">
-                <p:stCondLst>
-                  <p:cond delay="1600"/>
-                </p:stCondLst>
-                <p:childTnLst/>
-              </p:cTn>
-            </p:par>
-            <p:par>
-              <p:cTn id="19" fill="hold" presetID="10" presetClass="entr" presetSubtype="0" dur="600" nodeType="clickEffect">
-                <p:stCondLst>
-                  <p:cond delay="1800"/>
-                </p:stCondLst>
-                <p:childTnLst/>
-              </p:cTn>
-            </p:par>
-            <p:par>
-              <p:cTn id="20" fill="hold" presetID="10" presetClass="entr" presetSubtype="0" dur="600" nodeType="clickEffect">
-                <p:stCondLst>
-                  <p:cond delay="2000"/>
-                </p:stCondLst>
-                <p:childTnLst/>
-              </p:cTn>
-            </p:par>
-            <p:par>
-              <p:cTn id="21" fill="hold" presetID="10" presetClass="entr" presetSubtype="0" dur="500" nodeType="clickEffect">
-                <p:stCondLst>
-                  <p:cond delay="2200"/>
-                </p:stCondLst>
-                <p:childTnLst/>
-              </p:cTn>
-            </p:par>
-            <p:par>
-              <p:cTn id="22" fill="hold" presetID="10" presetClass="entr" presetSubtype="0" dur="500" nodeType="clickEffect">
-                <p:stCondLst>
-                  <p:cond delay="2400"/>
-                </p:stCondLst>
-                <p:childTnLst/>
-              </p:cTn>
-            </p:par>
-            <p:par>
-              <p:cTn id="23" fill="hold" presetID="10" presetClass="entr" presetSubtype="0" dur="600" nodeType="clickEffect">
-                <p:stCondLst>
-                  <p:cond delay="2600"/>
-                </p:stCondLst>
-                <p:childTnLst/>
-              </p:cTn>
-            </p:par>
-            <p:par>
-              <p:cTn id="24" fill="hold" presetID="10" presetClass="entr" presetSubtype="0" dur="600" nodeType="clickEffect">
-                <p:stCondLst>
-                  <p:cond delay="2800"/>
-                </p:stCondLst>
-                <p:childTnLst/>
-              </p:cTn>
-            </p:par>
-            <p:par>
-              <p:cTn id="25" fill="hold" presetID="10" presetClass="entr" presetSubtype="0" dur="600" nodeType="clickEffect">
-                <p:stCondLst>
-                  <p:cond delay="3000"/>
-                </p:stCondLst>
-                <p:childTnLst/>
-              </p:cTn>
-            </p:par>
-            <p:par>
-              <p:cTn id="26" fill="hold" presetID="10" presetClass="entr" presetSubtype="0" dur="600" nodeType="clickEffect">
-                <p:stCondLst>
-                  <p:cond delay="3200"/>
-                </p:stCondLst>
-                <p:childTnLst/>
-              </p:cTn>
-            </p:par>
-            <p:par>
-              <p:cTn id="27" fill="hold" presetID="10" presetClass="entr" presetSubtype="0" dur="500" nodeType="clickEffect">
-                <p:stCondLst>
-                  <p:cond delay="3400"/>
-                </p:stCondLst>
-                <p:childTnLst/>
-              </p:cTn>
-            </p:par>
-            <p:par>
-              <p:cTn id="28" fill="hold" presetID="10" presetClass="entr" presetSubtype="0" dur="600" nodeType="clickEffect">
-                <p:stCondLst>
-                  <p:cond delay="3600"/>
-                </p:stCondLst>
-                <p:childTnLst/>
-              </p:cTn>
-            </p:par>
-            <p:par>
-              <p:cTn id="29" fill="hold" presetID="10" presetClass="entr" presetSubtype="0" dur="600" nodeType="clickEffect">
-                <p:stCondLst>
-                  <p:cond delay="3800"/>
-                </p:stCondLst>
-                <p:childTnLst/>
-              </p:cTn>
-            </p:par>
-            <p:par>
-              <p:cTn id="30" fill="hold" presetID="10" presetClass="entr" presetSubtype="0" dur="600" nodeType="clickEffect">
-                <p:stCondLst>
-                  <p:cond delay="4000"/>
-                </p:stCondLst>
-                <p:childTnLst/>
-              </p:cTn>
-            </p:par>
-            <p:par>
-              <p:cTn id="31" fill="hold" presetID="10" presetClass="entr" presetSubtype="0" dur="600" nodeType="clickEffect">
-                <p:stCondLst>
-                  <p:cond delay="4200"/>
-                </p:stCondLst>
-                <p:childTnLst/>
-              </p:cTn>
-            </p:par>
-            <p:par>
-              <p:cTn id="32" fill="hold" presetID="10" presetClass="entr" presetSubtype="0" dur="600" nodeType="clickEffect">
-                <p:stCondLst>
-                  <p:cond delay="4400"/>
-                </p:stCondLst>
-                <p:childTnLst/>
-              </p:cTn>
-            </p:par>
-            <p:par>
-              <p:cTn id="33" fill="hold" presetID="10" presetClass="entr" presetSubtype="0" dur="500" nodeType="clickEffect">
-                <p:stCondLst>
-                  <p:cond delay="4600"/>
-                </p:stCondLst>
-                <p:childTnLst/>
-              </p:cTn>
-            </p:par>
-            <p:par>
-              <p:cTn id="34" fill="hold" presetID="10" presetClass="entr" presetSubtype="0" dur="600" nodeType="clickEffect">
-                <p:stCondLst>
-                  <p:cond delay="4800"/>
-                </p:stCondLst>
-                <p:childTnLst/>
-              </p:cTn>
-            </p:par>
-            <p:par>
-              <p:cTn id="35" fill="hold" presetID="10" presetClass="entr" presetSubtype="0" dur="600" nodeType="clickEffect">
-                <p:stCondLst>
-                  <p:cond delay="5000"/>
-                </p:stCondLst>
-                <p:childTnLst/>
-              </p:cTn>
-            </p:par>
-            <p:par>
-              <p:cTn id="36" fill="hold" presetID="10" presetClass="entr" presetSubtype="0" dur="600" nodeType="clickEffect">
-                <p:stCondLst>
-                  <p:cond delay="5200"/>
-                </p:stCondLst>
-                <p:childTnLst/>
-              </p:cTn>
-            </p:par>
-            <p:par>
-              <p:cTn id="37" fill="hold" presetID="10" presetClass="entr" presetSubtype="0" dur="600" nodeType="clickEffect">
-                <p:stCondLst>
-                  <p:cond delay="5400"/>
-                </p:stCondLst>
-                <p:childTnLst/>
-              </p:cTn>
-            </p:par>
-            <p:par>
-              <p:cTn id="38" fill="hold" presetID="10" presetClass="entr" presetSubtype="0" dur="600" nodeType="clickEffect">
-                <p:stCondLst>
-                  <p:cond delay="5600"/>
-                </p:stCondLst>
-                <p:childTnLst/>
-              </p:cTn>
-            </p:par>
-            <p:par>
-              <p:cTn id="39" fill="hold" presetID="10" presetClass="entr" presetSubtype="0" dur="600" nodeType="clickEffect">
-                <p:stCondLst>
-                  <p:cond delay="5800"/>
-                </p:stCondLst>
-                <p:childTnLst/>
-              </p:cTn>
-            </p:par>
-            <p:par>
-              <p:cTn id="40" fill="hold" presetID="10" presetClass="entr" presetSubtype="0" dur="600" nodeType="clickEffect">
-                <p:stCondLst>
-                  <p:cond delay="6000"/>
-                </p:stCondLst>
-                <p:childTnLst/>
-              </p:cTn>
-            </p:par>
-            <p:par>
-              <p:cTn id="41" fill="hold" presetID="10" presetClass="entr" presetSubtype="0" dur="600" nodeType="clickEffect">
-                <p:stCondLst>
-                  <p:cond delay="6200"/>
-                </p:stCondLst>
-                <p:childTnLst/>
-              </p:cTn>
-            </p:par>
-          </p:childTnLst>
-        </p:cTn>
-      </p:par>
-    </p:tnLst>
-  </p:timing>
+  <p:transition spd="med" dur="568">
+    <p:fade/>
+  </p:transition>
 </p:sld>
 </file>
 
@@ -8701,8 +7831,8 @@
         </p:nvSpPr>
         <p:spPr>
           <a:xfrm>
-            <a:off x="658509" y="107236"/>
-            <a:ext cx="1610452" cy="36576"/>
+            <a:off x="736097" y="131246"/>
+            <a:ext cx="2157358" cy="36576"/>
           </a:xfrm>
           <a:prstGeom prst="rect">
             <a:avLst/>
@@ -8741,208 +7871,9 @@
   <p:clrMapOvr>
     <a:masterClrMapping/>
   </p:clrMapOvr>
-  <p:timing>
-    <p:tnLst>
-      <p:par>
-        <p:cTn id="1" dur="indefinite" restart="whenNotActive" nodeType="tmRoot">
-          <p:childTnLst>
-            <p:par>
-              <p:cTn id="10" fill="hold" presetID="10" presetClass="entr" presetSubtype="0" dur="600" nodeType="clickEffect">
-                <p:stCondLst>
-                  <p:cond evt="onClick" delay="0"/>
-                </p:stCondLst>
-                <p:childTnLst/>
-              </p:cTn>
-            </p:par>
-            <p:par>
-              <p:cTn id="11" fill="hold" presetID="10" presetClass="entr" presetSubtype="0" dur="600" nodeType="clickEffect">
-                <p:stCondLst>
-                  <p:cond delay="200"/>
-                </p:stCondLst>
-                <p:childTnLst/>
-              </p:cTn>
-            </p:par>
-            <p:par>
-              <p:cTn id="12" fill="hold" presetID="10" presetClass="entr" presetSubtype="0" dur="700" nodeType="clickEffect">
-                <p:stCondLst>
-                  <p:cond delay="400"/>
-                </p:stCondLst>
-                <p:childTnLst/>
-              </p:cTn>
-            </p:par>
-            <p:par>
-              <p:cTn id="13" fill="hold" presetID="10" presetClass="entr" presetSubtype="0" dur="600" nodeType="clickEffect">
-                <p:stCondLst>
-                  <p:cond delay="600"/>
-                </p:stCondLst>
-                <p:childTnLst/>
-              </p:cTn>
-            </p:par>
-            <p:par>
-              <p:cTn id="14" fill="hold" presetID="10" presetClass="entr" presetSubtype="0" dur="600" nodeType="clickEffect">
-                <p:stCondLst>
-                  <p:cond delay="800"/>
-                </p:stCondLst>
-                <p:childTnLst/>
-              </p:cTn>
-            </p:par>
-            <p:par>
-              <p:cTn id="15" fill="hold" presetID="10" presetClass="entr" presetSubtype="0" dur="500" nodeType="clickEffect">
-                <p:stCondLst>
-                  <p:cond delay="1000"/>
-                </p:stCondLst>
-                <p:childTnLst/>
-              </p:cTn>
-            </p:par>
-            <p:par>
-              <p:cTn id="16" fill="hold" presetID="10" presetClass="entr" presetSubtype="0" dur="600" nodeType="clickEffect">
-                <p:stCondLst>
-                  <p:cond delay="1200"/>
-                </p:stCondLst>
-                <p:childTnLst/>
-              </p:cTn>
-            </p:par>
-            <p:par>
-              <p:cTn id="17" fill="hold" presetID="10" presetClass="entr" presetSubtype="0" dur="600" nodeType="clickEffect">
-                <p:stCondLst>
-                  <p:cond delay="1400"/>
-                </p:stCondLst>
-                <p:childTnLst/>
-              </p:cTn>
-            </p:par>
-            <p:par>
-              <p:cTn id="18" fill="hold" presetID="10" presetClass="entr" presetSubtype="0" dur="600" nodeType="clickEffect">
-                <p:stCondLst>
-                  <p:cond delay="1600"/>
-                </p:stCondLst>
-                <p:childTnLst/>
-              </p:cTn>
-            </p:par>
-            <p:par>
-              <p:cTn id="19" fill="hold" presetID="10" presetClass="entr" presetSubtype="0" dur="600" nodeType="clickEffect">
-                <p:stCondLst>
-                  <p:cond delay="1800"/>
-                </p:stCondLst>
-                <p:childTnLst/>
-              </p:cTn>
-            </p:par>
-            <p:par>
-              <p:cTn id="20" fill="hold" presetID="10" presetClass="entr" presetSubtype="0" dur="600" nodeType="clickEffect">
-                <p:stCondLst>
-                  <p:cond delay="2000"/>
-                </p:stCondLst>
-                <p:childTnLst/>
-              </p:cTn>
-            </p:par>
-            <p:par>
-              <p:cTn id="21" fill="hold" presetID="10" presetClass="entr" presetSubtype="0" dur="600" nodeType="clickEffect">
-                <p:stCondLst>
-                  <p:cond delay="2200"/>
-                </p:stCondLst>
-                <p:childTnLst/>
-              </p:cTn>
-            </p:par>
-            <p:par>
-              <p:cTn id="22" fill="hold" presetID="10" presetClass="entr" presetSubtype="0" dur="600" nodeType="clickEffect">
-                <p:stCondLst>
-                  <p:cond delay="2400"/>
-                </p:stCondLst>
-                <p:childTnLst/>
-              </p:cTn>
-            </p:par>
-            <p:par>
-              <p:cTn id="23" fill="hold" presetID="10" presetClass="entr" presetSubtype="0" dur="600" nodeType="clickEffect">
-                <p:stCondLst>
-                  <p:cond delay="2600"/>
-                </p:stCondLst>
-                <p:childTnLst/>
-              </p:cTn>
-            </p:par>
-            <p:par>
-              <p:cTn id="24" fill="hold" presetID="10" presetClass="entr" presetSubtype="0" dur="600" nodeType="clickEffect">
-                <p:stCondLst>
-                  <p:cond delay="2800"/>
-                </p:stCondLst>
-                <p:childTnLst/>
-              </p:cTn>
-            </p:par>
-            <p:par>
-              <p:cTn id="25" fill="hold" presetID="10" presetClass="entr" presetSubtype="0" dur="600" nodeType="clickEffect">
-                <p:stCondLst>
-                  <p:cond delay="3000"/>
-                </p:stCondLst>
-                <p:childTnLst/>
-              </p:cTn>
-            </p:par>
-            <p:par>
-              <p:cTn id="26" fill="hold" presetID="10" presetClass="entr" presetSubtype="0" dur="600" nodeType="clickEffect">
-                <p:stCondLst>
-                  <p:cond delay="3200"/>
-                </p:stCondLst>
-                <p:childTnLst/>
-              </p:cTn>
-            </p:par>
-            <p:par>
-              <p:cTn id="27" fill="hold" presetID="10" presetClass="entr" presetSubtype="0" dur="600" nodeType="clickEffect">
-                <p:stCondLst>
-                  <p:cond delay="3400"/>
-                </p:stCondLst>
-                <p:childTnLst/>
-              </p:cTn>
-            </p:par>
-            <p:par>
-              <p:cTn id="28" fill="hold" presetID="10" presetClass="entr" presetSubtype="0" dur="600" nodeType="clickEffect">
-                <p:stCondLst>
-                  <p:cond delay="3600"/>
-                </p:stCondLst>
-                <p:childTnLst/>
-              </p:cTn>
-            </p:par>
-            <p:par>
-              <p:cTn id="29" fill="hold" presetID="10" presetClass="entr" presetSubtype="0" dur="600" nodeType="clickEffect">
-                <p:stCondLst>
-                  <p:cond delay="3800"/>
-                </p:stCondLst>
-                <p:childTnLst/>
-              </p:cTn>
-            </p:par>
-            <p:par>
-              <p:cTn id="30" fill="hold" presetID="10" presetClass="entr" presetSubtype="0" dur="500" nodeType="clickEffect">
-                <p:stCondLst>
-                  <p:cond delay="4000"/>
-                </p:stCondLst>
-                <p:childTnLst/>
-              </p:cTn>
-            </p:par>
-            <p:par>
-              <p:cTn id="31" fill="hold" presetID="10" presetClass="entr" presetSubtype="0" dur="600" nodeType="clickEffect">
-                <p:stCondLst>
-                  <p:cond delay="4200"/>
-                </p:stCondLst>
-                <p:childTnLst/>
-              </p:cTn>
-            </p:par>
-            <p:par>
-              <p:cTn id="32" fill="hold" presetID="10" presetClass="entr" presetSubtype="0" dur="600" nodeType="clickEffect">
-                <p:stCondLst>
-                  <p:cond delay="4400"/>
-                </p:stCondLst>
-                <p:childTnLst/>
-              </p:cTn>
-            </p:par>
-            <p:par>
-              <p:cTn id="33" fill="hold" presetID="10" presetClass="entr" presetSubtype="0" dur="700" nodeType="clickEffect">
-                <p:stCondLst>
-                  <p:cond delay="4600"/>
-                </p:stCondLst>
-                <p:childTnLst/>
-              </p:cTn>
-            </p:par>
-          </p:childTnLst>
-        </p:cTn>
-      </p:par>
-    </p:tnLst>
-  </p:timing>
+  <p:transition spd="med" dur="640">
+    <p:fade/>
+  </p:transition>
 </p:sld>
 </file>
 
@@ -9891,192 +8822,9 @@
   <p:clrMapOvr>
     <a:masterClrMapping/>
   </p:clrMapOvr>
-  <p:timing>
-    <p:tnLst>
-      <p:par>
-        <p:cTn id="1" dur="indefinite" restart="whenNotActive" nodeType="tmRoot">
-          <p:childTnLst>
-            <p:par>
-              <p:cTn id="10" fill="hold" presetID="10" presetClass="entr" presetSubtype="0" dur="600" nodeType="clickEffect">
-                <p:stCondLst>
-                  <p:cond evt="onClick" delay="0"/>
-                </p:stCondLst>
-                <p:childTnLst/>
-              </p:cTn>
-            </p:par>
-            <p:par>
-              <p:cTn id="11" fill="hold" presetID="10" presetClass="entr" presetSubtype="0" dur="600" nodeType="clickEffect">
-                <p:stCondLst>
-                  <p:cond delay="200"/>
-                </p:stCondLst>
-                <p:childTnLst/>
-              </p:cTn>
-            </p:par>
-            <p:par>
-              <p:cTn id="12" fill="hold" presetID="10" presetClass="entr" presetSubtype="0" dur="600" nodeType="clickEffect">
-                <p:stCondLst>
-                  <p:cond delay="400"/>
-                </p:stCondLst>
-                <p:childTnLst/>
-              </p:cTn>
-            </p:par>
-            <p:par>
-              <p:cTn id="13" fill="hold" presetID="10" presetClass="entr" presetSubtype="0" dur="700" nodeType="clickEffect">
-                <p:stCondLst>
-                  <p:cond delay="600"/>
-                </p:stCondLst>
-                <p:childTnLst/>
-              </p:cTn>
-            </p:par>
-            <p:par>
-              <p:cTn id="14" fill="hold" presetID="10" presetClass="entr" presetSubtype="0" dur="600" nodeType="clickEffect">
-                <p:stCondLst>
-                  <p:cond delay="800"/>
-                </p:stCondLst>
-                <p:childTnLst/>
-              </p:cTn>
-            </p:par>
-            <p:par>
-              <p:cTn id="15" fill="hold" presetID="10" presetClass="entr" presetSubtype="0" dur="600" nodeType="clickEffect">
-                <p:stCondLst>
-                  <p:cond delay="1000"/>
-                </p:stCondLst>
-                <p:childTnLst/>
-              </p:cTn>
-            </p:par>
-            <p:par>
-              <p:cTn id="16" fill="hold" presetID="10" presetClass="entr" presetSubtype="0" dur="700" nodeType="clickEffect">
-                <p:stCondLst>
-                  <p:cond delay="1200"/>
-                </p:stCondLst>
-                <p:childTnLst/>
-              </p:cTn>
-            </p:par>
-            <p:par>
-              <p:cTn id="17" fill="hold" presetID="10" presetClass="entr" presetSubtype="0" dur="600" nodeType="clickEffect">
-                <p:stCondLst>
-                  <p:cond delay="1400"/>
-                </p:stCondLst>
-                <p:childTnLst/>
-              </p:cTn>
-            </p:par>
-            <p:par>
-              <p:cTn id="18" fill="hold" presetID="10" presetClass="entr" presetSubtype="0" dur="600" nodeType="clickEffect">
-                <p:stCondLst>
-                  <p:cond delay="1600"/>
-                </p:stCondLst>
-                <p:childTnLst/>
-              </p:cTn>
-            </p:par>
-            <p:par>
-              <p:cTn id="19" fill="hold" presetID="10" presetClass="entr" presetSubtype="0" dur="600" nodeType="clickEffect">
-                <p:stCondLst>
-                  <p:cond delay="1800"/>
-                </p:stCondLst>
-                <p:childTnLst/>
-              </p:cTn>
-            </p:par>
-            <p:par>
-              <p:cTn id="20" fill="hold" presetID="10" presetClass="entr" presetSubtype="0" dur="600" nodeType="clickEffect">
-                <p:stCondLst>
-                  <p:cond delay="2000"/>
-                </p:stCondLst>
-                <p:childTnLst/>
-              </p:cTn>
-            </p:par>
-            <p:par>
-              <p:cTn id="21" fill="hold" presetID="10" presetClass="entr" presetSubtype="0" dur="600" nodeType="clickEffect">
-                <p:stCondLst>
-                  <p:cond delay="2200"/>
-                </p:stCondLst>
-                <p:childTnLst/>
-              </p:cTn>
-            </p:par>
-            <p:par>
-              <p:cTn id="22" fill="hold" presetID="10" presetClass="entr" presetSubtype="0" dur="600" nodeType="clickEffect">
-                <p:stCondLst>
-                  <p:cond delay="2400"/>
-                </p:stCondLst>
-                <p:childTnLst/>
-              </p:cTn>
-            </p:par>
-            <p:par>
-              <p:cTn id="23" fill="hold" presetID="10" presetClass="entr" presetSubtype="0" dur="600" nodeType="clickEffect">
-                <p:stCondLst>
-                  <p:cond delay="2600"/>
-                </p:stCondLst>
-                <p:childTnLst/>
-              </p:cTn>
-            </p:par>
-            <p:par>
-              <p:cTn id="24" fill="hold" presetID="10" presetClass="entr" presetSubtype="0" dur="600" nodeType="clickEffect">
-                <p:stCondLst>
-                  <p:cond delay="2800"/>
-                </p:stCondLst>
-                <p:childTnLst/>
-              </p:cTn>
-            </p:par>
-            <p:par>
-              <p:cTn id="25" fill="hold" presetID="10" presetClass="entr" presetSubtype="0" dur="600" nodeType="clickEffect">
-                <p:stCondLst>
-                  <p:cond delay="3000"/>
-                </p:stCondLst>
-                <p:childTnLst/>
-              </p:cTn>
-            </p:par>
-            <p:par>
-              <p:cTn id="26" fill="hold" presetID="10" presetClass="entr" presetSubtype="0" dur="600" nodeType="clickEffect">
-                <p:stCondLst>
-                  <p:cond delay="3200"/>
-                </p:stCondLst>
-                <p:childTnLst/>
-              </p:cTn>
-            </p:par>
-            <p:par>
-              <p:cTn id="27" fill="hold" presetID="10" presetClass="entr" presetSubtype="0" dur="600" nodeType="clickEffect">
-                <p:stCondLst>
-                  <p:cond delay="3400"/>
-                </p:stCondLst>
-                <p:childTnLst/>
-              </p:cTn>
-            </p:par>
-            <p:par>
-              <p:cTn id="28" fill="hold" presetID="10" presetClass="entr" presetSubtype="0" dur="500" nodeType="clickEffect">
-                <p:stCondLst>
-                  <p:cond delay="3600"/>
-                </p:stCondLst>
-                <p:childTnLst/>
-              </p:cTn>
-            </p:par>
-            <p:par>
-              <p:cTn id="29" fill="hold" presetID="10" presetClass="entr" presetSubtype="0" dur="600" nodeType="clickEffect">
-                <p:stCondLst>
-                  <p:cond delay="3800"/>
-                </p:stCondLst>
-                <p:childTnLst/>
-              </p:cTn>
-            </p:par>
-            <p:par>
-              <p:cTn id="30" fill="hold" presetID="10" presetClass="entr" presetSubtype="0" dur="600" nodeType="clickEffect">
-                <p:stCondLst>
-                  <p:cond delay="4000"/>
-                </p:stCondLst>
-                <p:childTnLst/>
-              </p:cTn>
-            </p:par>
-            <p:par>
-              <p:cTn id="31" fill="hold" presetID="10" presetClass="entr" presetSubtype="0" dur="600" nodeType="clickEffect">
-                <p:stCondLst>
-                  <p:cond delay="4200"/>
-                </p:stCondLst>
-                <p:childTnLst/>
-              </p:cTn>
-            </p:par>
-          </p:childTnLst>
-        </p:cTn>
-      </p:par>
-    </p:tnLst>
-  </p:timing>
+  <p:transition spd="med" dur="649">
+    <p:fade/>
+  </p:transition>
 </p:sld>
 </file>
 
@@ -11138,8 +9886,8 @@
         </p:nvSpPr>
         <p:spPr>
           <a:xfrm>
-            <a:off x="593069" y="101455"/>
-            <a:ext cx="1914588" cy="36576"/>
+            <a:off x="605848" y="132103"/>
+            <a:ext cx="2500338" cy="36576"/>
           </a:xfrm>
           <a:prstGeom prst="rect">
             <a:avLst/>
@@ -11178,240 +9926,9 @@
   <p:clrMapOvr>
     <a:masterClrMapping/>
   </p:clrMapOvr>
-  <p:timing>
-    <p:tnLst>
-      <p:par>
-        <p:cTn id="1" dur="indefinite" restart="whenNotActive" nodeType="tmRoot">
-          <p:childTnLst>
-            <p:par>
-              <p:cTn id="10" fill="hold" presetID="10" presetClass="entr" presetSubtype="0" dur="600" nodeType="clickEffect">
-                <p:stCondLst>
-                  <p:cond evt="onClick" delay="0"/>
-                </p:stCondLst>
-                <p:childTnLst/>
-              </p:cTn>
-            </p:par>
-            <p:par>
-              <p:cTn id="11" fill="hold" presetID="10" presetClass="entr" presetSubtype="0" dur="600" nodeType="clickEffect">
-                <p:stCondLst>
-                  <p:cond delay="200"/>
-                </p:stCondLst>
-                <p:childTnLst/>
-              </p:cTn>
-            </p:par>
-            <p:par>
-              <p:cTn id="12" fill="hold" presetID="10" presetClass="entr" presetSubtype="0" dur="600" nodeType="clickEffect">
-                <p:stCondLst>
-                  <p:cond delay="400"/>
-                </p:stCondLst>
-                <p:childTnLst/>
-              </p:cTn>
-            </p:par>
-            <p:par>
-              <p:cTn id="13" fill="hold" presetID="10" presetClass="entr" presetSubtype="0" dur="600" nodeType="clickEffect">
-                <p:stCondLst>
-                  <p:cond delay="600"/>
-                </p:stCondLst>
-                <p:childTnLst/>
-              </p:cTn>
-            </p:par>
-            <p:par>
-              <p:cTn id="14" fill="hold" presetID="10" presetClass="entr" presetSubtype="0" dur="600" nodeType="clickEffect">
-                <p:stCondLst>
-                  <p:cond delay="800"/>
-                </p:stCondLst>
-                <p:childTnLst/>
-              </p:cTn>
-            </p:par>
-            <p:par>
-              <p:cTn id="15" fill="hold" presetID="10" presetClass="entr" presetSubtype="0" dur="600" nodeType="clickEffect">
-                <p:stCondLst>
-                  <p:cond delay="1000"/>
-                </p:stCondLst>
-                <p:childTnLst/>
-              </p:cTn>
-            </p:par>
-            <p:par>
-              <p:cTn id="16" fill="hold" presetID="10" presetClass="entr" presetSubtype="0" dur="600" nodeType="clickEffect">
-                <p:stCondLst>
-                  <p:cond delay="1200"/>
-                </p:stCondLst>
-                <p:childTnLst/>
-              </p:cTn>
-            </p:par>
-            <p:par>
-              <p:cTn id="17" fill="hold" presetID="10" presetClass="entr" presetSubtype="0" dur="600" nodeType="clickEffect">
-                <p:stCondLst>
-                  <p:cond delay="1400"/>
-                </p:stCondLst>
-                <p:childTnLst/>
-              </p:cTn>
-            </p:par>
-            <p:par>
-              <p:cTn id="18" fill="hold" presetID="10" presetClass="entr" presetSubtype="0" dur="600" nodeType="clickEffect">
-                <p:stCondLst>
-                  <p:cond delay="1600"/>
-                </p:stCondLst>
-                <p:childTnLst/>
-              </p:cTn>
-            </p:par>
-            <p:par>
-              <p:cTn id="19" fill="hold" presetID="10" presetClass="entr" presetSubtype="0" dur="500" nodeType="clickEffect">
-                <p:stCondLst>
-                  <p:cond delay="1800"/>
-                </p:stCondLst>
-                <p:childTnLst/>
-              </p:cTn>
-            </p:par>
-            <p:par>
-              <p:cTn id="20" fill="hold" presetID="10" presetClass="entr" presetSubtype="0" dur="600" nodeType="clickEffect">
-                <p:stCondLst>
-                  <p:cond delay="2000"/>
-                </p:stCondLst>
-                <p:childTnLst/>
-              </p:cTn>
-            </p:par>
-            <p:par>
-              <p:cTn id="21" fill="hold" presetID="10" presetClass="entr" presetSubtype="0" dur="600" nodeType="clickEffect">
-                <p:stCondLst>
-                  <p:cond delay="2200"/>
-                </p:stCondLst>
-                <p:childTnLst/>
-              </p:cTn>
-            </p:par>
-            <p:par>
-              <p:cTn id="22" fill="hold" presetID="10" presetClass="entr" presetSubtype="0" dur="600" nodeType="clickEffect">
-                <p:stCondLst>
-                  <p:cond delay="2400"/>
-                </p:stCondLst>
-                <p:childTnLst/>
-              </p:cTn>
-            </p:par>
-            <p:par>
-              <p:cTn id="23" fill="hold" presetID="10" presetClass="entr" presetSubtype="0" dur="600" nodeType="clickEffect">
-                <p:stCondLst>
-                  <p:cond delay="2600"/>
-                </p:stCondLst>
-                <p:childTnLst/>
-              </p:cTn>
-            </p:par>
-            <p:par>
-              <p:cTn id="24" fill="hold" presetID="10" presetClass="entr" presetSubtype="0" dur="600" nodeType="clickEffect">
-                <p:stCondLst>
-                  <p:cond delay="2800"/>
-                </p:stCondLst>
-                <p:childTnLst/>
-              </p:cTn>
-            </p:par>
-            <p:par>
-              <p:cTn id="25" fill="hold" presetID="10" presetClass="entr" presetSubtype="0" dur="600" nodeType="clickEffect">
-                <p:stCondLst>
-                  <p:cond delay="3000"/>
-                </p:stCondLst>
-                <p:childTnLst/>
-              </p:cTn>
-            </p:par>
-            <p:par>
-              <p:cTn id="26" fill="hold" presetID="10" presetClass="entr" presetSubtype="0" dur="600" nodeType="clickEffect">
-                <p:stCondLst>
-                  <p:cond delay="3200"/>
-                </p:stCondLst>
-                <p:childTnLst/>
-              </p:cTn>
-            </p:par>
-            <p:par>
-              <p:cTn id="27" fill="hold" presetID="10" presetClass="entr" presetSubtype="0" dur="600" nodeType="clickEffect">
-                <p:stCondLst>
-                  <p:cond delay="3400"/>
-                </p:stCondLst>
-                <p:childTnLst/>
-              </p:cTn>
-            </p:par>
-            <p:par>
-              <p:cTn id="28" fill="hold" presetID="10" presetClass="entr" presetSubtype="0" dur="600" nodeType="clickEffect">
-                <p:stCondLst>
-                  <p:cond delay="3600"/>
-                </p:stCondLst>
-                <p:childTnLst/>
-              </p:cTn>
-            </p:par>
-            <p:par>
-              <p:cTn id="29" fill="hold" presetID="10" presetClass="entr" presetSubtype="0" dur="600" nodeType="clickEffect">
-                <p:stCondLst>
-                  <p:cond delay="3800"/>
-                </p:stCondLst>
-                <p:childTnLst/>
-              </p:cTn>
-            </p:par>
-            <p:par>
-              <p:cTn id="30" fill="hold" presetID="10" presetClass="entr" presetSubtype="0" dur="600" nodeType="clickEffect">
-                <p:stCondLst>
-                  <p:cond delay="4000"/>
-                </p:stCondLst>
-                <p:childTnLst/>
-              </p:cTn>
-            </p:par>
-            <p:par>
-              <p:cTn id="31" fill="hold" presetID="10" presetClass="entr" presetSubtype="0" dur="600" nodeType="clickEffect">
-                <p:stCondLst>
-                  <p:cond delay="4200"/>
-                </p:stCondLst>
-                <p:childTnLst/>
-              </p:cTn>
-            </p:par>
-            <p:par>
-              <p:cTn id="32" fill="hold" presetID="10" presetClass="entr" presetSubtype="0" dur="600" nodeType="clickEffect">
-                <p:stCondLst>
-                  <p:cond delay="4400"/>
-                </p:stCondLst>
-                <p:childTnLst/>
-              </p:cTn>
-            </p:par>
-            <p:par>
-              <p:cTn id="33" fill="hold" presetID="10" presetClass="entr" presetSubtype="0" dur="600" nodeType="clickEffect">
-                <p:stCondLst>
-                  <p:cond delay="4600"/>
-                </p:stCondLst>
-                <p:childTnLst/>
-              </p:cTn>
-            </p:par>
-            <p:par>
-              <p:cTn id="34" fill="hold" presetID="10" presetClass="entr" presetSubtype="0" dur="600" nodeType="clickEffect">
-                <p:stCondLst>
-                  <p:cond delay="4800"/>
-                </p:stCondLst>
-                <p:childTnLst/>
-              </p:cTn>
-            </p:par>
-            <p:par>
-              <p:cTn id="35" fill="hold" presetID="10" presetClass="entr" presetSubtype="0" dur="600" nodeType="clickEffect">
-                <p:stCondLst>
-                  <p:cond delay="5000"/>
-                </p:stCondLst>
-                <p:childTnLst/>
-              </p:cTn>
-            </p:par>
-            <p:par>
-              <p:cTn id="36" fill="hold" presetID="10" presetClass="entr" presetSubtype="0" dur="600" nodeType="clickEffect">
-                <p:stCondLst>
-                  <p:cond delay="5200"/>
-                </p:stCondLst>
-                <p:childTnLst/>
-              </p:cTn>
-            </p:par>
-            <p:par>
-              <p:cTn id="37" fill="hold" presetID="10" presetClass="entr" presetSubtype="0" dur="700" nodeType="clickEffect">
-                <p:stCondLst>
-                  <p:cond delay="5400"/>
-                </p:stCondLst>
-                <p:childTnLst/>
-              </p:cTn>
-            </p:par>
-          </p:childTnLst>
-        </p:cTn>
-      </p:par>
-    </p:tnLst>
-  </p:timing>
+  <p:transition spd="med" dur="525">
+    <p:fade/>
+  </p:transition>
 </p:sld>
 </file>
 
@@ -12362,8 +10879,8 @@
         </p:nvSpPr>
         <p:spPr>
           <a:xfrm>
-            <a:off x="701874" y="120304"/>
-            <a:ext cx="1922544" cy="36576"/>
+            <a:off x="636157" y="122429"/>
+            <a:ext cx="3122445" cy="36576"/>
           </a:xfrm>
           <a:prstGeom prst="rect">
             <a:avLst/>
@@ -12402,176 +10919,9 @@
   <p:clrMapOvr>
     <a:masterClrMapping/>
   </p:clrMapOvr>
-  <p:timing>
-    <p:tnLst>
-      <p:par>
-        <p:cTn id="1" dur="indefinite" restart="whenNotActive" nodeType="tmRoot">
-          <p:childTnLst>
-            <p:par>
-              <p:cTn id="10" fill="hold" presetID="10" presetClass="entr" presetSubtype="0" dur="600" nodeType="clickEffect">
-                <p:stCondLst>
-                  <p:cond evt="onClick" delay="0"/>
-                </p:stCondLst>
-                <p:childTnLst/>
-              </p:cTn>
-            </p:par>
-            <p:par>
-              <p:cTn id="11" fill="hold" presetID="10" presetClass="entr" presetSubtype="0" dur="600" nodeType="clickEffect">
-                <p:stCondLst>
-                  <p:cond delay="200"/>
-                </p:stCondLst>
-                <p:childTnLst/>
-              </p:cTn>
-            </p:par>
-            <p:par>
-              <p:cTn id="12" fill="hold" presetID="10" presetClass="entr" presetSubtype="0" dur="600" nodeType="clickEffect">
-                <p:stCondLst>
-                  <p:cond delay="400"/>
-                </p:stCondLst>
-                <p:childTnLst/>
-              </p:cTn>
-            </p:par>
-            <p:par>
-              <p:cTn id="13" fill="hold" presetID="10" presetClass="entr" presetSubtype="0" dur="600" nodeType="clickEffect">
-                <p:stCondLst>
-                  <p:cond delay="600"/>
-                </p:stCondLst>
-                <p:childTnLst/>
-              </p:cTn>
-            </p:par>
-            <p:par>
-              <p:cTn id="14" fill="hold" presetID="10" presetClass="entr" presetSubtype="0" dur="600" nodeType="clickEffect">
-                <p:stCondLst>
-                  <p:cond delay="800"/>
-                </p:stCondLst>
-                <p:childTnLst/>
-              </p:cTn>
-            </p:par>
-            <p:par>
-              <p:cTn id="15" fill="hold" presetID="10" presetClass="entr" presetSubtype="0" dur="600" nodeType="clickEffect">
-                <p:stCondLst>
-                  <p:cond delay="1000"/>
-                </p:stCondLst>
-                <p:childTnLst/>
-              </p:cTn>
-            </p:par>
-            <p:par>
-              <p:cTn id="16" fill="hold" presetID="10" presetClass="entr" presetSubtype="0" dur="600" nodeType="clickEffect">
-                <p:stCondLst>
-                  <p:cond delay="1200"/>
-                </p:stCondLst>
-                <p:childTnLst/>
-              </p:cTn>
-            </p:par>
-            <p:par>
-              <p:cTn id="17" fill="hold" presetID="10" presetClass="entr" presetSubtype="0" dur="700" nodeType="clickEffect">
-                <p:stCondLst>
-                  <p:cond delay="1400"/>
-                </p:stCondLst>
-                <p:childTnLst/>
-              </p:cTn>
-            </p:par>
-            <p:par>
-              <p:cTn id="18" fill="hold" presetID="10" presetClass="entr" presetSubtype="0" dur="600" nodeType="clickEffect">
-                <p:stCondLst>
-                  <p:cond delay="1600"/>
-                </p:stCondLst>
-                <p:childTnLst/>
-              </p:cTn>
-            </p:par>
-            <p:par>
-              <p:cTn id="19" fill="hold" presetID="10" presetClass="entr" presetSubtype="0" dur="600" nodeType="clickEffect">
-                <p:stCondLst>
-                  <p:cond delay="1800"/>
-                </p:stCondLst>
-                <p:childTnLst/>
-              </p:cTn>
-            </p:par>
-            <p:par>
-              <p:cTn id="20" fill="hold" presetID="10" presetClass="entr" presetSubtype="0" dur="600" nodeType="clickEffect">
-                <p:stCondLst>
-                  <p:cond delay="2000"/>
-                </p:stCondLst>
-                <p:childTnLst/>
-              </p:cTn>
-            </p:par>
-            <p:par>
-              <p:cTn id="21" fill="hold" presetID="10" presetClass="entr" presetSubtype="0" dur="600" nodeType="clickEffect">
-                <p:stCondLst>
-                  <p:cond delay="2200"/>
-                </p:stCondLst>
-                <p:childTnLst/>
-              </p:cTn>
-            </p:par>
-            <p:par>
-              <p:cTn id="22" fill="hold" presetID="10" presetClass="entr" presetSubtype="0" dur="500" nodeType="clickEffect">
-                <p:stCondLst>
-                  <p:cond delay="2400"/>
-                </p:stCondLst>
-                <p:childTnLst/>
-              </p:cTn>
-            </p:par>
-            <p:par>
-              <p:cTn id="23" fill="hold" presetID="10" presetClass="entr" presetSubtype="0" dur="500" nodeType="clickEffect">
-                <p:stCondLst>
-                  <p:cond delay="2600"/>
-                </p:stCondLst>
-                <p:childTnLst/>
-              </p:cTn>
-            </p:par>
-            <p:par>
-              <p:cTn id="24" fill="hold" presetID="10" presetClass="entr" presetSubtype="0" dur="600" nodeType="clickEffect">
-                <p:stCondLst>
-                  <p:cond delay="2800"/>
-                </p:stCondLst>
-                <p:childTnLst/>
-              </p:cTn>
-            </p:par>
-            <p:par>
-              <p:cTn id="25" fill="hold" presetID="10" presetClass="entr" presetSubtype="0" dur="600" nodeType="clickEffect">
-                <p:stCondLst>
-                  <p:cond delay="3000"/>
-                </p:stCondLst>
-                <p:childTnLst/>
-              </p:cTn>
-            </p:par>
-            <p:par>
-              <p:cTn id="26" fill="hold" presetID="10" presetClass="entr" presetSubtype="0" dur="600" nodeType="clickEffect">
-                <p:stCondLst>
-                  <p:cond delay="3200"/>
-                </p:stCondLst>
-                <p:childTnLst/>
-              </p:cTn>
-            </p:par>
-            <p:par>
-              <p:cTn id="27" fill="hold" presetID="10" presetClass="entr" presetSubtype="0" dur="600" nodeType="clickEffect">
-                <p:stCondLst>
-                  <p:cond delay="3400"/>
-                </p:stCondLst>
-                <p:childTnLst/>
-              </p:cTn>
-            </p:par>
-            <p:par>
-              <p:cTn id="28" fill="hold" presetID="10" presetClass="entr" presetSubtype="0" dur="600" nodeType="clickEffect">
-                <p:stCondLst>
-                  <p:cond delay="3600"/>
-                </p:stCondLst>
-                <p:childTnLst/>
-              </p:cTn>
-            </p:par>
-            <p:par>
-              <p:cTn id="29" fill="hold" presetID="10" presetClass="entr" presetSubtype="0" dur="600" nodeType="clickEffect">
-                <p:stCondLst>
-                  <p:cond delay="3800"/>
-                </p:stCondLst>
-                <p:childTnLst/>
-              </p:cTn>
-            </p:par>
-          </p:childTnLst>
-        </p:cTn>
-      </p:par>
-    </p:tnLst>
-  </p:timing>
+  <p:transition spd="med" dur="423">
+    <p:fade/>
+  </p:transition>
 </p:sld>
 </file>
 
@@ -12837,8 +11187,8 @@
         </p:nvSpPr>
         <p:spPr>
           <a:xfrm>
-            <a:off x="466105" y="115935"/>
-            <a:ext cx="1688648" cy="36576"/>
+            <a:off x="556592" y="82584"/>
+            <a:ext cx="1751786" cy="36576"/>
           </a:xfrm>
           <a:prstGeom prst="rect">
             <a:avLst/>
@@ -12877,6 +11227,9 @@
   <p:clrMapOvr>
     <a:masterClrMapping/>
   </p:clrMapOvr>
+  <p:transition spd="med" dur="484">
+    <p:fade/>
+  </p:transition>
 </p:sld>
 </file>
 
@@ -13887,8 +12240,8 @@
         </p:nvSpPr>
         <p:spPr>
           <a:xfrm>
-            <a:off x="593332" y="111815"/>
-            <a:ext cx="1980389" cy="36576"/>
+            <a:off x="583806" y="109656"/>
+            <a:ext cx="1506098" cy="36576"/>
           </a:xfrm>
           <a:prstGeom prst="rect">
             <a:avLst/>
@@ -13927,192 +12280,9 @@
   <p:clrMapOvr>
     <a:masterClrMapping/>
   </p:clrMapOvr>
-  <p:timing>
-    <p:tnLst>
-      <p:par>
-        <p:cTn id="1" dur="indefinite" restart="whenNotActive" nodeType="tmRoot">
-          <p:childTnLst>
-            <p:par>
-              <p:cTn id="10" fill="hold" presetID="10" presetClass="entr" presetSubtype="0" dur="600" nodeType="clickEffect">
-                <p:stCondLst>
-                  <p:cond evt="onClick" delay="0"/>
-                </p:stCondLst>
-                <p:childTnLst/>
-              </p:cTn>
-            </p:par>
-            <p:par>
-              <p:cTn id="11" fill="hold" presetID="10" presetClass="entr" presetSubtype="0" dur="600" nodeType="clickEffect">
-                <p:stCondLst>
-                  <p:cond delay="200"/>
-                </p:stCondLst>
-                <p:childTnLst/>
-              </p:cTn>
-            </p:par>
-            <p:par>
-              <p:cTn id="12" fill="hold" presetID="10" presetClass="entr" presetSubtype="0" dur="600" nodeType="clickEffect">
-                <p:stCondLst>
-                  <p:cond delay="400"/>
-                </p:stCondLst>
-                <p:childTnLst/>
-              </p:cTn>
-            </p:par>
-            <p:par>
-              <p:cTn id="13" fill="hold" presetID="10" presetClass="entr" presetSubtype="0" dur="600" nodeType="clickEffect">
-                <p:stCondLst>
-                  <p:cond delay="600"/>
-                </p:stCondLst>
-                <p:childTnLst/>
-              </p:cTn>
-            </p:par>
-            <p:par>
-              <p:cTn id="14" fill="hold" presetID="10" presetClass="entr" presetSubtype="0" dur="600" nodeType="clickEffect">
-                <p:stCondLst>
-                  <p:cond delay="800"/>
-                </p:stCondLst>
-                <p:childTnLst/>
-              </p:cTn>
-            </p:par>
-            <p:par>
-              <p:cTn id="15" fill="hold" presetID="10" presetClass="entr" presetSubtype="0" dur="600" nodeType="clickEffect">
-                <p:stCondLst>
-                  <p:cond delay="1000"/>
-                </p:stCondLst>
-                <p:childTnLst/>
-              </p:cTn>
-            </p:par>
-            <p:par>
-              <p:cTn id="16" fill="hold" presetID="10" presetClass="entr" presetSubtype="0" dur="600" nodeType="clickEffect">
-                <p:stCondLst>
-                  <p:cond delay="1200"/>
-                </p:stCondLst>
-                <p:childTnLst/>
-              </p:cTn>
-            </p:par>
-            <p:par>
-              <p:cTn id="17" fill="hold" presetID="10" presetClass="entr" presetSubtype="0" dur="600" nodeType="clickEffect">
-                <p:stCondLst>
-                  <p:cond delay="1400"/>
-                </p:stCondLst>
-                <p:childTnLst/>
-              </p:cTn>
-            </p:par>
-            <p:par>
-              <p:cTn id="18" fill="hold" presetID="10" presetClass="entr" presetSubtype="0" dur="600" nodeType="clickEffect">
-                <p:stCondLst>
-                  <p:cond delay="1600"/>
-                </p:stCondLst>
-                <p:childTnLst/>
-              </p:cTn>
-            </p:par>
-            <p:par>
-              <p:cTn id="19" fill="hold" presetID="10" presetClass="entr" presetSubtype="0" dur="600" nodeType="clickEffect">
-                <p:stCondLst>
-                  <p:cond delay="1800"/>
-                </p:stCondLst>
-                <p:childTnLst/>
-              </p:cTn>
-            </p:par>
-            <p:par>
-              <p:cTn id="20" fill="hold" presetID="10" presetClass="entr" presetSubtype="0" dur="600" nodeType="clickEffect">
-                <p:stCondLst>
-                  <p:cond delay="2000"/>
-                </p:stCondLst>
-                <p:childTnLst/>
-              </p:cTn>
-            </p:par>
-            <p:par>
-              <p:cTn id="21" fill="hold" presetID="10" presetClass="entr" presetSubtype="0" dur="600" nodeType="clickEffect">
-                <p:stCondLst>
-                  <p:cond delay="2200"/>
-                </p:stCondLst>
-                <p:childTnLst/>
-              </p:cTn>
-            </p:par>
-            <p:par>
-              <p:cTn id="22" fill="hold" presetID="10" presetClass="entr" presetSubtype="0" dur="600" nodeType="clickEffect">
-                <p:stCondLst>
-                  <p:cond delay="2400"/>
-                </p:stCondLst>
-                <p:childTnLst/>
-              </p:cTn>
-            </p:par>
-            <p:par>
-              <p:cTn id="23" fill="hold" presetID="10" presetClass="entr" presetSubtype="0" dur="600" nodeType="clickEffect">
-                <p:stCondLst>
-                  <p:cond delay="2600"/>
-                </p:stCondLst>
-                <p:childTnLst/>
-              </p:cTn>
-            </p:par>
-            <p:par>
-              <p:cTn id="24" fill="hold" presetID="10" presetClass="entr" presetSubtype="0" dur="600" nodeType="clickEffect">
-                <p:stCondLst>
-                  <p:cond delay="2800"/>
-                </p:stCondLst>
-                <p:childTnLst/>
-              </p:cTn>
-            </p:par>
-            <p:par>
-              <p:cTn id="25" fill="hold" presetID="10" presetClass="entr" presetSubtype="0" dur="600" nodeType="clickEffect">
-                <p:stCondLst>
-                  <p:cond delay="3000"/>
-                </p:stCondLst>
-                <p:childTnLst/>
-              </p:cTn>
-            </p:par>
-            <p:par>
-              <p:cTn id="26" fill="hold" presetID="10" presetClass="entr" presetSubtype="0" dur="600" nodeType="clickEffect">
-                <p:stCondLst>
-                  <p:cond delay="3200"/>
-                </p:stCondLst>
-                <p:childTnLst/>
-              </p:cTn>
-            </p:par>
-            <p:par>
-              <p:cTn id="27" fill="hold" presetID="10" presetClass="entr" presetSubtype="0" dur="600" nodeType="clickEffect">
-                <p:stCondLst>
-                  <p:cond delay="3400"/>
-                </p:stCondLst>
-                <p:childTnLst/>
-              </p:cTn>
-            </p:par>
-            <p:par>
-              <p:cTn id="28" fill="hold" presetID="10" presetClass="entr" presetSubtype="0" dur="600" nodeType="clickEffect">
-                <p:stCondLst>
-                  <p:cond delay="3600"/>
-                </p:stCondLst>
-                <p:childTnLst/>
-              </p:cTn>
-            </p:par>
-            <p:par>
-              <p:cTn id="29" fill="hold" presetID="10" presetClass="entr" presetSubtype="0" dur="700" nodeType="clickEffect">
-                <p:stCondLst>
-                  <p:cond delay="3800"/>
-                </p:stCondLst>
-                <p:childTnLst/>
-              </p:cTn>
-            </p:par>
-            <p:par>
-              <p:cTn id="30" fill="hold" presetID="10" presetClass="entr" presetSubtype="0" dur="600" nodeType="clickEffect">
-                <p:stCondLst>
-                  <p:cond delay="4000"/>
-                </p:stCondLst>
-                <p:childTnLst/>
-              </p:cTn>
-            </p:par>
-            <p:par>
-              <p:cTn id="31" fill="hold" presetID="10" presetClass="entr" presetSubtype="0" dur="600" nodeType="clickEffect">
-                <p:stCondLst>
-                  <p:cond delay="4200"/>
-                </p:stCondLst>
-                <p:childTnLst/>
-              </p:cTn>
-            </p:par>
-          </p:childTnLst>
-        </p:cTn>
-      </p:par>
-    </p:tnLst>
-  </p:timing>
+  <p:transition spd="med" dur="522">
+    <p:fade/>
+  </p:transition>
 </p:sld>
 </file>
 
@@ -15972,8 +14142,8 @@
         </p:nvSpPr>
         <p:spPr>
           <a:xfrm>
-            <a:off x="482972" y="131602"/>
-            <a:ext cx="2388952" cy="36576"/>
+            <a:off x="695756" y="134289"/>
+            <a:ext cx="2300025" cy="36576"/>
           </a:xfrm>
           <a:prstGeom prst="rect">
             <a:avLst/>
@@ -16012,144 +14182,9 @@
   <p:clrMapOvr>
     <a:masterClrMapping/>
   </p:clrMapOvr>
-  <p:timing>
-    <p:tnLst>
-      <p:par>
-        <p:cTn id="1" dur="indefinite" restart="whenNotActive" nodeType="tmRoot">
-          <p:childTnLst>
-            <p:par>
-              <p:cTn id="10" fill="hold" presetID="10" presetClass="entr" presetSubtype="0" dur="600" nodeType="clickEffect">
-                <p:stCondLst>
-                  <p:cond evt="onClick" delay="0"/>
-                </p:stCondLst>
-                <p:childTnLst/>
-              </p:cTn>
-            </p:par>
-            <p:par>
-              <p:cTn id="11" fill="hold" presetID="10" presetClass="entr" presetSubtype="0" dur="600" nodeType="clickEffect">
-                <p:stCondLst>
-                  <p:cond delay="200"/>
-                </p:stCondLst>
-                <p:childTnLst/>
-              </p:cTn>
-            </p:par>
-            <p:par>
-              <p:cTn id="12" fill="hold" presetID="10" presetClass="entr" presetSubtype="0" dur="600" nodeType="clickEffect">
-                <p:stCondLst>
-                  <p:cond delay="400"/>
-                </p:stCondLst>
-                <p:childTnLst/>
-              </p:cTn>
-            </p:par>
-            <p:par>
-              <p:cTn id="13" fill="hold" presetID="10" presetClass="entr" presetSubtype="0" dur="600" nodeType="clickEffect">
-                <p:stCondLst>
-                  <p:cond delay="600"/>
-                </p:stCondLst>
-                <p:childTnLst/>
-              </p:cTn>
-            </p:par>
-            <p:par>
-              <p:cTn id="14" fill="hold" presetID="10" presetClass="entr" presetSubtype="0" dur="600" nodeType="clickEffect">
-                <p:stCondLst>
-                  <p:cond delay="800"/>
-                </p:stCondLst>
-                <p:childTnLst/>
-              </p:cTn>
-            </p:par>
-            <p:par>
-              <p:cTn id="15" fill="hold" presetID="10" presetClass="entr" presetSubtype="0" dur="600" nodeType="clickEffect">
-                <p:stCondLst>
-                  <p:cond delay="1000"/>
-                </p:stCondLst>
-                <p:childTnLst/>
-              </p:cTn>
-            </p:par>
-            <p:par>
-              <p:cTn id="16" fill="hold" presetID="10" presetClass="entr" presetSubtype="0" dur="600" nodeType="clickEffect">
-                <p:stCondLst>
-                  <p:cond delay="1200"/>
-                </p:stCondLst>
-                <p:childTnLst/>
-              </p:cTn>
-            </p:par>
-            <p:par>
-              <p:cTn id="17" fill="hold" presetID="10" presetClass="entr" presetSubtype="0" dur="600" nodeType="clickEffect">
-                <p:stCondLst>
-                  <p:cond delay="1400"/>
-                </p:stCondLst>
-                <p:childTnLst/>
-              </p:cTn>
-            </p:par>
-            <p:par>
-              <p:cTn id="18" fill="hold" presetID="10" presetClass="entr" presetSubtype="0" dur="600" nodeType="clickEffect">
-                <p:stCondLst>
-                  <p:cond delay="1600"/>
-                </p:stCondLst>
-                <p:childTnLst/>
-              </p:cTn>
-            </p:par>
-            <p:par>
-              <p:cTn id="19" fill="hold" presetID="10" presetClass="entr" presetSubtype="0" dur="600" nodeType="clickEffect">
-                <p:stCondLst>
-                  <p:cond delay="1800"/>
-                </p:stCondLst>
-                <p:childTnLst/>
-              </p:cTn>
-            </p:par>
-            <p:par>
-              <p:cTn id="20" fill="hold" presetID="10" presetClass="entr" presetSubtype="0" dur="600" nodeType="clickEffect">
-                <p:stCondLst>
-                  <p:cond delay="2000"/>
-                </p:stCondLst>
-                <p:childTnLst/>
-              </p:cTn>
-            </p:par>
-            <p:par>
-              <p:cTn id="21" fill="hold" presetID="10" presetClass="entr" presetSubtype="0" dur="600" nodeType="clickEffect">
-                <p:stCondLst>
-                  <p:cond delay="2200"/>
-                </p:stCondLst>
-                <p:childTnLst/>
-              </p:cTn>
-            </p:par>
-            <p:par>
-              <p:cTn id="22" fill="hold" presetID="10" presetClass="entr" presetSubtype="0" dur="600" nodeType="clickEffect">
-                <p:stCondLst>
-                  <p:cond delay="2400"/>
-                </p:stCondLst>
-                <p:childTnLst/>
-              </p:cTn>
-            </p:par>
-            <p:par>
-              <p:cTn id="23" fill="hold" presetID="10" presetClass="entr" presetSubtype="0" dur="600" nodeType="clickEffect">
-                <p:stCondLst>
-                  <p:cond delay="2600"/>
-                </p:stCondLst>
-                <p:childTnLst/>
-              </p:cTn>
-            </p:par>
-            <p:par>
-              <p:cTn id="24" fill="hold" presetID="10" presetClass="entr" presetSubtype="0" dur="600" nodeType="clickEffect">
-                <p:stCondLst>
-                  <p:cond delay="2800"/>
-                </p:stCondLst>
-                <p:childTnLst/>
-              </p:cTn>
-            </p:par>
-            <p:par>
-              <p:cTn id="25" fill="hold" presetID="10" presetClass="entr" presetSubtype="0" dur="600" nodeType="clickEffect">
-                <p:stCondLst>
-                  <p:cond delay="3000"/>
-                </p:stCondLst>
-                <p:childTnLst/>
-              </p:cTn>
-            </p:par>
-          </p:childTnLst>
-        </p:cTn>
-      </p:par>
-    </p:tnLst>
-  </p:timing>
+  <p:transition spd="med" dur="488">
+    <p:fade/>
+  </p:transition>
 </p:sld>
 </file>
 
@@ -17435,8 +15470,8 @@
         </p:nvSpPr>
         <p:spPr>
           <a:xfrm>
-            <a:off x="783792" y="84982"/>
-            <a:ext cx="1821004" cy="36576"/>
+            <a:off x="669387" y="75884"/>
+            <a:ext cx="1884656" cy="36576"/>
           </a:xfrm>
           <a:prstGeom prst="rect">
             <a:avLst/>
@@ -17475,72 +15510,9 @@
   <p:clrMapOvr>
     <a:masterClrMapping/>
   </p:clrMapOvr>
-  <p:timing>
-    <p:tnLst>
-      <p:par>
-        <p:cTn id="1" dur="indefinite" restart="whenNotActive" nodeType="tmRoot">
-          <p:childTnLst>
-            <p:par>
-              <p:cTn id="10" fill="hold" presetID="10" presetClass="entr" presetSubtype="0" dur="600" nodeType="clickEffect">
-                <p:stCondLst>
-                  <p:cond evt="onClick" delay="0"/>
-                </p:stCondLst>
-                <p:childTnLst/>
-              </p:cTn>
-            </p:par>
-            <p:par>
-              <p:cTn id="11" fill="hold" presetID="10" presetClass="entr" presetSubtype="0" dur="600" nodeType="clickEffect">
-                <p:stCondLst>
-                  <p:cond delay="200"/>
-                </p:stCondLst>
-                <p:childTnLst/>
-              </p:cTn>
-            </p:par>
-            <p:par>
-              <p:cTn id="12" fill="hold" presetID="10" presetClass="entr" presetSubtype="0" dur="600" nodeType="clickEffect">
-                <p:stCondLst>
-                  <p:cond delay="400"/>
-                </p:stCondLst>
-                <p:childTnLst/>
-              </p:cTn>
-            </p:par>
-            <p:par>
-              <p:cTn id="13" fill="hold" presetID="10" presetClass="entr" presetSubtype="0" dur="600" nodeType="clickEffect">
-                <p:stCondLst>
-                  <p:cond delay="600"/>
-                </p:stCondLst>
-                <p:childTnLst/>
-              </p:cTn>
-            </p:par>
-            <p:par>
-              <p:cTn id="14" fill="hold" presetID="10" presetClass="entr" presetSubtype="0" dur="600" nodeType="clickEffect">
-                <p:stCondLst>
-                  <p:cond delay="800"/>
-                </p:stCondLst>
-                <p:childTnLst/>
-              </p:cTn>
-            </p:par>
-            <p:par>
-              <p:cTn id="15" fill="hold" presetID="10" presetClass="entr" presetSubtype="0" dur="600" nodeType="clickEffect">
-                <p:stCondLst>
-                  <p:cond delay="1000"/>
-                </p:stCondLst>
-                <p:childTnLst/>
-              </p:cTn>
-            </p:par>
-            <p:par>
-              <p:cTn id="16" fill="hold" presetID="10" presetClass="entr" presetSubtype="0" dur="700" nodeType="clickEffect">
-                <p:stCondLst>
-                  <p:cond delay="1200"/>
-                </p:stCondLst>
-                <p:childTnLst/>
-              </p:cTn>
-            </p:par>
-          </p:childTnLst>
-        </p:cTn>
-      </p:par>
-    </p:tnLst>
-  </p:timing>
+  <p:transition spd="med" dur="663">
+    <p:fade/>
+  </p:transition>
 </p:sld>
 </file>
 
@@ -17806,8 +15778,8 @@
         </p:nvSpPr>
         <p:spPr>
           <a:xfrm>
-            <a:off x="776836" y="130472"/>
-            <a:ext cx="1605314" cy="36576"/>
+            <a:off x="828011" y="97138"/>
+            <a:ext cx="2628447" cy="36576"/>
           </a:xfrm>
           <a:prstGeom prst="rect">
             <a:avLst/>
@@ -17846,80 +15818,9 @@
   <p:clrMapOvr>
     <a:masterClrMapping/>
   </p:clrMapOvr>
-  <p:timing>
-    <p:tnLst>
-      <p:par>
-        <p:cTn id="1" dur="indefinite" restart="whenNotActive" nodeType="tmRoot">
-          <p:childTnLst>
-            <p:par>
-              <p:cTn id="10" fill="hold" presetID="10" presetClass="entr" presetSubtype="0" dur="600" nodeType="clickEffect">
-                <p:stCondLst>
-                  <p:cond evt="onClick" delay="0"/>
-                </p:stCondLst>
-                <p:childTnLst/>
-              </p:cTn>
-            </p:par>
-            <p:par>
-              <p:cTn id="11" fill="hold" presetID="10" presetClass="entr" presetSubtype="0" dur="600" nodeType="clickEffect">
-                <p:stCondLst>
-                  <p:cond delay="200"/>
-                </p:stCondLst>
-                <p:childTnLst/>
-              </p:cTn>
-            </p:par>
-            <p:par>
-              <p:cTn id="12" fill="hold" presetID="10" presetClass="entr" presetSubtype="0" dur="600" nodeType="clickEffect">
-                <p:stCondLst>
-                  <p:cond delay="400"/>
-                </p:stCondLst>
-                <p:childTnLst/>
-              </p:cTn>
-            </p:par>
-            <p:par>
-              <p:cTn id="13" fill="hold" presetID="10" presetClass="entr" presetSubtype="0" dur="500" nodeType="clickEffect">
-                <p:stCondLst>
-                  <p:cond delay="600"/>
-                </p:stCondLst>
-                <p:childTnLst/>
-              </p:cTn>
-            </p:par>
-            <p:par>
-              <p:cTn id="14" fill="hold" presetID="10" presetClass="entr" presetSubtype="0" dur="600" nodeType="clickEffect">
-                <p:stCondLst>
-                  <p:cond delay="800"/>
-                </p:stCondLst>
-                <p:childTnLst/>
-              </p:cTn>
-            </p:par>
-            <p:par>
-              <p:cTn id="15" fill="hold" presetID="10" presetClass="entr" presetSubtype="0" dur="600" nodeType="clickEffect">
-                <p:stCondLst>
-                  <p:cond delay="1000"/>
-                </p:stCondLst>
-                <p:childTnLst/>
-              </p:cTn>
-            </p:par>
-            <p:par>
-              <p:cTn id="16" fill="hold" presetID="10" presetClass="entr" presetSubtype="0" dur="600" nodeType="clickEffect">
-                <p:stCondLst>
-                  <p:cond delay="1200"/>
-                </p:stCondLst>
-                <p:childTnLst/>
-              </p:cTn>
-            </p:par>
-            <p:par>
-              <p:cTn id="17" fill="hold" presetID="10" presetClass="entr" presetSubtype="0" dur="600" nodeType="clickEffect">
-                <p:stCondLst>
-                  <p:cond delay="1400"/>
-                </p:stCondLst>
-                <p:childTnLst/>
-              </p:cTn>
-            </p:par>
-          </p:childTnLst>
-        </p:cTn>
-      </p:par>
-    </p:tnLst>
-  </p:timing>
+  <p:transition spd="med" dur="522">
+    <p:fade/>
+  </p:transition>
 </p:sld>
 </file>
 

--- a/output/Devoir N°2_redesigned.pptx
+++ b/output/Devoir N°2_redesigned.pptx
@@ -1856,8 +1856,8 @@
         </p:nvSpPr>
         <p:spPr>
           <a:xfrm>
-            <a:off x="548640" y="0"/>
-            <a:ext cx="6858000" cy="5143500"/>
+            <a:off x="0" y="0"/>
+            <a:ext cx="228600" cy="5143500"/>
           </a:xfrm>
           <a:prstGeom prst="rect">
             <a:avLst/>
@@ -1868,10 +1868,9 @@
           <a:ln/>
         </p:spPr>
         <p:txBody>
-          <a:bodyPr wrap="square"/>
-          <a:lstStyle/>
-          <a:p>
-            <a:pPr algn="l"/>
+          <a:bodyPr/>
+          <a:lstStyle/>
+          <a:p>
             <a:endParaRPr lang="fr-FR"/>
           </a:p>
         </p:txBody>
@@ -1896,10 +1895,9 @@
           <a:ln/>
         </p:spPr>
         <p:txBody>
-          <a:bodyPr wrap="square"/>
-          <a:lstStyle/>
-          <a:p>
-            <a:pPr algn="l"/>
+          <a:bodyPr/>
+          <a:lstStyle/>
+          <a:p>
             <a:endParaRPr lang="fr-FR"/>
           </a:p>
         </p:txBody>
@@ -1929,10 +1927,9 @@
           </a:ln>
         </p:spPr>
         <p:txBody>
-          <a:bodyPr wrap="square"/>
-          <a:lstStyle/>
-          <a:p>
-            <a:pPr algn="l"/>
+          <a:bodyPr/>
+          <a:lstStyle/>
+          <a:p>
             <a:endParaRPr lang="fr-FR"/>
           </a:p>
         </p:txBody>
@@ -1962,10 +1959,9 @@
           </a:ln>
         </p:spPr>
         <p:txBody>
-          <a:bodyPr wrap="square"/>
-          <a:lstStyle/>
-          <a:p>
-            <a:pPr algn="l"/>
+          <a:bodyPr/>
+          <a:lstStyle/>
+          <a:p>
             <a:endParaRPr lang="fr-FR"/>
           </a:p>
         </p:txBody>
@@ -1991,11 +1987,11 @@
           <a:bodyPr wrap="square" rtlCol="0" anchor="ctr"/>
           <a:lstStyle/>
           <a:p>
-            <a:pPr marL="0" indent="0" algn="l">
-              <a:buNone/>
-            </a:pPr>
-            <a:r>
-              <a:rPr lang="en-US" sz="2200" b="0" kern="0" spc="300" dirty="0" u="none">
+            <a:pPr marL="0" indent="0">
+              <a:buNone/>
+            </a:pPr>
+            <a:r>
+              <a:rPr lang="en-US" sz="1200" b="1" kern="0" spc="300" dirty="0">
                 <a:solidFill>
                   <a:srgbClr val="C8A84B"/>
                 </a:solidFill>
@@ -2030,11 +2026,11 @@
           <a:bodyPr wrap="square" rtlCol="0" anchor="ctr"/>
           <a:lstStyle/>
           <a:p>
-            <a:pPr marL="0" indent="0" algn="l">
-              <a:buNone/>
-            </a:pPr>
-            <a:r>
-              <a:rPr lang="en-US" sz="2200" b="0" dirty="0" u="none">
+            <a:pPr marL="0" indent="0">
+              <a:buNone/>
+            </a:pPr>
+            <a:r>
+              <a:rPr lang="en-US" sz="3600" b="1" dirty="0">
                 <a:solidFill>
                   <a:srgbClr val="C8A84B"/>
                 </a:solidFill>
@@ -2069,11 +2065,11 @@
           <a:bodyPr wrap="square" rtlCol="0" anchor="ctr"/>
           <a:lstStyle/>
           <a:p>
-            <a:pPr marL="0" indent="0" algn="l">
-              <a:buNone/>
-            </a:pPr>
-            <a:r>
-              <a:rPr lang="en-US" sz="2200" i="1" dirty="0" b="0" u="none">
+            <a:pPr marL="0" indent="0">
+              <a:buNone/>
+            </a:pPr>
+            <a:r>
+              <a:rPr lang="en-US" sz="1800" i="1" dirty="0">
                 <a:solidFill>
                   <a:srgbClr val="C8A84B"/>
                 </a:solidFill>
@@ -2107,10 +2103,9 @@
           <a:ln/>
         </p:spPr>
         <p:txBody>
-          <a:bodyPr wrap="square"/>
-          <a:lstStyle/>
-          <a:p>
-            <a:pPr algn="l"/>
+          <a:bodyPr/>
+          <a:lstStyle/>
+          <a:p>
             <a:endParaRPr lang="fr-FR"/>
           </a:p>
         </p:txBody>
@@ -2136,7 +2131,7 @@
           <a:bodyPr wrap="square" rtlCol="0" anchor="ctr"/>
           <a:lstStyle/>
           <a:p>
-            <a:pPr marL="0" indent="0" algn="l">
+            <a:pPr marL="0" indent="0">
               <a:buNone/>
             </a:pPr>
             <a:endParaRPr lang="en-US" sz="1300" dirty="0"/>
@@ -2164,11 +2159,11 @@
           <a:bodyPr wrap="square" rtlCol="0" anchor="ctr"/>
           <a:lstStyle/>
           <a:p>
-            <a:pPr marL="0" indent="0" algn="l">
-              <a:buNone/>
-            </a:pPr>
-            <a:r>
-              <a:rPr lang="en-US" sz="2200" b="0" dirty="0" u="none">
+            <a:pPr marL="0" indent="0">
+              <a:buNone/>
+            </a:pPr>
+            <a:r>
+              <a:rPr lang="en-US" sz="1100" b="1" dirty="0">
                 <a:solidFill>
                   <a:srgbClr val="C8A84B"/>
                 </a:solidFill>
@@ -2179,7 +2174,7 @@
               <a:t>Groupe : </a:t>
             </a:r>
             <a:r>
-              <a:rPr lang="en-US" sz="2200" dirty="0" b="0" u="none">
+              <a:rPr lang="en-US" sz="1100" dirty="0">
                 <a:solidFill>
                   <a:srgbClr val="C8A84B"/>
                 </a:solidFill>
@@ -2214,7 +2209,7 @@
           <a:bodyPr wrap="square" rtlCol="0" anchor="ctr"/>
           <a:lstStyle/>
           <a:p>
-            <a:pPr marL="0" indent="0" algn="l">
+            <a:pPr marL="0" indent="0">
               <a:buNone/>
             </a:pPr>
             <a:endParaRPr lang="en-US" sz="1000" dirty="0"/>
@@ -2242,7 +2237,7 @@
           <a:bodyPr wrap="square" rtlCol="0" anchor="ctr"/>
           <a:lstStyle/>
           <a:p>
-            <a:pPr marL="0" indent="0" algn="l">
+            <a:pPr marL="0" indent="0">
               <a:buNone/>
             </a:pPr>
             <a:endParaRPr lang="en-US" sz="1000" dirty="0"/>
@@ -2254,7 +2249,7 @@
   <p:clrMapOvr>
     <a:masterClrMapping/>
   </p:clrMapOvr>
-  <p:transition spd="med" dur="461">
+  <p:transition spd="med" dur="565">
     <p:fade/>
   </p:transition>
 </p:sld>
@@ -2313,7 +2308,6 @@
           <a:bodyPr/>
           <a:lstStyle/>
           <a:p>
-            <a:pPr algn="l"/>
             <a:endParaRPr lang="fr-FR"/>
           </a:p>
         </p:txBody>
@@ -2339,11 +2333,11 @@
           <a:bodyPr wrap="square" lIns="0" tIns="0" rIns="0" bIns="0" rtlCol="0" anchor="ctr"/>
           <a:lstStyle/>
           <a:p>
-            <a:pPr marL="0" indent="0" algn="l">
-              <a:buNone/>
-            </a:pPr>
-            <a:r>
-              <a:rPr lang="en-US" sz="2000" b="0" kern="0" spc="200" dirty="0" u="none">
+            <a:pPr marL="0" indent="0">
+              <a:buNone/>
+            </a:pPr>
+            <a:r>
+              <a:rPr lang="en-US" sz="1100" b="1" kern="0" spc="200" dirty="0">
                 <a:solidFill>
                   <a:srgbClr val="1C2B3A"/>
                 </a:solidFill>
@@ -2378,11 +2372,11 @@
           <a:bodyPr wrap="square" lIns="0" tIns="0" rIns="0" bIns="0" rtlCol="0" anchor="ctr"/>
           <a:lstStyle/>
           <a:p>
-            <a:pPr marL="0" indent="0" algn="l">
-              <a:buNone/>
-            </a:pPr>
-            <a:r>
-              <a:rPr lang="en-US" sz="2000" b="0" dirty="0" u="none">
+            <a:pPr marL="0" indent="0">
+              <a:buNone/>
+            </a:pPr>
+            <a:r>
+              <a:rPr lang="en-US" sz="2800" b="1" dirty="0">
                 <a:solidFill>
                   <a:srgbClr val="1C2B3A"/>
                 </a:solidFill>
@@ -2419,7 +2413,6 @@
           <a:bodyPr/>
           <a:lstStyle/>
           <a:p>
-            <a:pPr algn="l"/>
             <a:endParaRPr lang="fr-FR"/>
           </a:p>
         </p:txBody>
@@ -2447,7 +2440,6 @@
           <a:bodyPr/>
           <a:lstStyle/>
           <a:p>
-            <a:pPr algn="l"/>
             <a:endParaRPr lang="fr-FR"/>
           </a:p>
         </p:txBody>
@@ -2473,11 +2465,11 @@
           <a:bodyPr wrap="square" lIns="0" tIns="0" rIns="0" bIns="0" rtlCol="0" anchor="ctr"/>
           <a:lstStyle/>
           <a:p>
-            <a:pPr marL="0" indent="0" algn="l">
-              <a:buNone/>
-            </a:pPr>
-            <a:r>
-              <a:rPr lang="en-US" sz="2000" dirty="0" b="0" u="none">
+            <a:pPr marL="0" indent="0" algn="r">
+              <a:buNone/>
+            </a:pPr>
+            <a:r>
+              <a:rPr lang="en-US" sz="900" dirty="0">
                 <a:solidFill>
                   <a:srgbClr val="1C2B3A"/>
                 </a:solidFill>
@@ -2519,7 +2511,6 @@
           <a:bodyPr/>
           <a:lstStyle/>
           <a:p>
-            <a:pPr algn="l"/>
             <a:endParaRPr lang="fr-FR"/>
           </a:p>
         </p:txBody>
@@ -2552,7 +2543,6 @@
           <a:bodyPr/>
           <a:lstStyle/>
           <a:p>
-            <a:pPr algn="l"/>
             <a:endParaRPr lang="fr-FR"/>
           </a:p>
         </p:txBody>
@@ -2578,11 +2568,11 @@
           <a:bodyPr wrap="square" lIns="0" tIns="0" rIns="0" bIns="0" rtlCol="0" anchor="ctr"/>
           <a:lstStyle/>
           <a:p>
-            <a:pPr marL="0" indent="0" algn="l">
-              <a:buNone/>
-            </a:pPr>
-            <a:r>
-              <a:rPr lang="en-US" sz="2000" b="0" dirty="0" u="none">
+            <a:pPr marL="0" indent="0">
+              <a:buNone/>
+            </a:pPr>
+            <a:r>
+              <a:rPr lang="en-US" sz="1100" b="1" dirty="0">
                 <a:solidFill>
                   <a:srgbClr val="1C2B3A"/>
                 </a:solidFill>
@@ -2593,7 +2583,7 @@
               <a:t>Définition.  </a:t>
             </a:r>
             <a:r>
-              <a:rPr lang="en-US" sz="2000" dirty="0" b="0" u="none">
+              <a:rPr lang="en-US" sz="1100" dirty="0">
                 <a:solidFill>
                   <a:srgbClr val="1C2B3A"/>
                 </a:solidFill>
@@ -2604,7 +2594,7 @@
               <a:t>La Gestion de la Relation Client (GRC ou CRM) regroupe l'ensemble des stratégies, processus et outils visant à identifier, attirer, fidéliser et développer une relation durable et personnalisée avec chaque client. Le </a:t>
             </a:r>
             <a:r>
-              <a:rPr lang="en-US" sz="2000" b="0" dirty="0" u="none">
+              <a:rPr lang="en-US" sz="1100" b="1" dirty="0">
                 <a:solidFill>
                   <a:srgbClr val="1C2B3A"/>
                 </a:solidFill>
@@ -2615,7 +2605,7 @@
               <a:t>marketing relationnel</a:t>
             </a:r>
             <a:r>
-              <a:rPr lang="en-US" sz="2000" dirty="0" b="0" u="none">
+              <a:rPr lang="en-US" sz="1100" dirty="0">
                 <a:solidFill>
                   <a:srgbClr val="1C2B3A"/>
                 </a:solidFill>
@@ -2650,11 +2640,11 @@
           <a:bodyPr wrap="square" lIns="0" tIns="0" rIns="0" bIns="0" rtlCol="0" anchor="ctr"/>
           <a:lstStyle/>
           <a:p>
-            <a:pPr marL="0" indent="0" algn="l">
-              <a:buNone/>
-            </a:pPr>
-            <a:r>
-              <a:rPr lang="en-US" sz="2000" b="0" dirty="0" u="none">
+            <a:pPr marL="0" indent="0">
+              <a:buNone/>
+            </a:pPr>
+            <a:r>
+              <a:rPr lang="en-US" sz="1300" b="1" dirty="0">
                 <a:solidFill>
                   <a:srgbClr val="1C2B3A"/>
                 </a:solidFill>
@@ -3466,8 +3456,8 @@
         </p:nvSpPr>
         <p:spPr>
           <a:xfrm>
-            <a:off x="790591" y="114409"/>
-            <a:ext cx="3066708" cy="36576"/>
+            <a:off x="0" y="0"/>
+            <a:ext cx="9144000" cy="76200"/>
           </a:xfrm>
           <a:prstGeom prst="rect">
             <a:avLst/>
@@ -3506,7 +3496,7 @@
   <p:clrMapOvr>
     <a:masterClrMapping/>
   </p:clrMapOvr>
-  <p:transition spd="med" dur="524">
+  <p:transition spd="med" dur="634">
     <p:fade/>
   </p:transition>
 </p:sld>
@@ -3565,7 +3555,6 @@
           <a:bodyPr/>
           <a:lstStyle/>
           <a:p>
-            <a:pPr algn="ctr"/>
             <a:endParaRPr lang="fr-FR"/>
           </a:p>
         </p:txBody>
@@ -3591,11 +3580,11 @@
           <a:bodyPr wrap="square" lIns="0" tIns="0" rIns="0" bIns="0" rtlCol="0" anchor="ctr"/>
           <a:lstStyle/>
           <a:p>
-            <a:pPr marL="0" indent="0" algn="ctr">
-              <a:buNone/>
-            </a:pPr>
-            <a:r>
-              <a:rPr lang="en-US" sz="2000" b="0" kern="0" spc="200" dirty="0" u="none">
+            <a:pPr marL="0" indent="0">
+              <a:buNone/>
+            </a:pPr>
+            <a:r>
+              <a:rPr lang="en-US" sz="1100" b="1" kern="0" spc="200" dirty="0">
                 <a:solidFill>
                   <a:srgbClr val="1C2B3A"/>
                 </a:solidFill>
@@ -3630,11 +3619,11 @@
           <a:bodyPr wrap="square" lIns="0" tIns="0" rIns="0" bIns="0" rtlCol="0" anchor="ctr"/>
           <a:lstStyle/>
           <a:p>
-            <a:pPr marL="0" indent="0" algn="ctr">
-              <a:buNone/>
-            </a:pPr>
-            <a:r>
-              <a:rPr lang="en-US" sz="2000" b="0" dirty="0" u="none">
+            <a:pPr marL="0" indent="0">
+              <a:buNone/>
+            </a:pPr>
+            <a:r>
+              <a:rPr lang="en-US" sz="2800" b="1" dirty="0">
                 <a:solidFill>
                   <a:srgbClr val="1C2B3A"/>
                 </a:solidFill>
@@ -3671,7 +3660,6 @@
           <a:bodyPr/>
           <a:lstStyle/>
           <a:p>
-            <a:pPr algn="ctr"/>
             <a:endParaRPr lang="fr-FR"/>
           </a:p>
         </p:txBody>
@@ -3699,7 +3687,6 @@
           <a:bodyPr/>
           <a:lstStyle/>
           <a:p>
-            <a:pPr algn="ctr"/>
             <a:endParaRPr lang="fr-FR"/>
           </a:p>
         </p:txBody>
@@ -3725,11 +3712,11 @@
           <a:bodyPr wrap="square" lIns="0" tIns="0" rIns="0" bIns="0" rtlCol="0" anchor="ctr"/>
           <a:lstStyle/>
           <a:p>
-            <a:pPr marL="0" indent="0" algn="ctr">
-              <a:buNone/>
-            </a:pPr>
-            <a:r>
-              <a:rPr lang="en-US" sz="2000" dirty="0" b="0" u="none">
+            <a:pPr marL="0" indent="0" algn="r">
+              <a:buNone/>
+            </a:pPr>
+            <a:r>
+              <a:rPr lang="en-US" sz="900" dirty="0">
                 <a:solidFill>
                   <a:srgbClr val="1C2B3A"/>
                 </a:solidFill>
@@ -3771,7 +3758,6 @@
           <a:bodyPr/>
           <a:lstStyle/>
           <a:p>
-            <a:pPr algn="ctr"/>
             <a:endParaRPr lang="fr-FR"/>
           </a:p>
         </p:txBody>
@@ -3804,7 +3790,6 @@
           <a:bodyPr/>
           <a:lstStyle/>
           <a:p>
-            <a:pPr algn="ctr"/>
             <a:endParaRPr lang="fr-FR"/>
           </a:p>
         </p:txBody>
@@ -3830,11 +3815,11 @@
           <a:bodyPr wrap="square" lIns="0" tIns="0" rIns="0" bIns="0" rtlCol="0" anchor="ctr"/>
           <a:lstStyle/>
           <a:p>
-            <a:pPr marL="0" indent="0" algn="ctr">
-              <a:buNone/>
-            </a:pPr>
-            <a:r>
-              <a:rPr lang="en-US" sz="2000" b="0" dirty="0" u="none">
+            <a:pPr marL="0" indent="0">
+              <a:buNone/>
+            </a:pPr>
+            <a:r>
+              <a:rPr lang="en-US" sz="1100" b="1" dirty="0">
                 <a:solidFill>
                   <a:srgbClr val="1C2B3A"/>
                 </a:solidFill>
@@ -3845,7 +3830,7 @@
               <a:t>Définition.  </a:t>
             </a:r>
             <a:r>
-              <a:rPr lang="en-US" sz="2000" dirty="0" b="0" u="none">
+              <a:rPr lang="en-US" sz="1100" dirty="0">
                 <a:solidFill>
                   <a:srgbClr val="1C2B3A"/>
                 </a:solidFill>
@@ -3856,7 +3841,7 @@
               <a:t>Le parcours client (customer journey) désigne l'ensemble des étapes physiques et </a:t>
             </a:r>
             <a:r>
-              <a:rPr lang="en-US" sz="2000" dirty="0" err="1" b="0" u="none">
+              <a:rPr lang="en-US" sz="1100" dirty="0" err="1">
                 <a:solidFill>
                   <a:srgbClr val="1C2B3A"/>
                 </a:solidFill>
@@ -3867,7 +3852,7 @@
               <a:t>digitales</a:t>
             </a:r>
             <a:r>
-              <a:rPr lang="en-US" sz="2000" dirty="0" b="0" u="none">
+              <a:rPr lang="en-US" sz="1100" dirty="0">
                 <a:solidFill>
                   <a:srgbClr val="1C2B3A"/>
                 </a:solidFill>
@@ -3878,7 +3863,7 @@
               <a:t> qu'un client traverse dans sa relation avec </a:t>
             </a:r>
             <a:r>
-              <a:rPr lang="en-US" sz="2000" dirty="0" err="1" b="0" u="none">
+              <a:rPr lang="en-US" sz="1100" dirty="0" err="1">
                 <a:solidFill>
                   <a:srgbClr val="1C2B3A"/>
                 </a:solidFill>
@@ -3889,7 +3874,7 @@
               <a:t>une</a:t>
             </a:r>
             <a:r>
-              <a:rPr lang="en-US" sz="2000" dirty="0" b="0" u="none">
+              <a:rPr lang="en-US" sz="1100" dirty="0">
                 <a:solidFill>
                   <a:srgbClr val="1C2B3A"/>
                 </a:solidFill>
@@ -3931,7 +3916,6 @@
           <a:bodyPr/>
           <a:lstStyle/>
           <a:p>
-            <a:pPr algn="ctr"/>
             <a:endParaRPr lang="fr-FR"/>
           </a:p>
         </p:txBody>
@@ -3964,7 +3948,6 @@
           <a:bodyPr/>
           <a:lstStyle/>
           <a:p>
-            <a:pPr algn="ctr"/>
             <a:endParaRPr lang="fr-FR"/>
           </a:p>
         </p:txBody>
@@ -3994,7 +3977,7 @@
               <a:buNone/>
             </a:pPr>
             <a:r>
-              <a:rPr lang="en-US" sz="2000" b="0" kern="0" spc="200" dirty="0" u="none">
+              <a:rPr lang="en-US" sz="1300" b="1" kern="0" spc="200" dirty="0">
                 <a:solidFill>
                   <a:srgbClr val="1C2B3A"/>
                 </a:solidFill>
@@ -4029,11 +4012,11 @@
           <a:bodyPr wrap="square" lIns="0" tIns="0" rIns="0" bIns="0" rtlCol="0" anchor="ctr"/>
           <a:lstStyle/>
           <a:p>
-            <a:pPr marL="0" indent="0" algn="ctr">
-              <a:buNone/>
-            </a:pPr>
-            <a:r>
-              <a:rPr lang="en-US" sz="2000" b="0" dirty="0" u="none">
+            <a:pPr marL="0" indent="0">
+              <a:buNone/>
+            </a:pPr>
+            <a:r>
+              <a:rPr lang="en-US" sz="1200" b="1" dirty="0">
                 <a:solidFill>
                   <a:srgbClr val="1C2B3A"/>
                 </a:solidFill>
@@ -4068,11 +4051,11 @@
           <a:bodyPr wrap="square" lIns="0" tIns="0" rIns="0" bIns="0" rtlCol="0" anchor="ctr"/>
           <a:lstStyle/>
           <a:p>
-            <a:pPr marL="0" indent="0" algn="ctr">
-              <a:buNone/>
-            </a:pPr>
-            <a:r>
-              <a:rPr lang="en-US" sz="2000" dirty="0" b="0" u="none">
+            <a:pPr marL="0" indent="0">
+              <a:buNone/>
+            </a:pPr>
+            <a:r>
+              <a:rPr lang="en-US" sz="1000" dirty="0">
                 <a:solidFill>
                   <a:srgbClr val="1C2B3A"/>
                 </a:solidFill>
@@ -4083,7 +4066,7 @@
               <a:t>Recherche d'information, comparaison, premières </a:t>
             </a:r>
             <a:r>
-              <a:rPr lang="en-US" sz="2000" dirty="0" err="1" b="0" u="none">
+              <a:rPr lang="en-US" sz="1000" dirty="0" err="1">
                 <a:solidFill>
                   <a:srgbClr val="1C2B3A"/>
                 </a:solidFill>
@@ -4094,7 +4077,7 @@
               <a:t>visites</a:t>
             </a:r>
             <a:r>
-              <a:rPr lang="en-US" sz="2000" dirty="0" b="0" u="none">
+              <a:rPr lang="en-US" sz="1000" dirty="0">
                 <a:solidFill>
                   <a:srgbClr val="1C2B3A"/>
                 </a:solidFill>
@@ -4136,7 +4119,6 @@
           <a:bodyPr/>
           <a:lstStyle/>
           <a:p>
-            <a:pPr algn="ctr"/>
             <a:endParaRPr lang="fr-FR"/>
           </a:p>
         </p:txBody>
@@ -4169,7 +4151,6 @@
           <a:bodyPr/>
           <a:lstStyle/>
           <a:p>
-            <a:pPr algn="ctr"/>
             <a:endParaRPr lang="fr-FR"/>
           </a:p>
         </p:txBody>
@@ -4199,7 +4180,7 @@
               <a:buNone/>
             </a:pPr>
             <a:r>
-              <a:rPr lang="en-US" sz="2000" b="0" kern="0" spc="200" dirty="0" u="none">
+              <a:rPr lang="en-US" sz="1300" b="1" kern="0" spc="200" dirty="0">
                 <a:solidFill>
                   <a:srgbClr val="1C2B3A"/>
                 </a:solidFill>
@@ -4234,11 +4215,11 @@
           <a:bodyPr wrap="square" lIns="0" tIns="0" rIns="0" bIns="0" rtlCol="0" anchor="ctr"/>
           <a:lstStyle/>
           <a:p>
-            <a:pPr marL="0" indent="0" algn="ctr">
-              <a:buNone/>
-            </a:pPr>
-            <a:r>
-              <a:rPr lang="en-US" sz="2000" b="0" dirty="0" u="none">
+            <a:pPr marL="0" indent="0">
+              <a:buNone/>
+            </a:pPr>
+            <a:r>
+              <a:rPr lang="en-US" sz="1200" b="1" dirty="0">
                 <a:solidFill>
                   <a:srgbClr val="1C2B3A"/>
                 </a:solidFill>
@@ -4273,11 +4254,11 @@
           <a:bodyPr wrap="square" lIns="0" tIns="0" rIns="0" bIns="0" rtlCol="0" anchor="ctr"/>
           <a:lstStyle/>
           <a:p>
-            <a:pPr marL="0" indent="0" algn="ctr">
-              <a:buNone/>
-            </a:pPr>
-            <a:r>
-              <a:rPr lang="en-US" sz="2000" dirty="0" b="0" u="none">
+            <a:pPr marL="0" indent="0">
+              <a:buNone/>
+            </a:pPr>
+            <a:r>
+              <a:rPr lang="en-US" sz="1000" dirty="0">
                 <a:solidFill>
                   <a:srgbClr val="1C2B3A"/>
                 </a:solidFill>
@@ -4288,7 +4269,7 @@
               <a:t>Réservation, négociation, signature, </a:t>
             </a:r>
             <a:r>
-              <a:rPr lang="en-US" sz="2000" dirty="0" err="1" b="0" u="none">
+              <a:rPr lang="en-US" sz="1000" dirty="0" err="1">
                 <a:solidFill>
                   <a:srgbClr val="1C2B3A"/>
                 </a:solidFill>
@@ -4330,7 +4311,6 @@
           <a:bodyPr/>
           <a:lstStyle/>
           <a:p>
-            <a:pPr algn="ctr"/>
             <a:endParaRPr lang="fr-FR"/>
           </a:p>
         </p:txBody>
@@ -4363,7 +4343,6 @@
           <a:bodyPr/>
           <a:lstStyle/>
           <a:p>
-            <a:pPr algn="ctr"/>
             <a:endParaRPr lang="fr-FR"/>
           </a:p>
         </p:txBody>
@@ -4393,7 +4372,7 @@
               <a:buNone/>
             </a:pPr>
             <a:r>
-              <a:rPr lang="en-US" sz="2000" b="0" kern="0" spc="200" dirty="0" u="none">
+              <a:rPr lang="en-US" sz="1300" b="1" kern="0" spc="200" dirty="0">
                 <a:solidFill>
                   <a:srgbClr val="1C2B3A"/>
                 </a:solidFill>
@@ -4428,11 +4407,11 @@
           <a:bodyPr wrap="square" lIns="0" tIns="0" rIns="0" bIns="0" rtlCol="0" anchor="ctr"/>
           <a:lstStyle/>
           <a:p>
-            <a:pPr marL="0" indent="0" algn="ctr">
-              <a:buNone/>
-            </a:pPr>
-            <a:r>
-              <a:rPr lang="en-US" sz="2000" b="0" dirty="0" u="none">
+            <a:pPr marL="0" indent="0">
+              <a:buNone/>
+            </a:pPr>
+            <a:r>
+              <a:rPr lang="en-US" sz="1200" b="1" dirty="0">
                 <a:solidFill>
                   <a:srgbClr val="1C2B3A"/>
                 </a:solidFill>
@@ -4467,11 +4446,11 @@
           <a:bodyPr wrap="square" lIns="0" tIns="0" rIns="0" bIns="0" rtlCol="0" anchor="ctr"/>
           <a:lstStyle/>
           <a:p>
-            <a:pPr marL="0" indent="0" algn="ctr">
-              <a:buNone/>
-            </a:pPr>
-            <a:r>
-              <a:rPr lang="en-US" sz="2000" dirty="0" b="0" u="none">
+            <a:pPr marL="0" indent="0">
+              <a:buNone/>
+            </a:pPr>
+            <a:r>
+              <a:rPr lang="en-US" sz="1000" dirty="0">
                 <a:solidFill>
                   <a:srgbClr val="1C2B3A"/>
                 </a:solidFill>
@@ -4482,6 +4461,49 @@
               <a:t>Livraison, SAV, garantie, recommendation, capital de confiance pour de futurs projets</a:t>
             </a:r>
             <a:endParaRPr lang="en-US" sz="1000" dirty="0"/>
+          </a:p>
+        </p:txBody>
+      </p:sp>
+      <p:sp>
+        <p:nvSpPr>
+          <p:cNvPr id="29" name="Rectangle 28"/>
+          <p:cNvSpPr/>
+          <p:nvPr/>
+        </p:nvSpPr>
+        <p:spPr>
+          <a:xfrm>
+            <a:off x="0" y="0"/>
+            <a:ext cx="9144000" cy="76200"/>
+          </a:xfrm>
+          <a:prstGeom prst="rect">
+            <a:avLst/>
+          </a:prstGeom>
+          <a:solidFill>
+            <a:srgbClr val="C8A84B"/>
+          </a:solidFill>
+          <a:ln>
+            <a:noFill/>
+          </a:ln>
+        </p:spPr>
+        <p:style>
+          <a:lnRef idx="1">
+            <a:schemeClr val="accent1"/>
+          </a:lnRef>
+          <a:fillRef idx="3">
+            <a:schemeClr val="accent1"/>
+          </a:fillRef>
+          <a:effectRef idx="2">
+            <a:schemeClr val="accent1"/>
+          </a:effectRef>
+          <a:fontRef idx="minor">
+            <a:schemeClr val="lt1"/>
+          </a:fontRef>
+        </p:style>
+        <p:txBody>
+          <a:bodyPr rtlCol="0" anchor="ctr"/>
+          <a:lstStyle/>
+          <a:p>
+            <a:pPr algn="ctr"/>
           </a:p>
         </p:txBody>
       </p:sp>
@@ -4546,7 +4568,6 @@
           <a:bodyPr/>
           <a:lstStyle/>
           <a:p>
-            <a:pPr algn="l"/>
             <a:endParaRPr lang="fr-FR"/>
           </a:p>
         </p:txBody>
@@ -4572,11 +4593,11 @@
           <a:bodyPr wrap="square" lIns="0" tIns="0" rIns="0" bIns="0" rtlCol="0" anchor="ctr"/>
           <a:lstStyle/>
           <a:p>
-            <a:pPr marL="0" indent="0" algn="l">
-              <a:buNone/>
-            </a:pPr>
-            <a:r>
-              <a:rPr lang="en-US" sz="2000" b="0" kern="0" spc="200" dirty="0" u="none">
+            <a:pPr marL="0" indent="0">
+              <a:buNone/>
+            </a:pPr>
+            <a:r>
+              <a:rPr lang="en-US" sz="1100" b="1" kern="0" spc="200" dirty="0">
                 <a:solidFill>
                   <a:srgbClr val="1C2B3A"/>
                 </a:solidFill>
@@ -4611,11 +4632,11 @@
           <a:bodyPr wrap="square" lIns="0" tIns="0" rIns="0" bIns="0" rtlCol="0" anchor="ctr"/>
           <a:lstStyle/>
           <a:p>
-            <a:pPr marL="0" indent="0" algn="l">
-              <a:buNone/>
-            </a:pPr>
-            <a:r>
-              <a:rPr lang="en-US" sz="2000" b="0" dirty="0" u="none">
+            <a:pPr marL="0" indent="0">
+              <a:buNone/>
+            </a:pPr>
+            <a:r>
+              <a:rPr lang="en-US" sz="2800" b="1" dirty="0">
                 <a:solidFill>
                   <a:srgbClr val="1C2B3A"/>
                 </a:solidFill>
@@ -4652,7 +4673,6 @@
           <a:bodyPr/>
           <a:lstStyle/>
           <a:p>
-            <a:pPr algn="l"/>
             <a:endParaRPr lang="fr-FR"/>
           </a:p>
         </p:txBody>
@@ -4680,7 +4700,6 @@
           <a:bodyPr/>
           <a:lstStyle/>
           <a:p>
-            <a:pPr algn="l"/>
             <a:endParaRPr lang="fr-FR"/>
           </a:p>
         </p:txBody>
@@ -4706,11 +4725,11 @@
           <a:bodyPr wrap="square" lIns="0" tIns="0" rIns="0" bIns="0" rtlCol="0" anchor="ctr"/>
           <a:lstStyle/>
           <a:p>
-            <a:pPr marL="0" indent="0" algn="l">
-              <a:buNone/>
-            </a:pPr>
-            <a:r>
-              <a:rPr lang="en-US" sz="2000" dirty="0" b="0" u="none">
+            <a:pPr marL="0" indent="0" algn="r">
+              <a:buNone/>
+            </a:pPr>
+            <a:r>
+              <a:rPr lang="en-US" sz="900" dirty="0">
                 <a:solidFill>
                   <a:srgbClr val="1C2B3A"/>
                 </a:solidFill>
@@ -4745,11 +4764,11 @@
           <a:bodyPr wrap="square" lIns="0" tIns="0" rIns="0" bIns="0" rtlCol="0" anchor="ctr"/>
           <a:lstStyle/>
           <a:p>
-            <a:pPr marL="0" indent="0" algn="l">
-              <a:buNone/>
-            </a:pPr>
-            <a:r>
-              <a:rPr lang="en-US" sz="2000" b="0" i="1" dirty="0" u="none">
+            <a:pPr marL="0" indent="0">
+              <a:buNone/>
+            </a:pPr>
+            <a:r>
+              <a:rPr lang="en-US" sz="1100" b="1" i="1" dirty="0">
                 <a:solidFill>
                   <a:srgbClr val="1C2B3A"/>
                 </a:solidFill>
@@ -4760,7 +4779,7 @@
               <a:t>Bouygues Immobilier</a:t>
             </a:r>
             <a:r>
-              <a:rPr lang="en-US" sz="2000" i="1" dirty="0" b="0" u="none">
+              <a:rPr lang="en-US" sz="1100" i="1" dirty="0">
                 <a:solidFill>
                   <a:srgbClr val="1C2B3A"/>
                 </a:solidFill>
@@ -4771,7 +4790,7 @@
               <a:t> : </a:t>
             </a:r>
             <a:r>
-              <a:rPr lang="en-US" sz="2000" i="1" dirty="0" err="1" b="0" u="none">
+              <a:rPr lang="en-US" sz="1100" i="1" dirty="0" err="1">
                 <a:solidFill>
                   <a:srgbClr val="1C2B3A"/>
                 </a:solidFill>
@@ -4782,7 +4801,7 @@
               <a:t>promoteur</a:t>
             </a:r>
             <a:r>
-              <a:rPr lang="en-US" sz="2000" i="1" dirty="0" b="0" u="none">
+              <a:rPr lang="en-US" sz="1100" i="1" dirty="0">
                 <a:solidFill>
                   <a:srgbClr val="1C2B3A"/>
                 </a:solidFill>
@@ -4817,11 +4836,11 @@
           <a:bodyPr wrap="square" lIns="0" tIns="0" rIns="0" bIns="0" rtlCol="0" anchor="ctr"/>
           <a:lstStyle/>
           <a:p>
-            <a:pPr marL="0" indent="0" algn="l">
-              <a:buNone/>
-            </a:pPr>
-            <a:r>
-              <a:rPr lang="en-US" sz="2000" b="0" dirty="0" u="none">
+            <a:pPr marL="0" indent="0">
+              <a:buNone/>
+            </a:pPr>
+            <a:r>
+              <a:rPr lang="en-US" sz="1200" b="1" dirty="0">
                 <a:solidFill>
                   <a:srgbClr val="1C2B3A"/>
                 </a:solidFill>
@@ -4863,7 +4882,6 @@
           <a:bodyPr/>
           <a:lstStyle/>
           <a:p>
-            <a:pPr algn="l"/>
             <a:endParaRPr lang="fr-FR"/>
           </a:p>
         </p:txBody>
@@ -4896,7 +4914,6 @@
           <a:bodyPr/>
           <a:lstStyle/>
           <a:p>
-            <a:pPr algn="l"/>
             <a:endParaRPr lang="fr-FR"/>
           </a:p>
         </p:txBody>
@@ -4922,11 +4939,11 @@
           <a:bodyPr wrap="square" lIns="0" tIns="0" rIns="0" bIns="0" rtlCol="0" anchor="ctr"/>
           <a:lstStyle/>
           <a:p>
-            <a:pPr marL="0" indent="0" algn="l">
-              <a:buNone/>
-            </a:pPr>
-            <a:r>
-              <a:rPr lang="en-US" sz="2000" b="0" dirty="0" u="none">
+            <a:pPr marL="0" indent="0">
+              <a:buNone/>
+            </a:pPr>
+            <a:r>
+              <a:rPr lang="en-US" sz="1200" b="1" dirty="0">
                 <a:solidFill>
                   <a:srgbClr val="1C2B3A"/>
                 </a:solidFill>
@@ -4961,11 +4978,11 @@
           <a:bodyPr wrap="square" lIns="0" tIns="0" rIns="0" bIns="0" rtlCol="0" anchor="ctr"/>
           <a:lstStyle/>
           <a:p>
-            <a:pPr marL="0" indent="0" algn="l">
-              <a:buNone/>
-            </a:pPr>
-            <a:r>
-              <a:rPr lang="en-US" sz="2000" dirty="0" b="0" u="none">
+            <a:pPr marL="0" indent="0">
+              <a:buNone/>
+            </a:pPr>
+            <a:r>
+              <a:rPr lang="en-US" sz="1000" dirty="0">
                 <a:solidFill>
                   <a:srgbClr val="1C2B3A"/>
                 </a:solidFill>
@@ -5007,7 +5024,6 @@
           <a:bodyPr/>
           <a:lstStyle/>
           <a:p>
-            <a:pPr algn="l"/>
             <a:endParaRPr lang="fr-FR"/>
           </a:p>
         </p:txBody>
@@ -5040,7 +5056,6 @@
           <a:bodyPr/>
           <a:lstStyle/>
           <a:p>
-            <a:pPr algn="l"/>
             <a:endParaRPr lang="fr-FR"/>
           </a:p>
         </p:txBody>
@@ -5066,11 +5081,11 @@
           <a:bodyPr wrap="square" lIns="0" tIns="0" rIns="0" bIns="0" rtlCol="0" anchor="ctr"/>
           <a:lstStyle/>
           <a:p>
-            <a:pPr marL="0" indent="0" algn="l">
-              <a:buNone/>
-            </a:pPr>
-            <a:r>
-              <a:rPr lang="en-US" sz="2000" b="0" dirty="0" u="none">
+            <a:pPr marL="0" indent="0">
+              <a:buNone/>
+            </a:pPr>
+            <a:r>
+              <a:rPr lang="en-US" sz="1200" b="1" dirty="0">
                 <a:solidFill>
                   <a:srgbClr val="1C2B3A"/>
                 </a:solidFill>
@@ -5105,11 +5120,11 @@
           <a:bodyPr wrap="square" lIns="0" tIns="0" rIns="0" bIns="0" rtlCol="0" anchor="ctr"/>
           <a:lstStyle/>
           <a:p>
-            <a:pPr marL="0" indent="0" algn="l">
-              <a:buNone/>
-            </a:pPr>
-            <a:r>
-              <a:rPr lang="en-US" sz="2000" dirty="0" b="0" u="none">
+            <a:pPr marL="0" indent="0">
+              <a:buNone/>
+            </a:pPr>
+            <a:r>
+              <a:rPr lang="en-US" sz="1000" dirty="0">
                 <a:solidFill>
                   <a:srgbClr val="1C2B3A"/>
                 </a:solidFill>
@@ -5120,7 +5135,7 @@
               <a:t>Site bouygues-immobilier.com, </a:t>
             </a:r>
             <a:r>
-              <a:rPr lang="en-US" sz="2000" dirty="0" err="1" b="0" u="none">
+              <a:rPr lang="en-US" sz="1000" dirty="0" err="1">
                 <a:solidFill>
                   <a:srgbClr val="1C2B3A"/>
                 </a:solidFill>
@@ -5131,7 +5146,7 @@
               <a:t>présence</a:t>
             </a:r>
             <a:r>
-              <a:rPr lang="en-US" sz="2000" dirty="0" b="0" u="none">
+              <a:rPr lang="en-US" sz="1000" dirty="0">
                 <a:solidFill>
                   <a:srgbClr val="1C2B3A"/>
                 </a:solidFill>
@@ -5173,7 +5188,6 @@
           <a:bodyPr/>
           <a:lstStyle/>
           <a:p>
-            <a:pPr algn="l"/>
             <a:endParaRPr lang="fr-FR"/>
           </a:p>
         </p:txBody>
@@ -5206,7 +5220,6 @@
           <a:bodyPr/>
           <a:lstStyle/>
           <a:p>
-            <a:pPr algn="l"/>
             <a:endParaRPr lang="fr-FR"/>
           </a:p>
         </p:txBody>
@@ -5232,11 +5245,11 @@
           <a:bodyPr wrap="square" lIns="0" tIns="0" rIns="0" bIns="0" rtlCol="0" anchor="ctr"/>
           <a:lstStyle/>
           <a:p>
-            <a:pPr marL="0" indent="0" algn="l">
-              <a:buNone/>
-            </a:pPr>
-            <a:r>
-              <a:rPr lang="en-US" sz="2000" b="0" dirty="0" u="none">
+            <a:pPr marL="0" indent="0">
+              <a:buNone/>
+            </a:pPr>
+            <a:r>
+              <a:rPr lang="en-US" sz="1200" b="1" dirty="0">
                 <a:solidFill>
                   <a:srgbClr val="1C2B3A"/>
                 </a:solidFill>
@@ -5271,11 +5284,11 @@
           <a:bodyPr wrap="square" lIns="0" tIns="0" rIns="0" bIns="0" rtlCol="0" anchor="ctr"/>
           <a:lstStyle/>
           <a:p>
-            <a:pPr marL="0" indent="0" algn="l">
-              <a:buNone/>
-            </a:pPr>
-            <a:r>
-              <a:rPr lang="en-US" sz="2000" dirty="0" b="0" u="none">
+            <a:pPr marL="0" indent="0">
+              <a:buNone/>
+            </a:pPr>
+            <a:r>
+              <a:rPr lang="en-US" sz="1000" dirty="0">
                 <a:solidFill>
                   <a:srgbClr val="1C2B3A"/>
                 </a:solidFill>
@@ -5317,7 +5330,6 @@
           <a:bodyPr/>
           <a:lstStyle/>
           <a:p>
-            <a:pPr algn="l"/>
             <a:endParaRPr lang="fr-FR" dirty="0"/>
           </a:p>
         </p:txBody>
@@ -5350,7 +5362,6 @@
           <a:bodyPr/>
           <a:lstStyle/>
           <a:p>
-            <a:pPr algn="l"/>
             <a:endParaRPr lang="fr-FR"/>
           </a:p>
         </p:txBody>
@@ -5376,11 +5387,11 @@
           <a:bodyPr wrap="square" lIns="0" tIns="0" rIns="0" bIns="0" rtlCol="0" anchor="ctr"/>
           <a:lstStyle/>
           <a:p>
-            <a:pPr marL="0" indent="0" algn="l">
-              <a:buNone/>
-            </a:pPr>
-            <a:r>
-              <a:rPr lang="en-US" sz="2000" b="0" dirty="0" u="none">
+            <a:pPr marL="0" indent="0">
+              <a:buNone/>
+            </a:pPr>
+            <a:r>
+              <a:rPr lang="en-US" sz="1200" b="1" dirty="0">
                 <a:solidFill>
                   <a:srgbClr val="1C2B3A"/>
                 </a:solidFill>
@@ -5415,11 +5426,11 @@
           <a:bodyPr wrap="square" lIns="0" tIns="0" rIns="0" bIns="0" rtlCol="0" anchor="ctr"/>
           <a:lstStyle/>
           <a:p>
-            <a:pPr marL="0" indent="0" algn="l">
-              <a:buNone/>
-            </a:pPr>
-            <a:r>
-              <a:rPr lang="en-US" sz="2000" dirty="0" b="0" u="none">
+            <a:pPr marL="0" indent="0">
+              <a:buNone/>
+            </a:pPr>
+            <a:r>
+              <a:rPr lang="en-US" sz="1000" dirty="0">
                 <a:solidFill>
                   <a:srgbClr val="1C2B3A"/>
                 </a:solidFill>
@@ -5441,8 +5452,8 @@
         </p:nvSpPr>
         <p:spPr>
           <a:xfrm>
-            <a:off x="720578" y="125684"/>
-            <a:ext cx="2620796" cy="36576"/>
+            <a:off x="0" y="0"/>
+            <a:ext cx="9144000" cy="76200"/>
           </a:xfrm>
           <a:prstGeom prst="rect">
             <a:avLst/>
@@ -5481,7 +5492,7 @@
   <p:clrMapOvr>
     <a:masterClrMapping/>
   </p:clrMapOvr>
-  <p:transition spd="med" dur="546">
+  <p:transition spd="med" dur="682">
     <p:fade/>
   </p:transition>
 </p:sld>
@@ -5540,7 +5551,6 @@
           <a:bodyPr/>
           <a:lstStyle/>
           <a:p>
-            <a:pPr algn="l"/>
             <a:endParaRPr lang="fr-FR"/>
           </a:p>
         </p:txBody>
@@ -5566,11 +5576,11 @@
           <a:bodyPr wrap="square" lIns="0" tIns="0" rIns="0" bIns="0" rtlCol="0" anchor="ctr"/>
           <a:lstStyle/>
           <a:p>
-            <a:pPr marL="0" indent="0" algn="l">
-              <a:buNone/>
-            </a:pPr>
-            <a:r>
-              <a:rPr lang="en-US" sz="2000" b="0" kern="0" spc="200" dirty="0" u="none">
+            <a:pPr marL="0" indent="0">
+              <a:buNone/>
+            </a:pPr>
+            <a:r>
+              <a:rPr lang="en-US" sz="1100" b="1" kern="0" spc="200" dirty="0">
                 <a:solidFill>
                   <a:srgbClr val="1C2B3A"/>
                 </a:solidFill>
@@ -5605,11 +5615,11 @@
           <a:bodyPr wrap="square" lIns="0" tIns="0" rIns="0" bIns="0" rtlCol="0" anchor="ctr"/>
           <a:lstStyle/>
           <a:p>
-            <a:pPr marL="0" indent="0" algn="l">
-              <a:buNone/>
-            </a:pPr>
-            <a:r>
-              <a:rPr lang="en-US" sz="2000" b="0" dirty="0" u="none">
+            <a:pPr marL="0" indent="0">
+              <a:buNone/>
+            </a:pPr>
+            <a:r>
+              <a:rPr lang="en-US" sz="2800" b="1" dirty="0">
                 <a:solidFill>
                   <a:srgbClr val="1C2B3A"/>
                 </a:solidFill>
@@ -5646,7 +5656,6 @@
           <a:bodyPr/>
           <a:lstStyle/>
           <a:p>
-            <a:pPr algn="l"/>
             <a:endParaRPr lang="fr-FR"/>
           </a:p>
         </p:txBody>
@@ -5674,7 +5683,6 @@
           <a:bodyPr/>
           <a:lstStyle/>
           <a:p>
-            <a:pPr algn="l"/>
             <a:endParaRPr lang="fr-FR"/>
           </a:p>
         </p:txBody>
@@ -5700,11 +5708,11 @@
           <a:bodyPr wrap="square" lIns="0" tIns="0" rIns="0" bIns="0" rtlCol="0" anchor="ctr"/>
           <a:lstStyle/>
           <a:p>
-            <a:pPr marL="0" indent="0" algn="l">
-              <a:buNone/>
-            </a:pPr>
-            <a:r>
-              <a:rPr lang="en-US" sz="2000" dirty="0" b="0" u="none">
+            <a:pPr marL="0" indent="0" algn="r">
+              <a:buNone/>
+            </a:pPr>
+            <a:r>
+              <a:rPr lang="en-US" sz="900" dirty="0">
                 <a:solidFill>
                   <a:srgbClr val="1C2B3A"/>
                 </a:solidFill>
@@ -5739,11 +5747,11 @@
           <a:bodyPr wrap="square" lIns="0" tIns="0" rIns="0" bIns="0" rtlCol="0" anchor="ctr"/>
           <a:lstStyle/>
           <a:p>
-            <a:pPr marL="0" indent="0" algn="l">
-              <a:buNone/>
-            </a:pPr>
-            <a:r>
-              <a:rPr lang="en-US" sz="2000" i="1" dirty="0" b="0" u="none">
+            <a:pPr marL="0" indent="0">
+              <a:buNone/>
+            </a:pPr>
+            <a:r>
+              <a:rPr lang="en-US" sz="1200" i="1" dirty="0">
                 <a:solidFill>
                   <a:srgbClr val="1C2B3A"/>
                 </a:solidFill>
@@ -5785,7 +5793,6 @@
           <a:bodyPr/>
           <a:lstStyle/>
           <a:p>
-            <a:pPr algn="l"/>
             <a:endParaRPr lang="fr-FR"/>
           </a:p>
         </p:txBody>
@@ -5811,11 +5818,11 @@
           <a:bodyPr wrap="square" lIns="0" tIns="0" rIns="0" bIns="0" rtlCol="0" anchor="ctr"/>
           <a:lstStyle/>
           <a:p>
-            <a:pPr marL="0" indent="0" algn="l">
-              <a:buNone/>
-            </a:pPr>
-            <a:r>
-              <a:rPr lang="en-US" sz="2000" b="0" dirty="0" u="none">
+            <a:pPr marL="0" indent="0" algn="ctr">
+              <a:buNone/>
+            </a:pPr>
+            <a:r>
+              <a:rPr lang="en-US" sz="1600" b="1" dirty="0">
                 <a:solidFill>
                   <a:srgbClr val="1C2B3A"/>
                 </a:solidFill>
@@ -5850,11 +5857,11 @@
           <a:bodyPr wrap="square" lIns="0" tIns="0" rIns="0" bIns="0" rtlCol="0" anchor="ctr"/>
           <a:lstStyle/>
           <a:p>
-            <a:pPr marL="0" indent="0" algn="l">
-              <a:buNone/>
-            </a:pPr>
-            <a:r>
-              <a:rPr lang="en-US" sz="2000" b="0" dirty="0" u="none">
+            <a:pPr marL="0" indent="0">
+              <a:buNone/>
+            </a:pPr>
+            <a:r>
+              <a:rPr lang="en-US" sz="1200" b="1" dirty="0">
                 <a:solidFill>
                   <a:srgbClr val="1C2B3A"/>
                 </a:solidFill>
@@ -5889,11 +5896,11 @@
           <a:bodyPr wrap="square" lIns="0" tIns="0" rIns="0" bIns="0" rtlCol="0" anchor="ctr"/>
           <a:lstStyle/>
           <a:p>
-            <a:pPr marL="0" indent="0" algn="l">
-              <a:buNone/>
-            </a:pPr>
-            <a:r>
-              <a:rPr lang="en-US" sz="2000" dirty="0" b="0" u="none">
+            <a:pPr marL="0" indent="0">
+              <a:buNone/>
+            </a:pPr>
+            <a:r>
+              <a:rPr lang="en-US" sz="1000" dirty="0">
                 <a:solidFill>
                   <a:srgbClr val="1C2B3A"/>
                 </a:solidFill>
@@ -5935,7 +5942,6 @@
           <a:bodyPr/>
           <a:lstStyle/>
           <a:p>
-            <a:pPr algn="l"/>
             <a:endParaRPr lang="fr-FR"/>
           </a:p>
         </p:txBody>
@@ -5968,7 +5974,6 @@
           <a:bodyPr/>
           <a:lstStyle/>
           <a:p>
-            <a:pPr algn="l"/>
             <a:endParaRPr lang="fr-FR"/>
           </a:p>
         </p:txBody>
@@ -5994,11 +5999,11 @@
           <a:bodyPr wrap="square" lIns="0" tIns="0" rIns="0" bIns="0" rtlCol="0" anchor="ctr"/>
           <a:lstStyle/>
           <a:p>
-            <a:pPr marL="0" indent="0" algn="l">
-              <a:buNone/>
-            </a:pPr>
-            <a:r>
-              <a:rPr lang="en-US" sz="2000" b="0" dirty="0" u="none">
+            <a:pPr marL="0" indent="0" algn="ctr">
+              <a:buNone/>
+            </a:pPr>
+            <a:r>
+              <a:rPr lang="en-US" sz="1600" b="1" dirty="0">
                 <a:solidFill>
                   <a:srgbClr val="1C2B3A"/>
                 </a:solidFill>
@@ -6033,11 +6038,11 @@
           <a:bodyPr wrap="square" lIns="0" tIns="0" rIns="0" bIns="0" rtlCol="0" anchor="ctr"/>
           <a:lstStyle/>
           <a:p>
-            <a:pPr marL="0" indent="0" algn="l">
-              <a:buNone/>
-            </a:pPr>
-            <a:r>
-              <a:rPr lang="en-US" sz="2000" b="0" dirty="0" u="none">
+            <a:pPr marL="0" indent="0">
+              <a:buNone/>
+            </a:pPr>
+            <a:r>
+              <a:rPr lang="en-US" sz="1200" b="1" dirty="0">
                 <a:solidFill>
                   <a:srgbClr val="1C2B3A"/>
                 </a:solidFill>
@@ -6072,11 +6077,11 @@
           <a:bodyPr wrap="square" lIns="0" tIns="0" rIns="0" bIns="0" rtlCol="0" anchor="ctr"/>
           <a:lstStyle/>
           <a:p>
-            <a:pPr marL="0" indent="0" algn="l">
-              <a:buNone/>
-            </a:pPr>
-            <a:r>
-              <a:rPr lang="en-US" sz="2000" dirty="0" b="0" u="none">
+            <a:pPr marL="0" indent="0">
+              <a:buNone/>
+            </a:pPr>
+            <a:r>
+              <a:rPr lang="en-US" sz="1000" dirty="0">
                 <a:solidFill>
                   <a:srgbClr val="1C2B3A"/>
                 </a:solidFill>
@@ -6118,7 +6123,6 @@
           <a:bodyPr/>
           <a:lstStyle/>
           <a:p>
-            <a:pPr algn="l"/>
             <a:endParaRPr lang="fr-FR"/>
           </a:p>
         </p:txBody>
@@ -6151,7 +6155,6 @@
           <a:bodyPr/>
           <a:lstStyle/>
           <a:p>
-            <a:pPr algn="l"/>
             <a:endParaRPr lang="fr-FR"/>
           </a:p>
         </p:txBody>
@@ -6177,11 +6180,11 @@
           <a:bodyPr wrap="square" lIns="0" tIns="0" rIns="0" bIns="0" rtlCol="0" anchor="ctr"/>
           <a:lstStyle/>
           <a:p>
-            <a:pPr marL="0" indent="0" algn="l">
-              <a:buNone/>
-            </a:pPr>
-            <a:r>
-              <a:rPr lang="en-US" sz="2000" b="0" dirty="0" u="none">
+            <a:pPr marL="0" indent="0" algn="ctr">
+              <a:buNone/>
+            </a:pPr>
+            <a:r>
+              <a:rPr lang="en-US" sz="1600" b="1" dirty="0">
                 <a:solidFill>
                   <a:srgbClr val="1C2B3A"/>
                 </a:solidFill>
@@ -6216,11 +6219,11 @@
           <a:bodyPr wrap="square" lIns="0" tIns="0" rIns="0" bIns="0" rtlCol="0" anchor="ctr"/>
           <a:lstStyle/>
           <a:p>
-            <a:pPr marL="0" indent="0" algn="l">
-              <a:buNone/>
-            </a:pPr>
-            <a:r>
-              <a:rPr lang="en-US" sz="2000" b="0" dirty="0" u="none">
+            <a:pPr marL="0" indent="0">
+              <a:buNone/>
+            </a:pPr>
+            <a:r>
+              <a:rPr lang="en-US" sz="1200" b="1" dirty="0">
                 <a:solidFill>
                   <a:srgbClr val="1C2B3A"/>
                 </a:solidFill>
@@ -6255,11 +6258,11 @@
           <a:bodyPr wrap="square" lIns="0" tIns="0" rIns="0" bIns="0" rtlCol="0" anchor="ctr"/>
           <a:lstStyle/>
           <a:p>
-            <a:pPr marL="0" indent="0" algn="l">
-              <a:buNone/>
-            </a:pPr>
-            <a:r>
-              <a:rPr lang="en-US" sz="2000" dirty="0" b="0" u="none">
+            <a:pPr marL="0" indent="0">
+              <a:buNone/>
+            </a:pPr>
+            <a:r>
+              <a:rPr lang="en-US" sz="1000" dirty="0">
                 <a:solidFill>
                   <a:srgbClr val="1C2B3A"/>
                 </a:solidFill>
@@ -6301,7 +6304,6 @@
           <a:bodyPr/>
           <a:lstStyle/>
           <a:p>
-            <a:pPr algn="l"/>
             <a:endParaRPr lang="fr-FR"/>
           </a:p>
         </p:txBody>
@@ -6334,7 +6336,6 @@
           <a:bodyPr/>
           <a:lstStyle/>
           <a:p>
-            <a:pPr algn="l"/>
             <a:endParaRPr lang="fr-FR"/>
           </a:p>
         </p:txBody>
@@ -6360,11 +6361,11 @@
           <a:bodyPr wrap="square" lIns="0" tIns="0" rIns="0" bIns="0" rtlCol="0" anchor="ctr"/>
           <a:lstStyle/>
           <a:p>
-            <a:pPr marL="0" indent="0" algn="l">
-              <a:buNone/>
-            </a:pPr>
-            <a:r>
-              <a:rPr lang="en-US" sz="2000" b="0" dirty="0" u="none">
+            <a:pPr marL="0" indent="0" algn="ctr">
+              <a:buNone/>
+            </a:pPr>
+            <a:r>
+              <a:rPr lang="en-US" sz="1600" b="1" dirty="0">
                 <a:solidFill>
                   <a:srgbClr val="1C2B3A"/>
                 </a:solidFill>
@@ -6399,11 +6400,11 @@
           <a:bodyPr wrap="square" lIns="0" tIns="0" rIns="0" bIns="0" rtlCol="0" anchor="ctr"/>
           <a:lstStyle/>
           <a:p>
-            <a:pPr marL="0" indent="0" algn="l">
-              <a:buNone/>
-            </a:pPr>
-            <a:r>
-              <a:rPr lang="en-US" sz="2000" b="0" dirty="0" u="none">
+            <a:pPr marL="0" indent="0">
+              <a:buNone/>
+            </a:pPr>
+            <a:r>
+              <a:rPr lang="en-US" sz="1200" b="1" dirty="0">
                 <a:solidFill>
                   <a:srgbClr val="1C2B3A"/>
                 </a:solidFill>
@@ -6438,11 +6439,11 @@
           <a:bodyPr wrap="square" lIns="0" tIns="0" rIns="0" bIns="0" rtlCol="0" anchor="ctr"/>
           <a:lstStyle/>
           <a:p>
-            <a:pPr marL="0" indent="0" algn="l">
-              <a:buNone/>
-            </a:pPr>
-            <a:r>
-              <a:rPr lang="en-US" sz="2000" dirty="0" b="0" u="none">
+            <a:pPr marL="0" indent="0">
+              <a:buNone/>
+            </a:pPr>
+            <a:r>
+              <a:rPr lang="en-US" sz="1000" dirty="0">
                 <a:solidFill>
                   <a:srgbClr val="1C2B3A"/>
                 </a:solidFill>
@@ -6484,7 +6485,6 @@
           <a:bodyPr/>
           <a:lstStyle/>
           <a:p>
-            <a:pPr algn="l"/>
             <a:endParaRPr lang="fr-FR"/>
           </a:p>
         </p:txBody>
@@ -6517,7 +6517,6 @@
           <a:bodyPr/>
           <a:lstStyle/>
           <a:p>
-            <a:pPr algn="l"/>
             <a:endParaRPr lang="fr-FR"/>
           </a:p>
         </p:txBody>
@@ -6543,11 +6542,11 @@
           <a:bodyPr wrap="square" lIns="0" tIns="0" rIns="0" bIns="0" rtlCol="0" anchor="ctr"/>
           <a:lstStyle/>
           <a:p>
-            <a:pPr marL="0" indent="0" algn="l">
-              <a:buNone/>
-            </a:pPr>
-            <a:r>
-              <a:rPr lang="en-US" sz="2000" b="0" dirty="0" u="none">
+            <a:pPr marL="0" indent="0" algn="ctr">
+              <a:buNone/>
+            </a:pPr>
+            <a:r>
+              <a:rPr lang="en-US" sz="1600" b="1" dirty="0">
                 <a:solidFill>
                   <a:srgbClr val="1C2B3A"/>
                 </a:solidFill>
@@ -6582,11 +6581,11 @@
           <a:bodyPr wrap="square" lIns="0" tIns="0" rIns="0" bIns="0" rtlCol="0" anchor="ctr"/>
           <a:lstStyle/>
           <a:p>
-            <a:pPr marL="0" indent="0" algn="l">
-              <a:buNone/>
-            </a:pPr>
-            <a:r>
-              <a:rPr lang="en-US" sz="2000" b="0" dirty="0" u="none">
+            <a:pPr marL="0" indent="0">
+              <a:buNone/>
+            </a:pPr>
+            <a:r>
+              <a:rPr lang="en-US" sz="1200" b="1" dirty="0">
                 <a:solidFill>
                   <a:srgbClr val="1C2B3A"/>
                 </a:solidFill>
@@ -6621,11 +6620,11 @@
           <a:bodyPr wrap="square" lIns="0" tIns="0" rIns="0" bIns="0" rtlCol="0" anchor="ctr"/>
           <a:lstStyle/>
           <a:p>
-            <a:pPr marL="0" indent="0" algn="l">
-              <a:buNone/>
-            </a:pPr>
-            <a:r>
-              <a:rPr lang="en-US" sz="2000" dirty="0" b="0" u="none">
+            <a:pPr marL="0" indent="0">
+              <a:buNone/>
+            </a:pPr>
+            <a:r>
+              <a:rPr lang="en-US" sz="1000" dirty="0">
                 <a:solidFill>
                   <a:srgbClr val="1C2B3A"/>
                 </a:solidFill>
@@ -6647,8 +6646,8 @@
         </p:nvSpPr>
         <p:spPr>
           <a:xfrm>
-            <a:off x="803612" y="93581"/>
-            <a:ext cx="2902184" cy="36576"/>
+            <a:off x="0" y="0"/>
+            <a:ext cx="9144000" cy="76200"/>
           </a:xfrm>
           <a:prstGeom prst="rect">
             <a:avLst/>
@@ -6687,7 +6686,7 @@
   <p:clrMapOvr>
     <a:masterClrMapping/>
   </p:clrMapOvr>
-  <p:transition spd="med" dur="568">
+  <p:transition spd="med" dur="426">
     <p:fade/>
   </p:transition>
 </p:sld>
@@ -6746,7 +6745,6 @@
           <a:bodyPr/>
           <a:lstStyle/>
           <a:p>
-            <a:pPr algn="ctr"/>
             <a:endParaRPr lang="fr-FR"/>
           </a:p>
         </p:txBody>
@@ -6772,11 +6770,11 @@
           <a:bodyPr wrap="square" lIns="0" tIns="0" rIns="0" bIns="0" rtlCol="0" anchor="ctr"/>
           <a:lstStyle/>
           <a:p>
-            <a:pPr marL="0" indent="0" algn="ctr">
-              <a:buNone/>
-            </a:pPr>
-            <a:r>
-              <a:rPr lang="en-US" sz="2000" b="0" kern="0" spc="200" dirty="0" u="none">
+            <a:pPr marL="0" indent="0">
+              <a:buNone/>
+            </a:pPr>
+            <a:r>
+              <a:rPr lang="en-US" sz="1100" b="1" kern="0" spc="200" dirty="0">
                 <a:solidFill>
                   <a:srgbClr val="1C2B3A"/>
                 </a:solidFill>
@@ -6811,11 +6809,11 @@
           <a:bodyPr wrap="square" lIns="0" tIns="0" rIns="0" bIns="0" rtlCol="0" anchor="ctr"/>
           <a:lstStyle/>
           <a:p>
-            <a:pPr marL="0" indent="0" algn="ctr">
-              <a:buNone/>
-            </a:pPr>
-            <a:r>
-              <a:rPr lang="en-US" sz="2000" b="0" dirty="0" u="none">
+            <a:pPr marL="0" indent="0">
+              <a:buNone/>
+            </a:pPr>
+            <a:r>
+              <a:rPr lang="en-US" sz="2800" b="1" dirty="0">
                 <a:solidFill>
                   <a:srgbClr val="1C2B3A"/>
                 </a:solidFill>
@@ -6852,7 +6850,6 @@
           <a:bodyPr/>
           <a:lstStyle/>
           <a:p>
-            <a:pPr algn="ctr"/>
             <a:endParaRPr lang="fr-FR"/>
           </a:p>
         </p:txBody>
@@ -6880,7 +6877,6 @@
           <a:bodyPr/>
           <a:lstStyle/>
           <a:p>
-            <a:pPr algn="ctr"/>
             <a:endParaRPr lang="fr-FR"/>
           </a:p>
         </p:txBody>
@@ -6906,11 +6902,11 @@
           <a:bodyPr wrap="square" lIns="0" tIns="0" rIns="0" bIns="0" rtlCol="0" anchor="ctr"/>
           <a:lstStyle/>
           <a:p>
-            <a:pPr marL="0" indent="0" algn="ctr">
-              <a:buNone/>
-            </a:pPr>
-            <a:r>
-              <a:rPr lang="en-US" sz="2000" dirty="0" b="0" u="none">
+            <a:pPr marL="0" indent="0" algn="r">
+              <a:buNone/>
+            </a:pPr>
+            <a:r>
+              <a:rPr lang="en-US" sz="900" dirty="0">
                 <a:solidFill>
                   <a:srgbClr val="1C2B3A"/>
                 </a:solidFill>
@@ -6945,11 +6941,11 @@
           <a:bodyPr wrap="square" lIns="0" tIns="0" rIns="0" bIns="0" rtlCol="0" anchor="ctr"/>
           <a:lstStyle/>
           <a:p>
-            <a:pPr marL="0" indent="0" algn="ctr">
-              <a:buNone/>
-            </a:pPr>
-            <a:r>
-              <a:rPr lang="en-US" sz="2000" i="1" dirty="0" b="0" u="none">
+            <a:pPr marL="0" indent="0">
+              <a:buNone/>
+            </a:pPr>
+            <a:r>
+              <a:rPr lang="en-US" sz="1200" i="1" dirty="0">
                 <a:solidFill>
                   <a:srgbClr val="1C2B3A"/>
                 </a:solidFill>
@@ -6960,7 +6956,7 @@
               <a:t>Objectif : transformer le client </a:t>
             </a:r>
             <a:r>
-              <a:rPr lang="en-US" sz="2000" i="1" dirty="0" err="1" b="0" u="none">
+              <a:rPr lang="en-US" sz="1200" i="1" dirty="0" err="1">
                 <a:solidFill>
                   <a:srgbClr val="1C2B3A"/>
                 </a:solidFill>
@@ -6971,7 +6967,7 @@
               <a:t>en</a:t>
             </a:r>
             <a:r>
-              <a:rPr lang="en-US" sz="2000" i="1" dirty="0" b="0" u="none">
+              <a:rPr lang="en-US" sz="1200" i="1" dirty="0">
                 <a:solidFill>
                   <a:srgbClr val="1C2B3A"/>
                 </a:solidFill>
@@ -6982,7 +6978,7 @@
               <a:t> </a:t>
             </a:r>
             <a:r>
-              <a:rPr lang="en-US" sz="2000" i="1" dirty="0" err="1" b="0" u="none">
+              <a:rPr lang="en-US" sz="1200" i="1" dirty="0" err="1">
                 <a:solidFill>
                   <a:srgbClr val="1C2B3A"/>
                 </a:solidFill>
@@ -6993,7 +6989,7 @@
               <a:t>ambassadeur</a:t>
             </a:r>
             <a:r>
-              <a:rPr lang="en-US" sz="2000" i="1" dirty="0" b="0" u="none">
+              <a:rPr lang="en-US" sz="1200" i="1" dirty="0">
                 <a:solidFill>
                   <a:srgbClr val="1C2B3A"/>
                 </a:solidFill>
@@ -7004,7 +7000,7 @@
               <a:t>. Un </a:t>
             </a:r>
             <a:r>
-              <a:rPr lang="en-US" sz="2000" i="1" dirty="0" err="1" b="0" u="none">
+              <a:rPr lang="en-US" sz="1200" i="1" dirty="0" err="1">
                 <a:solidFill>
                   <a:srgbClr val="1C2B3A"/>
                 </a:solidFill>
@@ -7015,7 +7011,7 @@
               <a:t>enjeu</a:t>
             </a:r>
             <a:r>
-              <a:rPr lang="en-US" sz="2000" i="1" dirty="0" b="0" u="none">
+              <a:rPr lang="en-US" sz="1200" i="1" dirty="0">
                 <a:solidFill>
                   <a:srgbClr val="1C2B3A"/>
                 </a:solidFill>
@@ -7050,11 +7046,11 @@
           <a:bodyPr wrap="square" lIns="0" tIns="0" rIns="0" bIns="0" rtlCol="0" anchor="ctr"/>
           <a:lstStyle/>
           <a:p>
-            <a:pPr marL="0" indent="0" algn="ctr">
-              <a:buNone/>
-            </a:pPr>
-            <a:r>
-              <a:rPr lang="en-US" sz="2000" b="0" dirty="0" u="none">
+            <a:pPr marL="0" indent="0">
+              <a:buNone/>
+            </a:pPr>
+            <a:r>
+              <a:rPr lang="en-US" sz="1300" b="1" dirty="0">
                 <a:solidFill>
                   <a:srgbClr val="1C2B3A"/>
                 </a:solidFill>
@@ -7091,7 +7087,6 @@
           <a:bodyPr/>
           <a:lstStyle/>
           <a:p>
-            <a:pPr algn="ctr"/>
             <a:endParaRPr lang="fr-FR"/>
           </a:p>
         </p:txBody>
@@ -7117,14 +7112,14 @@
           <a:bodyPr wrap="square" lIns="0" tIns="0" rIns="0" bIns="0" rtlCol="0" anchor="ctr"/>
           <a:lstStyle/>
           <a:p>
-            <a:pPr marL="0" indent="0" algn="ctr">
+            <a:pPr marL="0" indent="0">
               <a:spcAft>
                 <a:spcPts val="400"/>
               </a:spcAft>
               <a:buNone/>
             </a:pPr>
             <a:r>
-              <a:rPr lang="en-US" sz="2000" b="0" dirty="0" u="none">
+              <a:rPr lang="en-US" sz="1000" b="1" dirty="0">
                 <a:solidFill>
                   <a:srgbClr val="1C2B3A"/>
                 </a:solidFill>
@@ -7137,14 +7132,14 @@
             <a:endParaRPr lang="en-US" sz="1000" dirty="0"/>
           </a:p>
           <a:p>
-            <a:pPr marL="0" indent="0" algn="ctr">
+            <a:pPr marL="0" indent="0">
               <a:spcAft>
                 <a:spcPts val="400"/>
               </a:spcAft>
               <a:buNone/>
             </a:pPr>
             <a:r>
-              <a:rPr lang="en-US" sz="2000" dirty="0" b="0" u="none">
+              <a:rPr lang="en-US" sz="1000" dirty="0">
                 <a:solidFill>
                   <a:srgbClr val="1C2B3A"/>
                 </a:solidFill>
@@ -7157,14 +7152,14 @@
             <a:endParaRPr lang="en-US" sz="1000" dirty="0"/>
           </a:p>
           <a:p>
-            <a:pPr marL="0" indent="0" algn="ctr">
+            <a:pPr marL="0" indent="0">
               <a:spcAft>
                 <a:spcPts val="400"/>
               </a:spcAft>
               <a:buNone/>
             </a:pPr>
             <a:r>
-              <a:rPr lang="en-US" sz="2000" b="0" dirty="0" u="none">
+              <a:rPr lang="en-US" sz="1000" b="1" dirty="0">
                 <a:solidFill>
                   <a:srgbClr val="1C2B3A"/>
                 </a:solidFill>
@@ -7177,14 +7172,14 @@
             <a:endParaRPr lang="en-US" sz="1000" dirty="0"/>
           </a:p>
           <a:p>
-            <a:pPr marL="0" indent="0" algn="ctr">
+            <a:pPr marL="0" indent="0">
               <a:spcAft>
                 <a:spcPts val="400"/>
               </a:spcAft>
               <a:buNone/>
             </a:pPr>
             <a:r>
-              <a:rPr lang="en-US" sz="2000" dirty="0" b="0" u="none">
+              <a:rPr lang="en-US" sz="1000" dirty="0">
                 <a:solidFill>
                   <a:srgbClr val="1C2B3A"/>
                 </a:solidFill>
@@ -7195,7 +7190,7 @@
               <a:t>Parfait achèvement (1 an), biennale (2 ans), décennale (10 </a:t>
             </a:r>
             <a:r>
-              <a:rPr lang="en-US" sz="2000" dirty="0" err="1" b="0" u="none">
+              <a:rPr lang="en-US" sz="1000" dirty="0" err="1">
                 <a:solidFill>
                   <a:srgbClr val="1C2B3A"/>
                 </a:solidFill>
@@ -7206,7 +7201,7 @@
               <a:t>ans</a:t>
             </a:r>
             <a:r>
-              <a:rPr lang="en-US" sz="2000" dirty="0" b="0" u="none">
+              <a:rPr lang="en-US" sz="1000" dirty="0">
                 <a:solidFill>
                   <a:srgbClr val="1C2B3A"/>
                 </a:solidFill>
@@ -7217,7 +7212,7 @@
               <a:t>), </a:t>
             </a:r>
             <a:r>
-              <a:rPr lang="en-US" sz="2000" dirty="0" err="1" b="0" u="none">
+              <a:rPr lang="en-US" sz="1000" dirty="0" err="1">
                 <a:solidFill>
                   <a:srgbClr val="1C2B3A"/>
                 </a:solidFill>
@@ -7228,7 +7223,7 @@
               <a:t>suivi</a:t>
             </a:r>
             <a:r>
-              <a:rPr lang="en-US" sz="2000" dirty="0" b="0" u="none">
+              <a:rPr lang="en-US" sz="1000" dirty="0">
                 <a:solidFill>
                   <a:srgbClr val="1C2B3A"/>
                 </a:solidFill>
@@ -7241,14 +7236,14 @@
             <a:endParaRPr lang="en-US" sz="1000" dirty="0"/>
           </a:p>
           <a:p>
-            <a:pPr marL="0" indent="0" algn="ctr">
+            <a:pPr marL="0" indent="0">
               <a:spcAft>
                 <a:spcPts val="400"/>
               </a:spcAft>
               <a:buNone/>
             </a:pPr>
             <a:r>
-              <a:rPr lang="en-US" sz="2000" b="0" dirty="0" u="none">
+              <a:rPr lang="en-US" sz="1000" b="1" dirty="0">
                 <a:solidFill>
                   <a:srgbClr val="1C2B3A"/>
                 </a:solidFill>
@@ -7261,14 +7256,14 @@
             <a:endParaRPr lang="en-US" sz="1000" dirty="0"/>
           </a:p>
           <a:p>
-            <a:pPr marL="0" indent="0" algn="ctr">
+            <a:pPr marL="0" indent="0">
               <a:spcAft>
                 <a:spcPts val="400"/>
               </a:spcAft>
               <a:buNone/>
             </a:pPr>
             <a:r>
-              <a:rPr lang="en-US" sz="2000" dirty="0" b="0" u="none">
+              <a:rPr lang="en-US" sz="1000" dirty="0">
                 <a:solidFill>
                   <a:srgbClr val="1C2B3A"/>
                 </a:solidFill>
@@ -7281,14 +7276,14 @@
             <a:endParaRPr lang="en-US" sz="1000" dirty="0"/>
           </a:p>
           <a:p>
-            <a:pPr marL="0" indent="0" algn="ctr">
+            <a:pPr marL="0" indent="0">
               <a:spcAft>
                 <a:spcPts val="400"/>
               </a:spcAft>
               <a:buNone/>
             </a:pPr>
             <a:r>
-              <a:rPr lang="en-US" sz="2000" b="0" dirty="0" u="none">
+              <a:rPr lang="en-US" sz="1000" b="1" dirty="0">
                 <a:solidFill>
                   <a:srgbClr val="1C2B3A"/>
                 </a:solidFill>
@@ -7301,14 +7296,14 @@
             <a:endParaRPr lang="en-US" sz="1000" dirty="0"/>
           </a:p>
           <a:p>
-            <a:pPr marL="0" indent="0" algn="ctr">
+            <a:pPr marL="0" indent="0">
               <a:spcAft>
                 <a:spcPts val="400"/>
               </a:spcAft>
               <a:buNone/>
             </a:pPr>
             <a:r>
-              <a:rPr lang="en-US" sz="2000" dirty="0" b="0" u="none">
+              <a:rPr lang="en-US" sz="1000" dirty="0">
                 <a:solidFill>
                   <a:srgbClr val="1C2B3A"/>
                 </a:solidFill>
@@ -7319,7 +7314,7 @@
               <a:t>Parrainage, offres préférentielles, invitations à des </a:t>
             </a:r>
             <a:r>
-              <a:rPr lang="en-US" sz="2000" dirty="0" err="1" b="0" u="none">
+              <a:rPr lang="en-US" sz="1000" dirty="0" err="1">
                 <a:solidFill>
                   <a:srgbClr val="1C2B3A"/>
                 </a:solidFill>
@@ -7361,7 +7356,6 @@
           <a:bodyPr/>
           <a:lstStyle/>
           <a:p>
-            <a:pPr algn="ctr"/>
             <a:endParaRPr lang="fr-FR"/>
           </a:p>
         </p:txBody>
@@ -7387,11 +7381,11 @@
           <a:bodyPr wrap="square" lIns="0" tIns="0" rIns="0" bIns="0" rtlCol="0" anchor="ctr"/>
           <a:lstStyle/>
           <a:p>
-            <a:pPr marL="0" indent="0" algn="ctr">
-              <a:buNone/>
-            </a:pPr>
-            <a:r>
-              <a:rPr lang="en-US" sz="2000" b="0" dirty="0" u="none">
+            <a:pPr marL="0" indent="0">
+              <a:buNone/>
+            </a:pPr>
+            <a:r>
+              <a:rPr lang="en-US" sz="1300" b="1" dirty="0">
                 <a:solidFill>
                   <a:srgbClr val="1C2B3A"/>
                 </a:solidFill>
@@ -7428,7 +7422,6 @@
           <a:bodyPr/>
           <a:lstStyle/>
           <a:p>
-            <a:pPr algn="ctr"/>
             <a:endParaRPr lang="fr-FR"/>
           </a:p>
         </p:txBody>
@@ -7454,11 +7447,11 @@
           <a:bodyPr wrap="square" lIns="0" tIns="0" rIns="0" bIns="0" rtlCol="0" anchor="ctr"/>
           <a:lstStyle/>
           <a:p>
-            <a:pPr marL="0" indent="0" algn="ctr">
-              <a:buNone/>
-            </a:pPr>
-            <a:r>
-              <a:rPr lang="en-US" sz="2000" b="0" dirty="0" u="none">
+            <a:pPr marL="0" indent="0">
+              <a:buNone/>
+            </a:pPr>
+            <a:r>
+              <a:rPr lang="en-US" sz="1100" b="1" dirty="0">
                 <a:solidFill>
                   <a:srgbClr val="1C2B3A"/>
                 </a:solidFill>
@@ -7493,11 +7486,11 @@
           <a:bodyPr wrap="square" lIns="0" tIns="0" rIns="0" bIns="0" rtlCol="0" anchor="ctr"/>
           <a:lstStyle/>
           <a:p>
-            <a:pPr marL="0" indent="0" algn="ctr">
-              <a:buNone/>
-            </a:pPr>
-            <a:r>
-              <a:rPr lang="en-US" sz="2000" i="1" dirty="0" b="0" u="none">
+            <a:pPr marL="0" indent="0">
+              <a:buNone/>
+            </a:pPr>
+            <a:r>
+              <a:rPr lang="en-US" sz="900" i="1" dirty="0">
                 <a:solidFill>
                   <a:srgbClr val="1C2B3A"/>
                 </a:solidFill>
@@ -7532,11 +7525,11 @@
           <a:bodyPr wrap="square" lIns="0" tIns="0" rIns="0" bIns="0" rtlCol="0" anchor="ctr"/>
           <a:lstStyle/>
           <a:p>
-            <a:pPr marL="0" indent="0" algn="ctr">
-              <a:buNone/>
-            </a:pPr>
-            <a:r>
-              <a:rPr lang="en-US" sz="2000" b="0" dirty="0" u="none">
+            <a:pPr marL="0" indent="0">
+              <a:buNone/>
+            </a:pPr>
+            <a:r>
+              <a:rPr lang="en-US" sz="1100" b="1" dirty="0">
                 <a:solidFill>
                   <a:srgbClr val="1C2B3A"/>
                 </a:solidFill>
@@ -7571,11 +7564,11 @@
           <a:bodyPr wrap="square" lIns="0" tIns="0" rIns="0" bIns="0" rtlCol="0" anchor="ctr"/>
           <a:lstStyle/>
           <a:p>
-            <a:pPr marL="0" indent="0" algn="ctr">
-              <a:buNone/>
-            </a:pPr>
-            <a:r>
-              <a:rPr lang="en-US" sz="2000" i="1" dirty="0" b="0" u="none">
+            <a:pPr marL="0" indent="0">
+              <a:buNone/>
+            </a:pPr>
+            <a:r>
+              <a:rPr lang="en-US" sz="900" i="1" dirty="0">
                 <a:solidFill>
                   <a:srgbClr val="1C2B3A"/>
                 </a:solidFill>
@@ -7610,11 +7603,11 @@
           <a:bodyPr wrap="square" lIns="0" tIns="0" rIns="0" bIns="0" rtlCol="0" anchor="ctr"/>
           <a:lstStyle/>
           <a:p>
-            <a:pPr marL="0" indent="0" algn="ctr">
-              <a:buNone/>
-            </a:pPr>
-            <a:r>
-              <a:rPr lang="en-US" sz="2000" b="0" dirty="0" u="none">
+            <a:pPr marL="0" indent="0">
+              <a:buNone/>
+            </a:pPr>
+            <a:r>
+              <a:rPr lang="en-US" sz="1100" b="1" dirty="0">
                 <a:solidFill>
                   <a:srgbClr val="1C2B3A"/>
                 </a:solidFill>
@@ -7649,11 +7642,11 @@
           <a:bodyPr wrap="square" lIns="0" tIns="0" rIns="0" bIns="0" rtlCol="0" anchor="ctr"/>
           <a:lstStyle/>
           <a:p>
-            <a:pPr marL="0" indent="0" algn="ctr">
-              <a:buNone/>
-            </a:pPr>
-            <a:r>
-              <a:rPr lang="en-US" sz="2000" i="1" dirty="0" b="0" u="none">
+            <a:pPr marL="0" indent="0">
+              <a:buNone/>
+            </a:pPr>
+            <a:r>
+              <a:rPr lang="en-US" sz="900" i="1" dirty="0">
                 <a:solidFill>
                   <a:srgbClr val="1C2B3A"/>
                 </a:solidFill>
@@ -7688,11 +7681,11 @@
           <a:bodyPr wrap="square" lIns="0" tIns="0" rIns="0" bIns="0" rtlCol="0" anchor="ctr"/>
           <a:lstStyle/>
           <a:p>
-            <a:pPr marL="0" indent="0" algn="ctr">
-              <a:buNone/>
-            </a:pPr>
-            <a:r>
-              <a:rPr lang="en-US" sz="2000" b="0" dirty="0" u="none">
+            <a:pPr marL="0" indent="0">
+              <a:buNone/>
+            </a:pPr>
+            <a:r>
+              <a:rPr lang="en-US" sz="1100" b="1" dirty="0">
                 <a:solidFill>
                   <a:srgbClr val="1C2B3A"/>
                 </a:solidFill>
@@ -7727,11 +7720,11 @@
           <a:bodyPr wrap="square" lIns="0" tIns="0" rIns="0" bIns="0" rtlCol="0" anchor="ctr"/>
           <a:lstStyle/>
           <a:p>
-            <a:pPr marL="0" indent="0" algn="ctr">
-              <a:buNone/>
-            </a:pPr>
-            <a:r>
-              <a:rPr lang="en-US" sz="2000" i="1" dirty="0" b="0" u="none">
+            <a:pPr marL="0" indent="0">
+              <a:buNone/>
+            </a:pPr>
+            <a:r>
+              <a:rPr lang="en-US" sz="900" i="1" dirty="0">
                 <a:solidFill>
                   <a:srgbClr val="1C2B3A"/>
                 </a:solidFill>
@@ -7766,11 +7759,11 @@
           <a:bodyPr wrap="square" lIns="0" tIns="0" rIns="0" bIns="0" rtlCol="0" anchor="ctr"/>
           <a:lstStyle/>
           <a:p>
-            <a:pPr marL="0" indent="0" algn="ctr">
-              <a:buNone/>
-            </a:pPr>
-            <a:r>
-              <a:rPr lang="en-US" sz="2000" b="0" dirty="0" u="none">
+            <a:pPr marL="0" indent="0">
+              <a:buNone/>
+            </a:pPr>
+            <a:r>
+              <a:rPr lang="en-US" sz="1100" b="1" dirty="0">
                 <a:solidFill>
                   <a:srgbClr val="1C2B3A"/>
                 </a:solidFill>
@@ -7805,11 +7798,11 @@
           <a:bodyPr wrap="square" lIns="0" tIns="0" rIns="0" bIns="0" rtlCol="0" anchor="ctr"/>
           <a:lstStyle/>
           <a:p>
-            <a:pPr marL="0" indent="0" algn="ctr">
-              <a:buNone/>
-            </a:pPr>
-            <a:r>
-              <a:rPr lang="en-US" sz="2000" i="1" dirty="0" b="0" u="none">
+            <a:pPr marL="0" indent="0">
+              <a:buNone/>
+            </a:pPr>
+            <a:r>
+              <a:rPr lang="en-US" sz="900" i="1" dirty="0">
                 <a:solidFill>
                   <a:srgbClr val="1C2B3A"/>
                 </a:solidFill>
@@ -7831,8 +7824,8 @@
         </p:nvSpPr>
         <p:spPr>
           <a:xfrm>
-            <a:off x="736097" y="131246"/>
-            <a:ext cx="2157358" cy="36576"/>
+            <a:off x="0" y="0"/>
+            <a:ext cx="9144000" cy="76200"/>
           </a:xfrm>
           <a:prstGeom prst="rect">
             <a:avLst/>
@@ -7871,7 +7864,7 @@
   <p:clrMapOvr>
     <a:masterClrMapping/>
   </p:clrMapOvr>
-  <p:transition spd="med" dur="640">
+  <p:transition spd="med" dur="550">
     <p:fade/>
   </p:transition>
 </p:sld>
@@ -7930,7 +7923,6 @@
           <a:bodyPr/>
           <a:lstStyle/>
           <a:p>
-            <a:pPr algn="ctr"/>
             <a:endParaRPr lang="fr-FR"/>
           </a:p>
         </p:txBody>
@@ -7956,15 +7948,15 @@
           <a:bodyPr wrap="square" lIns="0" tIns="0" rIns="0" bIns="0" rtlCol="0" anchor="ctr"/>
           <a:lstStyle/>
           <a:p>
-            <a:pPr marL="0" indent="0" algn="ctr">
-              <a:buNone/>
-            </a:pPr>
-            <a:r>
-              <a:rPr lang="en-US" sz="3600" b="1" kern="0" spc="200" dirty="0" u="none">
+            <a:pPr marL="0" indent="0">
+              <a:buNone/>
+            </a:pPr>
+            <a:r>
+              <a:rPr lang="en-US" sz="1100" b="1" kern="0" spc="200" dirty="0">
                 <a:solidFill>
                   <a:srgbClr val="C8A84B"/>
                 </a:solidFill>
-                <a:latin typeface="Georgia" pitchFamily="34" charset="0"/>
+                <a:latin typeface="Trebuchet MS" pitchFamily="34" charset="0"/>
                 <a:ea typeface="Calibri" pitchFamily="34" charset="-122"/>
                 <a:cs typeface="Calibri" pitchFamily="34" charset="-120"/>
               </a:rPr>
@@ -7995,15 +7987,15 @@
           <a:bodyPr wrap="square" lIns="0" tIns="0" rIns="0" bIns="0" rtlCol="0" anchor="ctr"/>
           <a:lstStyle/>
           <a:p>
-            <a:pPr marL="0" indent="0" algn="ctr">
-              <a:buNone/>
-            </a:pPr>
-            <a:r>
-              <a:rPr lang="en-US" sz="3600" b="1" dirty="0" u="none">
+            <a:pPr marL="0" indent="0">
+              <a:buNone/>
+            </a:pPr>
+            <a:r>
+              <a:rPr lang="en-US" sz="2600" b="1" dirty="0">
                 <a:solidFill>
                   <a:srgbClr val="C8A84B"/>
                 </a:solidFill>
-                <a:latin typeface="Georgia" pitchFamily="34" charset="0"/>
+                <a:latin typeface="Trebuchet MS" pitchFamily="34" charset="0"/>
                 <a:ea typeface="Georgia" pitchFamily="34" charset="-122"/>
                 <a:cs typeface="Georgia" pitchFamily="34" charset="-120"/>
               </a:rPr>
@@ -8036,7 +8028,6 @@
           <a:bodyPr/>
           <a:lstStyle/>
           <a:p>
-            <a:pPr algn="ctr"/>
             <a:endParaRPr lang="fr-FR"/>
           </a:p>
         </p:txBody>
@@ -8064,7 +8055,6 @@
           <a:bodyPr/>
           <a:lstStyle/>
           <a:p>
-            <a:pPr algn="ctr"/>
             <a:endParaRPr lang="fr-FR"/>
           </a:p>
         </p:txBody>
@@ -8090,15 +8080,15 @@
           <a:bodyPr wrap="square" lIns="0" tIns="0" rIns="0" bIns="0" rtlCol="0" anchor="ctr"/>
           <a:lstStyle/>
           <a:p>
-            <a:pPr marL="0" indent="0" algn="ctr">
-              <a:buNone/>
-            </a:pPr>
-            <a:r>
-              <a:rPr lang="en-US" sz="3600" dirty="0" b="1" u="none">
+            <a:pPr marL="0" indent="0" algn="r">
+              <a:buNone/>
+            </a:pPr>
+            <a:r>
+              <a:rPr lang="en-US" sz="900" dirty="0">
                 <a:solidFill>
                   <a:srgbClr val="C8A84B"/>
                 </a:solidFill>
-                <a:latin typeface="Georgia" pitchFamily="34" charset="0"/>
+                <a:latin typeface="Trebuchet MS" pitchFamily="34" charset="0"/>
                 <a:ea typeface="Calibri" pitchFamily="34" charset="-122"/>
                 <a:cs typeface="Calibri" pitchFamily="34" charset="-120"/>
               </a:rPr>
@@ -8129,92 +8119,92 @@
           <a:bodyPr wrap="square" lIns="0" tIns="0" rIns="0" bIns="0" rtlCol="0" anchor="ctr"/>
           <a:lstStyle/>
           <a:p>
-            <a:pPr marL="0" indent="0" algn="ctr">
-              <a:buNone/>
-            </a:pPr>
-            <a:r>
-              <a:rPr lang="en-US" sz="3600" b="1" dirty="0" u="none">
+            <a:pPr marL="0" indent="0">
+              <a:buNone/>
+            </a:pPr>
+            <a:r>
+              <a:rPr lang="en-US" sz="1200" b="1" dirty="0">
                 <a:solidFill>
                   <a:srgbClr val="C8A84B"/>
                 </a:solidFill>
-                <a:latin typeface="Georgia" pitchFamily="34" charset="0"/>
+                <a:latin typeface="Trebuchet MS" pitchFamily="34" charset="0"/>
                 <a:ea typeface="Calibri" pitchFamily="34" charset="-122"/>
                 <a:cs typeface="Calibri" pitchFamily="34" charset="-120"/>
               </a:rPr>
               <a:t>Le marketing immobilier </a:t>
             </a:r>
             <a:r>
-              <a:rPr lang="en-US" sz="3600" dirty="0" b="1" u="none">
+              <a:rPr lang="en-US" sz="1200" dirty="0">
                 <a:solidFill>
                   <a:srgbClr val="C8A84B"/>
                 </a:solidFill>
-                <a:latin typeface="Georgia" pitchFamily="34" charset="0"/>
+                <a:latin typeface="Trebuchet MS" pitchFamily="34" charset="0"/>
                 <a:ea typeface="Calibri" pitchFamily="34" charset="-122"/>
                 <a:cs typeface="Calibri" pitchFamily="34" charset="-120"/>
               </a:rPr>
               <a:t>ne se résume plus à la commercialisation d'un bien : il orchestre un </a:t>
             </a:r>
             <a:r>
-              <a:rPr lang="en-US" sz="3600" b="1" dirty="0" u="none">
+              <a:rPr lang="en-US" sz="1200" b="1" dirty="0">
                 <a:solidFill>
                   <a:srgbClr val="C8A84B"/>
                 </a:solidFill>
-                <a:latin typeface="Georgia" pitchFamily="34" charset="0"/>
+                <a:latin typeface="Trebuchet MS" pitchFamily="34" charset="0"/>
                 <a:ea typeface="Calibri" pitchFamily="34" charset="-122"/>
                 <a:cs typeface="Calibri" pitchFamily="34" charset="-120"/>
               </a:rPr>
               <a:t>écosystème de services</a:t>
             </a:r>
             <a:r>
-              <a:rPr lang="en-US" sz="3600" dirty="0" b="1" u="none">
+              <a:rPr lang="en-US" sz="1200" dirty="0">
                 <a:solidFill>
                   <a:srgbClr val="C8A84B"/>
                 </a:solidFill>
-                <a:latin typeface="Georgia" pitchFamily="34" charset="0"/>
+                <a:latin typeface="Trebuchet MS" pitchFamily="34" charset="0"/>
                 <a:ea typeface="Calibri" pitchFamily="34" charset="-122"/>
                 <a:cs typeface="Calibri" pitchFamily="34" charset="-120"/>
               </a:rPr>
               <a:t> (les 7P) au sein d'un </a:t>
             </a:r>
             <a:r>
-              <a:rPr lang="en-US" sz="3600" dirty="0" err="1" b="1" u="none">
+              <a:rPr lang="en-US" sz="1200" dirty="0" err="1">
                 <a:solidFill>
                   <a:srgbClr val="C8A84B"/>
                 </a:solidFill>
-                <a:latin typeface="Georgia" pitchFamily="34" charset="0"/>
+                <a:latin typeface="Trebuchet MS" pitchFamily="34" charset="0"/>
                 <a:ea typeface="Calibri" pitchFamily="34" charset="-122"/>
                 <a:cs typeface="Calibri" pitchFamily="34" charset="-120"/>
               </a:rPr>
               <a:t>parcours</a:t>
             </a:r>
             <a:r>
-              <a:rPr lang="en-US" sz="3600" dirty="0" b="1" u="none">
+              <a:rPr lang="en-US" sz="1200" dirty="0">
                 <a:solidFill>
                   <a:srgbClr val="C8A84B"/>
                 </a:solidFill>
-                <a:latin typeface="Georgia" pitchFamily="34" charset="0"/>
+                <a:latin typeface="Trebuchet MS" pitchFamily="34" charset="0"/>
                 <a:ea typeface="Calibri" pitchFamily="34" charset="-122"/>
                 <a:cs typeface="Calibri" pitchFamily="34" charset="-120"/>
               </a:rPr>
               <a:t> long </a:t>
             </a:r>
             <a:r>
-              <a:rPr lang="en-US" sz="3600" dirty="0" err="1" b="1" u="none">
+              <a:rPr lang="en-US" sz="1200" dirty="0" err="1">
                 <a:solidFill>
                   <a:srgbClr val="C8A84B"/>
                 </a:solidFill>
-                <a:latin typeface="Georgia" pitchFamily="34" charset="0"/>
+                <a:latin typeface="Trebuchet MS" pitchFamily="34" charset="0"/>
                 <a:ea typeface="Calibri" pitchFamily="34" charset="-122"/>
                 <a:cs typeface="Calibri" pitchFamily="34" charset="-120"/>
               </a:rPr>
               <a:t>où</a:t>
             </a:r>
             <a:r>
-              <a:rPr lang="en-US" sz="3600" dirty="0" b="1" u="none">
+              <a:rPr lang="en-US" sz="1200" dirty="0">
                 <a:solidFill>
                   <a:srgbClr val="C8A84B"/>
                 </a:solidFill>
-                <a:latin typeface="Georgia" pitchFamily="34" charset="0"/>
+                <a:latin typeface="Trebuchet MS" pitchFamily="34" charset="0"/>
                 <a:ea typeface="Calibri" pitchFamily="34" charset="-122"/>
                 <a:cs typeface="Calibri" pitchFamily="34" charset="-120"/>
               </a:rPr>
@@ -8252,7 +8242,6 @@
           <a:bodyPr/>
           <a:lstStyle/>
           <a:p>
-            <a:pPr algn="ctr"/>
             <a:endParaRPr lang="fr-FR"/>
           </a:p>
         </p:txBody>
@@ -8285,7 +8274,6 @@
           <a:bodyPr/>
           <a:lstStyle/>
           <a:p>
-            <a:pPr algn="ctr"/>
             <a:endParaRPr lang="fr-FR"/>
           </a:p>
         </p:txBody>
@@ -8315,11 +8303,11 @@
               <a:buNone/>
             </a:pPr>
             <a:r>
-              <a:rPr lang="en-US" sz="3600" b="1" dirty="0" u="none">
+              <a:rPr lang="en-US" sz="1600" b="1" dirty="0">
                 <a:solidFill>
                   <a:srgbClr val="C8A84B"/>
                 </a:solidFill>
-                <a:latin typeface="Georgia" pitchFamily="34" charset="0"/>
+                <a:latin typeface="Trebuchet MS" pitchFamily="34" charset="0"/>
                 <a:ea typeface="Georgia" pitchFamily="34" charset="-122"/>
                 <a:cs typeface="Georgia" pitchFamily="34" charset="-120"/>
               </a:rPr>
@@ -8354,11 +8342,11 @@
               <a:buNone/>
             </a:pPr>
             <a:r>
-              <a:rPr lang="en-US" sz="3600" b="1" dirty="0" u="none">
+              <a:rPr lang="en-US" sz="1300" b="1" dirty="0">
                 <a:solidFill>
                   <a:srgbClr val="C8A84B"/>
                 </a:solidFill>
-                <a:latin typeface="Georgia" pitchFamily="34" charset="0"/>
+                <a:latin typeface="Trebuchet MS" pitchFamily="34" charset="0"/>
                 <a:ea typeface="Calibri" pitchFamily="34" charset="-122"/>
                 <a:cs typeface="Calibri" pitchFamily="34" charset="-120"/>
               </a:rPr>
@@ -8393,11 +8381,11 @@
               <a:buNone/>
             </a:pPr>
             <a:r>
-              <a:rPr lang="en-US" sz="3600" dirty="0" b="1" u="none">
+              <a:rPr lang="en-US" sz="1000" dirty="0">
                 <a:solidFill>
                   <a:srgbClr val="C8A84B"/>
                 </a:solidFill>
-                <a:latin typeface="Georgia" pitchFamily="34" charset="0"/>
+                <a:latin typeface="Trebuchet MS" pitchFamily="34" charset="0"/>
                 <a:ea typeface="Calibri" pitchFamily="34" charset="-122"/>
                 <a:cs typeface="Calibri" pitchFamily="34" charset="-120"/>
               </a:rPr>
@@ -8435,7 +8423,6 @@
           <a:bodyPr/>
           <a:lstStyle/>
           <a:p>
-            <a:pPr algn="ctr"/>
             <a:endParaRPr lang="fr-FR"/>
           </a:p>
         </p:txBody>
@@ -8468,7 +8455,6 @@
           <a:bodyPr/>
           <a:lstStyle/>
           <a:p>
-            <a:pPr algn="ctr"/>
             <a:endParaRPr lang="fr-FR"/>
           </a:p>
         </p:txBody>
@@ -8498,11 +8484,11 @@
               <a:buNone/>
             </a:pPr>
             <a:r>
-              <a:rPr lang="en-US" sz="3600" b="1" dirty="0" u="none">
+              <a:rPr lang="en-US" sz="1600" b="1" dirty="0">
                 <a:solidFill>
                   <a:srgbClr val="C8A84B"/>
                 </a:solidFill>
-                <a:latin typeface="Georgia" pitchFamily="34" charset="0"/>
+                <a:latin typeface="Trebuchet MS" pitchFamily="34" charset="0"/>
                 <a:ea typeface="Georgia" pitchFamily="34" charset="-122"/>
                 <a:cs typeface="Georgia" pitchFamily="34" charset="-120"/>
               </a:rPr>
@@ -8537,11 +8523,11 @@
               <a:buNone/>
             </a:pPr>
             <a:r>
-              <a:rPr lang="en-US" sz="3600" b="1" dirty="0" u="none">
+              <a:rPr lang="en-US" sz="1300" b="1" dirty="0">
                 <a:solidFill>
                   <a:srgbClr val="C8A84B"/>
                 </a:solidFill>
-                <a:latin typeface="Georgia" pitchFamily="34" charset="0"/>
+                <a:latin typeface="Trebuchet MS" pitchFamily="34" charset="0"/>
                 <a:ea typeface="Calibri" pitchFamily="34" charset="-122"/>
                 <a:cs typeface="Calibri" pitchFamily="34" charset="-120"/>
               </a:rPr>
@@ -8576,22 +8562,22 @@
               <a:buNone/>
             </a:pPr>
             <a:r>
-              <a:rPr lang="en-US" sz="3600" dirty="0" b="1" u="none">
+              <a:rPr lang="en-US" sz="1000" dirty="0">
                 <a:solidFill>
                   <a:srgbClr val="C8A84B"/>
                 </a:solidFill>
-                <a:latin typeface="Georgia" pitchFamily="34" charset="0"/>
+                <a:latin typeface="Trebuchet MS" pitchFamily="34" charset="0"/>
                 <a:ea typeface="Calibri" pitchFamily="34" charset="-122"/>
                 <a:cs typeface="Calibri" pitchFamily="34" charset="-120"/>
               </a:rPr>
               <a:t>Exploiter la donnée pour un parcours client </a:t>
             </a:r>
             <a:r>
-              <a:rPr lang="en-US" sz="3600" dirty="0" err="1" b="1" u="none">
+              <a:rPr lang="en-US" sz="1000" dirty="0" err="1">
                 <a:solidFill>
                   <a:srgbClr val="C8A84B"/>
                 </a:solidFill>
-                <a:latin typeface="Georgia" pitchFamily="34" charset="0"/>
+                <a:latin typeface="Trebuchet MS" pitchFamily="34" charset="0"/>
                 <a:ea typeface="Calibri" pitchFamily="34" charset="-122"/>
                 <a:cs typeface="Calibri" pitchFamily="34" charset="-120"/>
               </a:rPr>
@@ -8629,7 +8615,6 @@
           <a:bodyPr/>
           <a:lstStyle/>
           <a:p>
-            <a:pPr algn="ctr"/>
             <a:endParaRPr lang="fr-FR"/>
           </a:p>
         </p:txBody>
@@ -8662,7 +8647,6 @@
           <a:bodyPr/>
           <a:lstStyle/>
           <a:p>
-            <a:pPr algn="ctr"/>
             <a:endParaRPr lang="fr-FR"/>
           </a:p>
         </p:txBody>
@@ -8692,11 +8676,11 @@
               <a:buNone/>
             </a:pPr>
             <a:r>
-              <a:rPr lang="en-US" sz="3600" b="1" dirty="0" u="none">
+              <a:rPr lang="en-US" sz="1600" b="1" dirty="0">
                 <a:solidFill>
                   <a:srgbClr val="C8A84B"/>
                 </a:solidFill>
-                <a:latin typeface="Georgia" pitchFamily="34" charset="0"/>
+                <a:latin typeface="Trebuchet MS" pitchFamily="34" charset="0"/>
                 <a:ea typeface="Georgia" pitchFamily="34" charset="-122"/>
                 <a:cs typeface="Georgia" pitchFamily="34" charset="-120"/>
               </a:rPr>
@@ -8731,11 +8715,11 @@
               <a:buNone/>
             </a:pPr>
             <a:r>
-              <a:rPr lang="en-US" sz="3600" b="1" dirty="0" u="none">
+              <a:rPr lang="en-US" sz="1300" b="1" dirty="0">
                 <a:solidFill>
                   <a:srgbClr val="C8A84B"/>
                 </a:solidFill>
-                <a:latin typeface="Georgia" pitchFamily="34" charset="0"/>
+                <a:latin typeface="Trebuchet MS" pitchFamily="34" charset="0"/>
                 <a:ea typeface="Calibri" pitchFamily="34" charset="-122"/>
                 <a:cs typeface="Calibri" pitchFamily="34" charset="-120"/>
               </a:rPr>
@@ -8770,50 +8754,93 @@
               <a:buNone/>
             </a:pPr>
             <a:r>
-              <a:rPr lang="en-US" sz="3600" dirty="0" err="1" b="1" u="none">
+              <a:rPr lang="en-US" sz="1000" dirty="0" err="1">
                 <a:solidFill>
                   <a:srgbClr val="C8A84B"/>
                 </a:solidFill>
-                <a:latin typeface="Georgia" pitchFamily="34" charset="0"/>
+                <a:latin typeface="Trebuchet MS" pitchFamily="34" charset="0"/>
                 <a:ea typeface="Calibri" pitchFamily="34" charset="-122"/>
                 <a:cs typeface="Calibri" pitchFamily="34" charset="-120"/>
               </a:rPr>
               <a:t>Investir</a:t>
             </a:r>
             <a:r>
-              <a:rPr lang="en-US" sz="3600" dirty="0" b="1" u="none">
+              <a:rPr lang="en-US" sz="1000" dirty="0">
                 <a:solidFill>
                   <a:srgbClr val="C8A84B"/>
                 </a:solidFill>
-                <a:latin typeface="Georgia" pitchFamily="34" charset="0"/>
+                <a:latin typeface="Trebuchet MS" pitchFamily="34" charset="0"/>
                 <a:ea typeface="Calibri" pitchFamily="34" charset="-122"/>
                 <a:cs typeface="Calibri" pitchFamily="34" charset="-120"/>
               </a:rPr>
               <a:t> </a:t>
             </a:r>
             <a:r>
-              <a:rPr lang="en-US" sz="3600" dirty="0" err="1" b="1" u="none">
+              <a:rPr lang="en-US" sz="1000" dirty="0" err="1">
                 <a:solidFill>
                   <a:srgbClr val="C8A84B"/>
                 </a:solidFill>
-                <a:latin typeface="Georgia" pitchFamily="34" charset="0"/>
+                <a:latin typeface="Trebuchet MS" pitchFamily="34" charset="0"/>
                 <a:ea typeface="Calibri" pitchFamily="34" charset="-122"/>
                 <a:cs typeface="Calibri" pitchFamily="34" charset="-120"/>
               </a:rPr>
               <a:t>l'après</a:t>
             </a:r>
             <a:r>
-              <a:rPr lang="en-US" sz="3600" dirty="0" b="1" u="none">
+              <a:rPr lang="en-US" sz="1000" dirty="0">
                 <a:solidFill>
                   <a:srgbClr val="C8A84B"/>
                 </a:solidFill>
-                <a:latin typeface="Georgia" pitchFamily="34" charset="0"/>
+                <a:latin typeface="Trebuchet MS" pitchFamily="34" charset="0"/>
                 <a:ea typeface="Calibri" pitchFamily="34" charset="-122"/>
                 <a:cs typeface="Calibri" pitchFamily="34" charset="-120"/>
               </a:rPr>
               <a:t>-vente, le client d'aujourd'hui est le prescripteur de demain</a:t>
             </a:r>
             <a:endParaRPr lang="en-US" sz="1000" dirty="0"/>
+          </a:p>
+        </p:txBody>
+      </p:sp>
+      <p:sp>
+        <p:nvSpPr>
+          <p:cNvPr id="25" name="Rectangle 24"/>
+          <p:cNvSpPr/>
+          <p:nvPr/>
+        </p:nvSpPr>
+        <p:spPr>
+          <a:xfrm>
+            <a:off x="0" y="0"/>
+            <a:ext cx="9144000" cy="76200"/>
+          </a:xfrm>
+          <a:prstGeom prst="rect">
+            <a:avLst/>
+          </a:prstGeom>
+          <a:solidFill>
+            <a:srgbClr val="C8A84B"/>
+          </a:solidFill>
+          <a:ln>
+            <a:noFill/>
+          </a:ln>
+        </p:spPr>
+        <p:style>
+          <a:lnRef idx="1">
+            <a:schemeClr val="accent1"/>
+          </a:lnRef>
+          <a:fillRef idx="3">
+            <a:schemeClr val="accent1"/>
+          </a:fillRef>
+          <a:effectRef idx="2">
+            <a:schemeClr val="accent1"/>
+          </a:effectRef>
+          <a:fontRef idx="minor">
+            <a:schemeClr val="lt1"/>
+          </a:fontRef>
+        </p:style>
+        <p:txBody>
+          <a:bodyPr rtlCol="0" anchor="ctr"/>
+          <a:lstStyle/>
+          <a:p>
+            <a:pPr algn="ctr"/>
           </a:p>
         </p:txBody>
       </p:sp>
@@ -8822,7 +8849,7 @@
   <p:clrMapOvr>
     <a:masterClrMapping/>
   </p:clrMapOvr>
-  <p:transition spd="med" dur="649">
+  <p:transition spd="med" dur="686">
     <p:fade/>
   </p:transition>
 </p:sld>
@@ -8881,7 +8908,6 @@
           <a:bodyPr/>
           <a:lstStyle/>
           <a:p>
-            <a:pPr algn="ctr"/>
             <a:endParaRPr lang="fr-FR"/>
           </a:p>
         </p:txBody>
@@ -8907,11 +8933,11 @@
           <a:bodyPr wrap="square" lIns="0" tIns="0" rIns="0" bIns="0" rtlCol="0" anchor="ctr"/>
           <a:lstStyle/>
           <a:p>
-            <a:pPr marL="0" indent="0" algn="ctr">
-              <a:buNone/>
-            </a:pPr>
-            <a:r>
-              <a:rPr lang="en-US" sz="2000" b="0" kern="0" spc="200" dirty="0" u="none">
+            <a:pPr marL="0" indent="0">
+              <a:buNone/>
+            </a:pPr>
+            <a:r>
+              <a:rPr lang="en-US" sz="1100" b="1" kern="0" spc="200" dirty="0">
                 <a:solidFill>
                   <a:srgbClr val="1C2B3A"/>
                 </a:solidFill>
@@ -8946,11 +8972,11 @@
           <a:bodyPr wrap="square" lIns="0" tIns="0" rIns="0" bIns="0" rtlCol="0" anchor="ctr"/>
           <a:lstStyle/>
           <a:p>
-            <a:pPr marL="0" indent="0" algn="ctr">
-              <a:buNone/>
-            </a:pPr>
-            <a:r>
-              <a:rPr lang="en-US" sz="2000" b="0" dirty="0" u="none">
+            <a:pPr marL="0" indent="0">
+              <a:buNone/>
+            </a:pPr>
+            <a:r>
+              <a:rPr lang="en-US" sz="2800" b="1" dirty="0">
                 <a:solidFill>
                   <a:srgbClr val="1C2B3A"/>
                 </a:solidFill>
@@ -8987,7 +9013,6 @@
           <a:bodyPr/>
           <a:lstStyle/>
           <a:p>
-            <a:pPr algn="ctr"/>
             <a:endParaRPr lang="fr-FR"/>
           </a:p>
         </p:txBody>
@@ -9015,7 +9040,6 @@
           <a:bodyPr/>
           <a:lstStyle/>
           <a:p>
-            <a:pPr algn="ctr"/>
             <a:endParaRPr lang="fr-FR"/>
           </a:p>
         </p:txBody>
@@ -9041,11 +9065,11 @@
           <a:bodyPr wrap="square" lIns="0" tIns="0" rIns="0" bIns="0" rtlCol="0" anchor="ctr"/>
           <a:lstStyle/>
           <a:p>
-            <a:pPr marL="0" indent="0" algn="ctr">
-              <a:buNone/>
-            </a:pPr>
-            <a:r>
-              <a:rPr lang="en-US" sz="2000" dirty="0" b="0" u="none">
+            <a:pPr marL="0" indent="0" algn="r">
+              <a:buNone/>
+            </a:pPr>
+            <a:r>
+              <a:rPr lang="en-US" sz="900" dirty="0">
                 <a:solidFill>
                   <a:srgbClr val="1C2B3A"/>
                 </a:solidFill>
@@ -9080,11 +9104,11 @@
           <a:bodyPr wrap="square" lIns="0" tIns="0" rIns="0" bIns="0" rtlCol="0" anchor="ctr"/>
           <a:lstStyle/>
           <a:p>
-            <a:pPr marL="0" indent="0" algn="ctr">
-              <a:buNone/>
-            </a:pPr>
-            <a:r>
-              <a:rPr lang="en-US" sz="2000" b="0" dirty="0" u="none">
+            <a:pPr marL="0" indent="0">
+              <a:buNone/>
+            </a:pPr>
+            <a:r>
+              <a:rPr lang="en-US" sz="1800" b="1" dirty="0">
                 <a:solidFill>
                   <a:srgbClr val="1C2B3A"/>
                 </a:solidFill>
@@ -9119,11 +9143,11 @@
           <a:bodyPr wrap="square" lIns="0" tIns="0" rIns="0" bIns="0" rtlCol="0" anchor="ctr"/>
           <a:lstStyle/>
           <a:p>
-            <a:pPr marL="0" indent="0" algn="ctr">
-              <a:buNone/>
-            </a:pPr>
-            <a:r>
-              <a:rPr lang="en-US" sz="2000" b="0" dirty="0" u="none">
+            <a:pPr marL="0" indent="0">
+              <a:buNone/>
+            </a:pPr>
+            <a:r>
+              <a:rPr lang="en-US" sz="1400" b="1" dirty="0">
                 <a:solidFill>
                   <a:srgbClr val="1C2B3A"/>
                 </a:solidFill>
@@ -9158,11 +9182,11 @@
           <a:bodyPr wrap="square" lIns="0" tIns="0" rIns="0" bIns="0" rtlCol="0" anchor="ctr"/>
           <a:lstStyle/>
           <a:p>
-            <a:pPr marL="0" indent="0" algn="ctr">
-              <a:buNone/>
-            </a:pPr>
-            <a:r>
-              <a:rPr lang="en-US" sz="2000" i="1" dirty="0" b="0" u="none">
+            <a:pPr marL="0" indent="0" algn="r">
+              <a:buNone/>
+            </a:pPr>
+            <a:r>
+              <a:rPr lang="en-US" sz="1100" i="1" dirty="0">
                 <a:solidFill>
                   <a:srgbClr val="1C2B3A"/>
                 </a:solidFill>
@@ -9197,11 +9221,11 @@
           <a:bodyPr wrap="square" lIns="0" tIns="0" rIns="0" bIns="0" rtlCol="0" anchor="ctr"/>
           <a:lstStyle/>
           <a:p>
-            <a:pPr marL="0" indent="0" algn="ctr">
-              <a:buNone/>
-            </a:pPr>
-            <a:r>
-              <a:rPr lang="en-US" sz="2000" b="0" dirty="0" u="none">
+            <a:pPr marL="0" indent="0">
+              <a:buNone/>
+            </a:pPr>
+            <a:r>
+              <a:rPr lang="en-US" sz="1800" b="1" dirty="0">
                 <a:solidFill>
                   <a:srgbClr val="1C2B3A"/>
                 </a:solidFill>
@@ -9236,11 +9260,11 @@
           <a:bodyPr wrap="square" lIns="0" tIns="0" rIns="0" bIns="0" rtlCol="0" anchor="ctr"/>
           <a:lstStyle/>
           <a:p>
-            <a:pPr marL="0" indent="0" algn="ctr">
-              <a:buNone/>
-            </a:pPr>
-            <a:r>
-              <a:rPr lang="en-US" sz="2000" b="0" dirty="0" u="none">
+            <a:pPr marL="0" indent="0">
+              <a:buNone/>
+            </a:pPr>
+            <a:r>
+              <a:rPr lang="en-US" sz="1400" b="1" dirty="0">
                 <a:solidFill>
                   <a:srgbClr val="1C2B3A"/>
                 </a:solidFill>
@@ -9275,11 +9299,11 @@
           <a:bodyPr wrap="square" lIns="0" tIns="0" rIns="0" bIns="0" rtlCol="0" anchor="ctr"/>
           <a:lstStyle/>
           <a:p>
-            <a:pPr marL="0" indent="0" algn="ctr">
-              <a:buNone/>
-            </a:pPr>
-            <a:r>
-              <a:rPr lang="en-US" sz="2000" i="1" dirty="0" b="0" u="none">
+            <a:pPr marL="0" indent="0" algn="r">
+              <a:buNone/>
+            </a:pPr>
+            <a:r>
+              <a:rPr lang="en-US" sz="1100" i="1" dirty="0">
                 <a:solidFill>
                   <a:srgbClr val="1C2B3A"/>
                 </a:solidFill>
@@ -9314,11 +9338,11 @@
           <a:bodyPr wrap="square" lIns="0" tIns="0" rIns="0" bIns="0" rtlCol="0" anchor="ctr"/>
           <a:lstStyle/>
           <a:p>
-            <a:pPr marL="0" indent="0" algn="ctr">
-              <a:buNone/>
-            </a:pPr>
-            <a:r>
-              <a:rPr lang="en-US" sz="2000" b="0" dirty="0" u="none">
+            <a:pPr marL="0" indent="0">
+              <a:buNone/>
+            </a:pPr>
+            <a:r>
+              <a:rPr lang="en-US" sz="1800" b="1" dirty="0">
                 <a:solidFill>
                   <a:srgbClr val="1C2B3A"/>
                 </a:solidFill>
@@ -9353,11 +9377,11 @@
           <a:bodyPr wrap="square" lIns="0" tIns="0" rIns="0" bIns="0" rtlCol="0" anchor="ctr"/>
           <a:lstStyle/>
           <a:p>
-            <a:pPr marL="0" indent="0" algn="ctr">
-              <a:buNone/>
-            </a:pPr>
-            <a:r>
-              <a:rPr lang="en-US" sz="2000" b="0" dirty="0" u="none">
+            <a:pPr marL="0" indent="0">
+              <a:buNone/>
+            </a:pPr>
+            <a:r>
+              <a:rPr lang="en-US" sz="1400" b="1" dirty="0">
                 <a:solidFill>
                   <a:srgbClr val="1C2B3A"/>
                 </a:solidFill>
@@ -9392,11 +9416,11 @@
           <a:bodyPr wrap="square" lIns="0" tIns="0" rIns="0" bIns="0" rtlCol="0" anchor="ctr"/>
           <a:lstStyle/>
           <a:p>
-            <a:pPr marL="0" indent="0" algn="ctr">
-              <a:buNone/>
-            </a:pPr>
-            <a:r>
-              <a:rPr lang="en-US" sz="2000" i="1" dirty="0" b="0" u="none">
+            <a:pPr marL="0" indent="0" algn="r">
+              <a:buNone/>
+            </a:pPr>
+            <a:r>
+              <a:rPr lang="en-US" sz="1100" i="1" dirty="0">
                 <a:solidFill>
                   <a:srgbClr val="1C2B3A"/>
                 </a:solidFill>
@@ -9431,11 +9455,11 @@
           <a:bodyPr wrap="square" lIns="0" tIns="0" rIns="0" bIns="0" rtlCol="0" anchor="ctr"/>
           <a:lstStyle/>
           <a:p>
-            <a:pPr marL="0" indent="0" algn="ctr">
-              <a:buNone/>
-            </a:pPr>
-            <a:r>
-              <a:rPr lang="en-US" sz="2000" b="0" dirty="0" u="none">
+            <a:pPr marL="0" indent="0">
+              <a:buNone/>
+            </a:pPr>
+            <a:r>
+              <a:rPr lang="en-US" sz="1800" b="1" dirty="0">
                 <a:solidFill>
                   <a:srgbClr val="1C2B3A"/>
                 </a:solidFill>
@@ -9470,11 +9494,11 @@
           <a:bodyPr wrap="square" lIns="0" tIns="0" rIns="0" bIns="0" rtlCol="0" anchor="ctr"/>
           <a:lstStyle/>
           <a:p>
-            <a:pPr marL="0" indent="0" algn="ctr">
-              <a:buNone/>
-            </a:pPr>
-            <a:r>
-              <a:rPr lang="en-US" sz="2000" b="0" dirty="0" u="none">
+            <a:pPr marL="0" indent="0">
+              <a:buNone/>
+            </a:pPr>
+            <a:r>
+              <a:rPr lang="en-US" sz="1400" b="1" dirty="0">
                 <a:solidFill>
                   <a:srgbClr val="1C2B3A"/>
                 </a:solidFill>
@@ -9509,11 +9533,11 @@
           <a:bodyPr wrap="square" lIns="0" tIns="0" rIns="0" bIns="0" rtlCol="0" anchor="ctr"/>
           <a:lstStyle/>
           <a:p>
-            <a:pPr marL="0" indent="0" algn="ctr">
-              <a:buNone/>
-            </a:pPr>
-            <a:r>
-              <a:rPr lang="en-US" sz="2000" i="1" dirty="0" b="0" u="none">
+            <a:pPr marL="0" indent="0" algn="r">
+              <a:buNone/>
+            </a:pPr>
+            <a:r>
+              <a:rPr lang="en-US" sz="1100" i="1" dirty="0">
                 <a:solidFill>
                   <a:srgbClr val="1C2B3A"/>
                 </a:solidFill>
@@ -9548,11 +9572,11 @@
           <a:bodyPr wrap="square" lIns="0" tIns="0" rIns="0" bIns="0" rtlCol="0" anchor="ctr"/>
           <a:lstStyle/>
           <a:p>
-            <a:pPr marL="0" indent="0" algn="ctr">
-              <a:buNone/>
-            </a:pPr>
-            <a:r>
-              <a:rPr lang="en-US" sz="2000" b="0" dirty="0" u="none">
+            <a:pPr marL="0" indent="0">
+              <a:buNone/>
+            </a:pPr>
+            <a:r>
+              <a:rPr lang="en-US" sz="1800" b="1" dirty="0">
                 <a:solidFill>
                   <a:srgbClr val="1C2B3A"/>
                 </a:solidFill>
@@ -9587,11 +9611,11 @@
           <a:bodyPr wrap="square" lIns="0" tIns="0" rIns="0" bIns="0" rtlCol="0" anchor="ctr"/>
           <a:lstStyle/>
           <a:p>
-            <a:pPr marL="0" indent="0" algn="ctr">
-              <a:buNone/>
-            </a:pPr>
-            <a:r>
-              <a:rPr lang="en-US" sz="2000" b="0" dirty="0" u="none">
+            <a:pPr marL="0" indent="0">
+              <a:buNone/>
+            </a:pPr>
+            <a:r>
+              <a:rPr lang="en-US" sz="1400" b="1" dirty="0">
                 <a:solidFill>
                   <a:srgbClr val="1C2B3A"/>
                 </a:solidFill>
@@ -9626,11 +9650,11 @@
           <a:bodyPr wrap="square" lIns="0" tIns="0" rIns="0" bIns="0" rtlCol="0" anchor="ctr"/>
           <a:lstStyle/>
           <a:p>
-            <a:pPr marL="0" indent="0" algn="ctr">
-              <a:buNone/>
-            </a:pPr>
-            <a:r>
-              <a:rPr lang="en-US" sz="2000" i="1" dirty="0" b="0" u="none">
+            <a:pPr marL="0" indent="0" algn="r">
+              <a:buNone/>
+            </a:pPr>
+            <a:r>
+              <a:rPr lang="en-US" sz="1100" i="1" dirty="0">
                 <a:solidFill>
                   <a:srgbClr val="1C2B3A"/>
                 </a:solidFill>
@@ -9665,11 +9689,11 @@
           <a:bodyPr wrap="square" lIns="0" tIns="0" rIns="0" bIns="0" rtlCol="0" anchor="ctr"/>
           <a:lstStyle/>
           <a:p>
-            <a:pPr marL="0" indent="0" algn="ctr">
-              <a:buNone/>
-            </a:pPr>
-            <a:r>
-              <a:rPr lang="en-US" sz="2000" b="0" dirty="0" u="none">
+            <a:pPr marL="0" indent="0">
+              <a:buNone/>
+            </a:pPr>
+            <a:r>
+              <a:rPr lang="en-US" sz="1800" b="1" dirty="0">
                 <a:solidFill>
                   <a:srgbClr val="1C2B3A"/>
                 </a:solidFill>
@@ -9704,11 +9728,11 @@
           <a:bodyPr wrap="square" lIns="0" tIns="0" rIns="0" bIns="0" rtlCol="0" anchor="ctr"/>
           <a:lstStyle/>
           <a:p>
-            <a:pPr marL="0" indent="0" algn="ctr">
-              <a:buNone/>
-            </a:pPr>
-            <a:r>
-              <a:rPr lang="en-US" sz="2000" b="0" dirty="0" u="none">
+            <a:pPr marL="0" indent="0">
+              <a:buNone/>
+            </a:pPr>
+            <a:r>
+              <a:rPr lang="en-US" sz="1400" b="1" dirty="0">
                 <a:solidFill>
                   <a:srgbClr val="1C2B3A"/>
                 </a:solidFill>
@@ -9743,11 +9767,11 @@
           <a:bodyPr wrap="square" lIns="0" tIns="0" rIns="0" bIns="0" rtlCol="0" anchor="ctr"/>
           <a:lstStyle/>
           <a:p>
-            <a:pPr marL="0" indent="0" algn="ctr">
-              <a:buNone/>
-            </a:pPr>
-            <a:r>
-              <a:rPr lang="en-US" sz="2000" i="1" dirty="0" b="0" u="none">
+            <a:pPr marL="0" indent="0" algn="r">
+              <a:buNone/>
+            </a:pPr>
+            <a:r>
+              <a:rPr lang="en-US" sz="1100" i="1" dirty="0">
                 <a:solidFill>
                   <a:srgbClr val="1C2B3A"/>
                 </a:solidFill>
@@ -9782,11 +9806,11 @@
           <a:bodyPr wrap="square" lIns="0" tIns="0" rIns="0" bIns="0" rtlCol="0" anchor="ctr"/>
           <a:lstStyle/>
           <a:p>
-            <a:pPr marL="0" indent="0" algn="ctr">
-              <a:buNone/>
-            </a:pPr>
-            <a:r>
-              <a:rPr lang="en-US" sz="2000" b="0" dirty="0" u="none">
+            <a:pPr marL="0" indent="0">
+              <a:buNone/>
+            </a:pPr>
+            <a:r>
+              <a:rPr lang="en-US" sz="1800" b="1" dirty="0">
                 <a:solidFill>
                   <a:srgbClr val="1C2B3A"/>
                 </a:solidFill>
@@ -9821,11 +9845,11 @@
           <a:bodyPr wrap="square" lIns="0" tIns="0" rIns="0" bIns="0" rtlCol="0" anchor="ctr"/>
           <a:lstStyle/>
           <a:p>
-            <a:pPr marL="0" indent="0" algn="ctr">
-              <a:buNone/>
-            </a:pPr>
-            <a:r>
-              <a:rPr lang="en-US" sz="2000" b="0" dirty="0" u="none">
+            <a:pPr marL="0" indent="0">
+              <a:buNone/>
+            </a:pPr>
+            <a:r>
+              <a:rPr lang="en-US" sz="1400" b="1" dirty="0">
                 <a:solidFill>
                   <a:srgbClr val="1C2B3A"/>
                 </a:solidFill>
@@ -9860,11 +9884,11 @@
           <a:bodyPr wrap="square" lIns="0" tIns="0" rIns="0" bIns="0" rtlCol="0" anchor="ctr"/>
           <a:lstStyle/>
           <a:p>
-            <a:pPr marL="0" indent="0" algn="ctr">
-              <a:buNone/>
-            </a:pPr>
-            <a:r>
-              <a:rPr lang="en-US" sz="2000" i="1" dirty="0" b="0" u="none">
+            <a:pPr marL="0" indent="0" algn="r">
+              <a:buNone/>
+            </a:pPr>
+            <a:r>
+              <a:rPr lang="en-US" sz="1100" i="1" dirty="0">
                 <a:solidFill>
                   <a:srgbClr val="1C2B3A"/>
                 </a:solidFill>
@@ -9886,8 +9910,8 @@
         </p:nvSpPr>
         <p:spPr>
           <a:xfrm>
-            <a:off x="605848" y="132103"/>
-            <a:ext cx="2500338" cy="36576"/>
+            <a:off x="0" y="0"/>
+            <a:ext cx="9144000" cy="76200"/>
           </a:xfrm>
           <a:prstGeom prst="rect">
             <a:avLst/>
@@ -9926,7 +9950,7 @@
   <p:clrMapOvr>
     <a:masterClrMapping/>
   </p:clrMapOvr>
-  <p:transition spd="med" dur="525">
+  <p:transition spd="med" dur="528">
     <p:fade/>
   </p:transition>
 </p:sld>
@@ -9985,7 +10009,6 @@
           <a:bodyPr/>
           <a:lstStyle/>
           <a:p>
-            <a:pPr algn="l"/>
             <a:endParaRPr lang="fr-FR"/>
           </a:p>
         </p:txBody>
@@ -10011,11 +10034,11 @@
           <a:bodyPr wrap="square" lIns="0" tIns="0" rIns="0" bIns="0" rtlCol="0" anchor="ctr"/>
           <a:lstStyle/>
           <a:p>
-            <a:pPr marL="0" indent="0" algn="l">
-              <a:buNone/>
-            </a:pPr>
-            <a:r>
-              <a:rPr lang="en-US" sz="2000" b="0" kern="0" spc="200" dirty="0" u="none">
+            <a:pPr marL="0" indent="0">
+              <a:buNone/>
+            </a:pPr>
+            <a:r>
+              <a:rPr lang="en-US" sz="1100" b="1" kern="0" spc="200" dirty="0">
                 <a:solidFill>
                   <a:srgbClr val="1C2B3A"/>
                 </a:solidFill>
@@ -10050,11 +10073,11 @@
           <a:bodyPr wrap="square" lIns="0" tIns="0" rIns="0" bIns="0" rtlCol="0" anchor="ctr"/>
           <a:lstStyle/>
           <a:p>
-            <a:pPr marL="0" indent="0" algn="l">
-              <a:buNone/>
-            </a:pPr>
-            <a:r>
-              <a:rPr lang="en-US" sz="2000" b="0" dirty="0" u="none">
+            <a:pPr marL="0" indent="0">
+              <a:buNone/>
+            </a:pPr>
+            <a:r>
+              <a:rPr lang="en-US" sz="2800" b="1" dirty="0">
                 <a:solidFill>
                   <a:srgbClr val="1C2B3A"/>
                 </a:solidFill>
@@ -10091,7 +10114,6 @@
           <a:bodyPr/>
           <a:lstStyle/>
           <a:p>
-            <a:pPr algn="l"/>
             <a:endParaRPr lang="fr-FR"/>
           </a:p>
         </p:txBody>
@@ -10119,7 +10141,6 @@
           <a:bodyPr/>
           <a:lstStyle/>
           <a:p>
-            <a:pPr algn="l"/>
             <a:endParaRPr lang="fr-FR"/>
           </a:p>
         </p:txBody>
@@ -10145,11 +10166,11 @@
           <a:bodyPr wrap="square" lIns="0" tIns="0" rIns="0" bIns="0" rtlCol="0" anchor="ctr"/>
           <a:lstStyle/>
           <a:p>
-            <a:pPr marL="0" indent="0" algn="l">
-              <a:buNone/>
-            </a:pPr>
-            <a:r>
-              <a:rPr lang="en-US" sz="2000" dirty="0" b="0" u="none">
+            <a:pPr marL="0" indent="0" algn="r">
+              <a:buNone/>
+            </a:pPr>
+            <a:r>
+              <a:rPr lang="en-US" sz="900" dirty="0">
                 <a:solidFill>
                   <a:srgbClr val="1C2B3A"/>
                 </a:solidFill>
@@ -10184,14 +10205,14 @@
           <a:bodyPr wrap="square" rtlCol="0" anchor="ctr"/>
           <a:lstStyle/>
           <a:p>
-            <a:pPr marL="0" indent="0" algn="l">
+            <a:pPr marL="0" indent="0">
               <a:spcAft>
                 <a:spcPts val="600"/>
               </a:spcAft>
               <a:buNone/>
             </a:pPr>
             <a:r>
-              <a:rPr lang="en-US" sz="2000" b="0" dirty="0" u="none">
+              <a:rPr lang="en-US" sz="1200" b="1" dirty="0">
                 <a:solidFill>
                   <a:srgbClr val="1C2B3A"/>
                 </a:solidFill>
@@ -10204,14 +10225,14 @@
             <a:endParaRPr lang="en-US" sz="1200" dirty="0"/>
           </a:p>
           <a:p>
-            <a:pPr marL="0" indent="0" algn="l">
+            <a:pPr marL="0" indent="0">
               <a:spcAft>
                 <a:spcPts val="600"/>
               </a:spcAft>
               <a:buNone/>
             </a:pPr>
             <a:r>
-              <a:rPr lang="en-US" sz="2000" dirty="0" b="0" u="none">
+              <a:rPr lang="en-US" sz="1200" dirty="0">
                 <a:solidFill>
                   <a:srgbClr val="1C2B3A"/>
                 </a:solidFill>
@@ -10222,7 +10243,7 @@
               <a:t>Hausse des taux, raréfaction du foncier, exigences ESG, nouveaux usages post-Covid : le </a:t>
             </a:r>
             <a:r>
-              <a:rPr lang="en-US" sz="2000" dirty="0" err="1" b="0" u="none">
+              <a:rPr lang="en-US" sz="1200" dirty="0" err="1">
                 <a:solidFill>
                   <a:srgbClr val="1C2B3A"/>
                 </a:solidFill>
@@ -10233,7 +10254,7 @@
               <a:t>secteur</a:t>
             </a:r>
             <a:r>
-              <a:rPr lang="en-US" sz="2000" dirty="0" b="0" u="none">
+              <a:rPr lang="en-US" sz="1200" dirty="0">
                 <a:solidFill>
                   <a:srgbClr val="1C2B3A"/>
                 </a:solidFill>
@@ -10244,7 +10265,7 @@
               <a:t> </a:t>
             </a:r>
             <a:r>
-              <a:rPr lang="en-US" sz="2000" dirty="0" err="1" b="0" u="none">
+              <a:rPr lang="en-US" sz="1200" dirty="0" err="1">
                 <a:solidFill>
                   <a:srgbClr val="1C2B3A"/>
                 </a:solidFill>
@@ -10255,7 +10276,7 @@
               <a:t>immobilier</a:t>
             </a:r>
             <a:r>
-              <a:rPr lang="en-US" sz="2000" dirty="0" b="0" u="none">
+              <a:rPr lang="en-US" sz="1200" dirty="0">
                 <a:solidFill>
                   <a:srgbClr val="1C2B3A"/>
                 </a:solidFill>
@@ -10266,7 +10287,7 @@
               <a:t>, résidentiel comme </a:t>
             </a:r>
             <a:r>
-              <a:rPr lang="en-US" sz="2000" dirty="0" err="1" b="0" u="none">
+              <a:rPr lang="en-US" sz="1200" dirty="0" err="1">
                 <a:solidFill>
                   <a:srgbClr val="1C2B3A"/>
                 </a:solidFill>
@@ -10277,7 +10298,7 @@
               <a:t>tertiaire</a:t>
             </a:r>
             <a:r>
-              <a:rPr lang="en-US" sz="2000" dirty="0" b="0" u="none">
+              <a:rPr lang="en-US" sz="1200" dirty="0">
                 <a:solidFill>
                   <a:srgbClr val="1C2B3A"/>
                 </a:solidFill>
@@ -10288,7 +10309,7 @@
               <a:t> </a:t>
             </a:r>
             <a:r>
-              <a:rPr lang="en-US" sz="2000" dirty="0" err="1" b="0" u="none">
+              <a:rPr lang="en-US" sz="1200" dirty="0" err="1">
                 <a:solidFill>
                   <a:srgbClr val="1C2B3A"/>
                 </a:solidFill>
@@ -10299,7 +10320,7 @@
               <a:t>n'échappe</a:t>
             </a:r>
             <a:r>
-              <a:rPr lang="en-US" sz="2000" dirty="0" b="0" u="none">
+              <a:rPr lang="en-US" sz="1200" dirty="0">
                 <a:solidFill>
                   <a:srgbClr val="1C2B3A"/>
                 </a:solidFill>
@@ -10312,14 +10333,14 @@
             <a:endParaRPr lang="en-US" sz="1200" dirty="0"/>
           </a:p>
           <a:p>
-            <a:pPr marL="0" indent="0" algn="l">
+            <a:pPr marL="0" indent="0">
               <a:spcAft>
                 <a:spcPts val="600"/>
               </a:spcAft>
               <a:buNone/>
             </a:pPr>
             <a:r>
-              <a:rPr lang="en-US" sz="2000" dirty="0" b="0" u="none">
+              <a:rPr lang="en-US" sz="1200" dirty="0">
                 <a:solidFill>
                   <a:srgbClr val="1C2B3A"/>
                 </a:solidFill>
@@ -10332,14 +10353,14 @@
             <a:endParaRPr lang="en-US" sz="1200" dirty="0"/>
           </a:p>
           <a:p>
-            <a:pPr marL="0" indent="0" algn="l">
+            <a:pPr marL="0" indent="0">
               <a:spcAft>
                 <a:spcPts val="600"/>
               </a:spcAft>
               <a:buNone/>
             </a:pPr>
             <a:r>
-              <a:rPr lang="en-US" sz="2000" b="0" dirty="0" u="none">
+              <a:rPr lang="en-US" sz="1200" b="1" dirty="0">
                 <a:solidFill>
                   <a:srgbClr val="1C2B3A"/>
                 </a:solidFill>
@@ -10352,14 +10373,14 @@
             <a:endParaRPr lang="en-US" sz="1200" dirty="0"/>
           </a:p>
           <a:p>
-            <a:pPr marL="0" indent="0" algn="l">
+            <a:pPr marL="0" indent="0">
               <a:spcAft>
                 <a:spcPts val="600"/>
               </a:spcAft>
               <a:buNone/>
             </a:pPr>
             <a:r>
-              <a:rPr lang="en-US" sz="2000" dirty="0" b="0" u="none">
+              <a:rPr lang="en-US" sz="1200" dirty="0">
                 <a:solidFill>
                   <a:srgbClr val="1C2B3A"/>
                 </a:solidFill>
@@ -10370,7 +10391,7 @@
               <a:t>Le bien immobilier ne se vend plus seul : il s'inscrit dans une promesse de marque, un parcours d'achat long et </a:t>
             </a:r>
             <a:r>
-              <a:rPr lang="en-US" sz="2000" dirty="0" err="1" b="0" u="none">
+              <a:rPr lang="en-US" sz="1200" dirty="0" err="1">
                 <a:solidFill>
                   <a:srgbClr val="1C2B3A"/>
                 </a:solidFill>
@@ -10381,7 +10402,7 @@
               <a:t>émotionnel</a:t>
             </a:r>
             <a:r>
-              <a:rPr lang="en-US" sz="2000" dirty="0" b="0" u="none">
+              <a:rPr lang="en-US" sz="1200" dirty="0">
                 <a:solidFill>
                   <a:srgbClr val="1C2B3A"/>
                 </a:solidFill>
@@ -10392,7 +10413,7 @@
               <a:t> </a:t>
             </a:r>
             <a:r>
-              <a:rPr lang="en-US" sz="2000" dirty="0" err="1" b="0" u="none">
+              <a:rPr lang="en-US" sz="1200" dirty="0" err="1">
                 <a:solidFill>
                   <a:srgbClr val="1C2B3A"/>
                 </a:solidFill>
@@ -10403,7 +10424,7 @@
               <a:t>ainsi</a:t>
             </a:r>
             <a:r>
-              <a:rPr lang="en-US" sz="2000" dirty="0" b="0" u="none">
+              <a:rPr lang="en-US" sz="1200" dirty="0">
                 <a:solidFill>
                   <a:srgbClr val="1C2B3A"/>
                 </a:solidFill>
@@ -10414,7 +10435,7 @@
               <a:t> </a:t>
             </a:r>
             <a:r>
-              <a:rPr lang="en-US" sz="2000" dirty="0" err="1" b="0" u="none">
+              <a:rPr lang="en-US" sz="1200" dirty="0" err="1">
                 <a:solidFill>
                   <a:srgbClr val="1C2B3A"/>
                 </a:solidFill>
@@ -10425,7 +10446,7 @@
               <a:t>qu’une</a:t>
             </a:r>
             <a:r>
-              <a:rPr lang="en-US" sz="2000" dirty="0" b="0" u="none">
+              <a:rPr lang="en-US" sz="1200" dirty="0">
                 <a:solidFill>
                   <a:srgbClr val="1C2B3A"/>
                 </a:solidFill>
@@ -10467,7 +10488,6 @@
           <a:bodyPr/>
           <a:lstStyle/>
           <a:p>
-            <a:pPr algn="l"/>
             <a:endParaRPr lang="fr-FR"/>
           </a:p>
         </p:txBody>
@@ -10500,7 +10520,6 @@
           <a:bodyPr/>
           <a:lstStyle/>
           <a:p>
-            <a:pPr algn="l"/>
             <a:endParaRPr lang="fr-FR"/>
           </a:p>
         </p:txBody>
@@ -10526,11 +10545,11 @@
           <a:bodyPr wrap="square" lIns="0" tIns="0" rIns="0" bIns="0" rtlCol="0" anchor="ctr"/>
           <a:lstStyle/>
           <a:p>
-            <a:pPr marL="0" indent="0" algn="l">
-              <a:buNone/>
-            </a:pPr>
-            <a:r>
-              <a:rPr lang="en-US" sz="2000" b="0" dirty="0" u="none">
+            <a:pPr marL="0" indent="0">
+              <a:buNone/>
+            </a:pPr>
+            <a:r>
+              <a:rPr lang="en-US" sz="2000" b="1" dirty="0">
                 <a:solidFill>
                   <a:srgbClr val="1C2B3A"/>
                 </a:solidFill>
@@ -10565,11 +10584,11 @@
           <a:bodyPr wrap="square" lIns="0" tIns="0" rIns="0" bIns="0" rtlCol="0" anchor="ctr"/>
           <a:lstStyle/>
           <a:p>
-            <a:pPr marL="0" indent="0" algn="l">
-              <a:buNone/>
-            </a:pPr>
-            <a:r>
-              <a:rPr lang="en-US" sz="2000" i="1" dirty="0" b="0" u="none">
+            <a:pPr marL="0" indent="0">
+              <a:buNone/>
+            </a:pPr>
+            <a:r>
+              <a:rPr lang="en-US" sz="1000" i="1" dirty="0">
                 <a:solidFill>
                   <a:srgbClr val="1C2B3A"/>
                 </a:solidFill>
@@ -10611,7 +10630,6 @@
           <a:bodyPr/>
           <a:lstStyle/>
           <a:p>
-            <a:pPr algn="l"/>
             <a:endParaRPr lang="fr-FR"/>
           </a:p>
         </p:txBody>
@@ -10644,7 +10662,6 @@
           <a:bodyPr/>
           <a:lstStyle/>
           <a:p>
-            <a:pPr algn="l"/>
             <a:endParaRPr lang="fr-FR"/>
           </a:p>
         </p:txBody>
@@ -10670,11 +10687,11 @@
           <a:bodyPr wrap="square" lIns="0" tIns="0" rIns="0" bIns="0" rtlCol="0" anchor="ctr"/>
           <a:lstStyle/>
           <a:p>
-            <a:pPr marL="0" indent="0" algn="l">
-              <a:buNone/>
-            </a:pPr>
-            <a:r>
-              <a:rPr lang="en-US" sz="2000" b="0" dirty="0" u="none">
+            <a:pPr marL="0" indent="0">
+              <a:buNone/>
+            </a:pPr>
+            <a:r>
+              <a:rPr lang="en-US" sz="2000" b="1" dirty="0">
                 <a:solidFill>
                   <a:srgbClr val="1C2B3A"/>
                 </a:solidFill>
@@ -10709,11 +10726,11 @@
           <a:bodyPr wrap="square" lIns="0" tIns="0" rIns="0" bIns="0" rtlCol="0" anchor="ctr"/>
           <a:lstStyle/>
           <a:p>
-            <a:pPr marL="0" indent="0" algn="l">
-              <a:buNone/>
-            </a:pPr>
-            <a:r>
-              <a:rPr lang="en-US" sz="2000" i="1" dirty="0" b="0" u="none">
+            <a:pPr marL="0" indent="0">
+              <a:buNone/>
+            </a:pPr>
+            <a:r>
+              <a:rPr lang="en-US" sz="1000" i="1" dirty="0">
                 <a:solidFill>
                   <a:srgbClr val="1C2B3A"/>
                 </a:solidFill>
@@ -10755,7 +10772,6 @@
           <a:bodyPr/>
           <a:lstStyle/>
           <a:p>
-            <a:pPr algn="l"/>
             <a:endParaRPr lang="fr-FR"/>
           </a:p>
         </p:txBody>
@@ -10788,7 +10804,6 @@
           <a:bodyPr/>
           <a:lstStyle/>
           <a:p>
-            <a:pPr algn="l"/>
             <a:endParaRPr lang="fr-FR"/>
           </a:p>
         </p:txBody>
@@ -10814,11 +10829,11 @@
           <a:bodyPr wrap="square" lIns="0" tIns="0" rIns="0" bIns="0" rtlCol="0" anchor="ctr"/>
           <a:lstStyle/>
           <a:p>
-            <a:pPr marL="0" indent="0" algn="l">
-              <a:buNone/>
-            </a:pPr>
-            <a:r>
-              <a:rPr lang="en-US" sz="2000" b="0" dirty="0" u="none">
+            <a:pPr marL="0" indent="0">
+              <a:buNone/>
+            </a:pPr>
+            <a:r>
+              <a:rPr lang="en-US" sz="2000" b="1" dirty="0">
                 <a:solidFill>
                   <a:srgbClr val="1C2B3A"/>
                 </a:solidFill>
@@ -10853,11 +10868,11 @@
           <a:bodyPr wrap="square" lIns="0" tIns="0" rIns="0" bIns="0" rtlCol="0" anchor="ctr"/>
           <a:lstStyle/>
           <a:p>
-            <a:pPr marL="0" indent="0" algn="l">
-              <a:buNone/>
-            </a:pPr>
-            <a:r>
-              <a:rPr lang="en-US" sz="2000" i="1" dirty="0" b="0" u="none">
+            <a:pPr marL="0" indent="0">
+              <a:buNone/>
+            </a:pPr>
+            <a:r>
+              <a:rPr lang="en-US" sz="1000" i="1" dirty="0">
                 <a:solidFill>
                   <a:srgbClr val="1C2B3A"/>
                 </a:solidFill>
@@ -10879,8 +10894,8 @@
         </p:nvSpPr>
         <p:spPr>
           <a:xfrm>
-            <a:off x="636157" y="122429"/>
-            <a:ext cx="3122445" cy="36576"/>
+            <a:off x="0" y="0"/>
+            <a:ext cx="9144000" cy="76200"/>
           </a:xfrm>
           <a:prstGeom prst="rect">
             <a:avLst/>
@@ -10919,7 +10934,7 @@
   <p:clrMapOvr>
     <a:masterClrMapping/>
   </p:clrMapOvr>
-  <p:transition spd="med" dur="423">
+  <p:transition spd="med" dur="497">
     <p:fade/>
   </p:transition>
 </p:sld>
@@ -10973,7 +10988,6 @@
           <a:bodyPr/>
           <a:lstStyle/>
           <a:p>
-            <a:pPr algn="l"/>
             <a:endParaRPr lang="fr-FR"/>
           </a:p>
         </p:txBody>
@@ -10999,11 +11013,11 @@
           <a:bodyPr wrap="square" rtlCol="0" anchor="ctr"/>
           <a:lstStyle/>
           <a:p>
-            <a:pPr marL="0" indent="0" algn="l">
-              <a:buNone/>
-            </a:pPr>
-            <a:r>
-              <a:rPr lang="en-US" sz="2000" b="0" kern="0" spc="400" dirty="0" u="none">
+            <a:pPr marL="0" indent="0">
+              <a:buNone/>
+            </a:pPr>
+            <a:r>
+              <a:rPr lang="en-US" sz="1400" b="1" kern="0" spc="400" dirty="0">
                 <a:solidFill>
                   <a:srgbClr val="1C2B3A"/>
                 </a:solidFill>
@@ -11038,11 +11052,11 @@
           <a:bodyPr wrap="square" rtlCol="0" anchor="ctr"/>
           <a:lstStyle/>
           <a:p>
-            <a:pPr marL="0" indent="0" algn="l">
-              <a:buNone/>
-            </a:pPr>
-            <a:r>
-              <a:rPr lang="en-US" sz="2000" b="0" dirty="0" u="none">
+            <a:pPr marL="0" indent="0">
+              <a:buNone/>
+            </a:pPr>
+            <a:r>
+              <a:rPr lang="en-US" sz="4400" b="1" dirty="0">
                 <a:solidFill>
                   <a:srgbClr val="1C2B3A"/>
                 </a:solidFill>
@@ -11079,7 +11093,6 @@
           <a:bodyPr/>
           <a:lstStyle/>
           <a:p>
-            <a:pPr algn="l"/>
             <a:endParaRPr lang="fr-FR"/>
           </a:p>
         </p:txBody>
@@ -11105,7 +11118,7 @@
           <a:bodyPr wrap="square" rtlCol="0" anchor="ctr"/>
           <a:lstStyle/>
           <a:p>
-            <a:pPr marL="0" indent="0" algn="l">
+            <a:pPr marL="0" indent="0">
               <a:buNone/>
             </a:pPr>
             <a:endParaRPr lang="en-US" sz="1600" dirty="0"/>
@@ -11135,7 +11148,6 @@
           <a:bodyPr/>
           <a:lstStyle/>
           <a:p>
-            <a:pPr algn="l"/>
             <a:endParaRPr lang="fr-FR" dirty="0"/>
           </a:p>
         </p:txBody>
@@ -11161,11 +11173,11 @@
           <a:bodyPr wrap="square" lIns="0" tIns="0" rIns="0" bIns="0" rtlCol="0" anchor="ctr"/>
           <a:lstStyle/>
           <a:p>
-            <a:pPr marL="0" indent="0" algn="l">
-              <a:buNone/>
-            </a:pPr>
-            <a:r>
-              <a:rPr lang="en-US" sz="2000" dirty="0" b="0" u="none">
+            <a:pPr marL="0" indent="0" algn="r">
+              <a:buNone/>
+            </a:pPr>
+            <a:r>
+              <a:rPr lang="en-US" sz="900" dirty="0">
                 <a:solidFill>
                   <a:srgbClr val="1C2B3A"/>
                 </a:solidFill>
@@ -11187,8 +11199,8 @@
         </p:nvSpPr>
         <p:spPr>
           <a:xfrm>
-            <a:off x="556592" y="82584"/>
-            <a:ext cx="1751786" cy="36576"/>
+            <a:off x="0" y="0"/>
+            <a:ext cx="9144000" cy="76200"/>
           </a:xfrm>
           <a:prstGeom prst="rect">
             <a:avLst/>
@@ -11227,7 +11239,7 @@
   <p:clrMapOvr>
     <a:masterClrMapping/>
   </p:clrMapOvr>
-  <p:transition spd="med" dur="484">
+  <p:transition spd="med" dur="596">
     <p:fade/>
   </p:transition>
 </p:sld>
@@ -11286,7 +11298,6 @@
           <a:bodyPr/>
           <a:lstStyle/>
           <a:p>
-            <a:pPr algn="ctr"/>
             <a:endParaRPr lang="fr-FR"/>
           </a:p>
         </p:txBody>
@@ -11312,11 +11323,11 @@
           <a:bodyPr wrap="square" lIns="0" tIns="0" rIns="0" bIns="0" rtlCol="0" anchor="ctr"/>
           <a:lstStyle/>
           <a:p>
-            <a:pPr marL="0" indent="0" algn="ctr">
-              <a:buNone/>
-            </a:pPr>
-            <a:r>
-              <a:rPr lang="en-US" sz="2000" b="0" kern="0" spc="200" dirty="0" u="none">
+            <a:pPr marL="0" indent="0">
+              <a:buNone/>
+            </a:pPr>
+            <a:r>
+              <a:rPr lang="en-US" sz="1100" b="1" kern="0" spc="200" dirty="0">
                 <a:solidFill>
                   <a:srgbClr val="1C2B3A"/>
                 </a:solidFill>
@@ -11351,11 +11362,11 @@
           <a:bodyPr wrap="square" lIns="0" tIns="0" rIns="0" bIns="0" rtlCol="0" anchor="ctr"/>
           <a:lstStyle/>
           <a:p>
-            <a:pPr marL="0" indent="0" algn="ctr">
-              <a:buNone/>
-            </a:pPr>
-            <a:r>
-              <a:rPr lang="en-US" sz="2000" b="0" dirty="0" u="none">
+            <a:pPr marL="0" indent="0">
+              <a:buNone/>
+            </a:pPr>
+            <a:r>
+              <a:rPr lang="en-US" sz="2800" b="1" dirty="0">
                 <a:solidFill>
                   <a:srgbClr val="1C2B3A"/>
                 </a:solidFill>
@@ -11392,7 +11403,6 @@
           <a:bodyPr/>
           <a:lstStyle/>
           <a:p>
-            <a:pPr algn="ctr"/>
             <a:endParaRPr lang="fr-FR"/>
           </a:p>
         </p:txBody>
@@ -11420,7 +11430,6 @@
           <a:bodyPr/>
           <a:lstStyle/>
           <a:p>
-            <a:pPr algn="ctr"/>
             <a:endParaRPr lang="fr-FR"/>
           </a:p>
         </p:txBody>
@@ -11446,11 +11455,11 @@
           <a:bodyPr wrap="square" lIns="0" tIns="0" rIns="0" bIns="0" rtlCol="0" anchor="ctr"/>
           <a:lstStyle/>
           <a:p>
-            <a:pPr marL="0" indent="0" algn="ctr">
-              <a:buNone/>
-            </a:pPr>
-            <a:r>
-              <a:rPr lang="en-US" sz="2000" dirty="0" b="0" u="none">
+            <a:pPr marL="0" indent="0" algn="r">
+              <a:buNone/>
+            </a:pPr>
+            <a:r>
+              <a:rPr lang="en-US" sz="900" dirty="0">
                 <a:solidFill>
                   <a:srgbClr val="1C2B3A"/>
                 </a:solidFill>
@@ -11492,7 +11501,6 @@
           <a:bodyPr/>
           <a:lstStyle/>
           <a:p>
-            <a:pPr algn="ctr"/>
             <a:endParaRPr lang="fr-FR"/>
           </a:p>
         </p:txBody>
@@ -11525,7 +11533,6 @@
           <a:bodyPr/>
           <a:lstStyle/>
           <a:p>
-            <a:pPr algn="ctr"/>
             <a:endParaRPr lang="fr-FR"/>
           </a:p>
         </p:txBody>
@@ -11551,11 +11558,11 @@
           <a:bodyPr wrap="square" lIns="0" tIns="0" rIns="0" bIns="0" rtlCol="0" anchor="ctr"/>
           <a:lstStyle/>
           <a:p>
-            <a:pPr marL="0" indent="0" algn="ctr">
-              <a:buNone/>
-            </a:pPr>
-            <a:r>
-              <a:rPr lang="en-US" sz="2000" b="0" dirty="0" u="none">
+            <a:pPr marL="0" indent="0">
+              <a:buNone/>
+            </a:pPr>
+            <a:r>
+              <a:rPr lang="en-US" sz="1100" b="1" dirty="0">
                 <a:solidFill>
                   <a:srgbClr val="1C2B3A"/>
                 </a:solidFill>
@@ -11566,7 +11573,7 @@
               <a:t>Définition.  </a:t>
             </a:r>
             <a:r>
-              <a:rPr lang="en-US" sz="2000" dirty="0" b="0" u="none">
+              <a:rPr lang="en-US" sz="1100" dirty="0">
                 <a:solidFill>
                   <a:srgbClr val="1C2B3A"/>
                 </a:solidFill>
@@ -11577,7 +11584,7 @@
               <a:t>Le marketing mix désigne l'ensemble cohérent des décisions et actions marketing qu'une entreprise met en œuvre pour atteindre ses objectifs commerciaux sur un marché cible. Il traduit la stratégie marketing en leviers opérationnels articulés autour de variables </a:t>
             </a:r>
             <a:r>
-              <a:rPr lang="en-US" sz="2000" dirty="0" err="1" b="0" u="none">
+              <a:rPr lang="en-US" sz="1100" dirty="0" err="1">
                 <a:solidFill>
                   <a:srgbClr val="1C2B3A"/>
                 </a:solidFill>
@@ -11588,7 +11595,7 @@
               <a:t>interdépendantes</a:t>
             </a:r>
             <a:r>
-              <a:rPr lang="en-US" sz="2000" dirty="0" b="0" u="none">
+              <a:rPr lang="en-US" sz="1100" dirty="0">
                 <a:solidFill>
                   <a:srgbClr val="1C2B3A"/>
                 </a:solidFill>
@@ -11599,7 +11606,7 @@
               <a:t>. </a:t>
             </a:r>
             <a:r>
-              <a:rPr lang="en-US" sz="2000" dirty="0" err="1" b="0" u="none">
+              <a:rPr lang="en-US" sz="1100" dirty="0" err="1">
                 <a:solidFill>
                   <a:srgbClr val="1C2B3A"/>
                 </a:solidFill>
@@ -11610,7 +11617,7 @@
               <a:t>Historiquement</a:t>
             </a:r>
             <a:r>
-              <a:rPr lang="en-US" sz="2000" dirty="0" b="0" u="none">
+              <a:rPr lang="en-US" sz="1100" dirty="0">
                 <a:solidFill>
                   <a:srgbClr val="1C2B3A"/>
                 </a:solidFill>
@@ -11621,7 +11628,7 @@
               <a:t> les </a:t>
             </a:r>
             <a:r>
-              <a:rPr lang="en-US" sz="2000" b="0" dirty="0" u="none">
+              <a:rPr lang="en-US" sz="1100" b="1" dirty="0">
                 <a:solidFill>
                   <a:srgbClr val="1C2B3A"/>
                 </a:solidFill>
@@ -11632,7 +11639,7 @@
               <a:t>4P</a:t>
             </a:r>
             <a:r>
-              <a:rPr lang="en-US" sz="2000" dirty="0" b="0" u="none">
+              <a:rPr lang="en-US" sz="1100" dirty="0">
                 <a:solidFill>
                   <a:srgbClr val="1C2B3A"/>
                 </a:solidFill>
@@ -11643,7 +11650,7 @@
               <a:t> formalisés par E. Jerome McCarthy </a:t>
             </a:r>
             <a:r>
-              <a:rPr lang="en-US" sz="2000" dirty="0" err="1" b="0" u="none">
+              <a:rPr lang="en-US" sz="1100" dirty="0" err="1">
                 <a:solidFill>
                   <a:srgbClr val="1C2B3A"/>
                 </a:solidFill>
@@ -11654,7 +11661,7 @@
               <a:t>en</a:t>
             </a:r>
             <a:r>
-              <a:rPr lang="en-US" sz="2000" dirty="0" b="0" u="none">
+              <a:rPr lang="en-US" sz="1100" dirty="0">
                 <a:solidFill>
                   <a:srgbClr val="1C2B3A"/>
                 </a:solidFill>
@@ -11665,7 +11672,7 @@
               <a:t> 1960 </a:t>
             </a:r>
             <a:r>
-              <a:rPr lang="en-US" sz="2000" dirty="0" err="1" b="0" u="none">
+              <a:rPr lang="en-US" sz="1100" dirty="0" err="1">
                 <a:solidFill>
                   <a:srgbClr val="1C2B3A"/>
                 </a:solidFill>
@@ -11676,7 +11683,7 @@
               <a:t>ont</a:t>
             </a:r>
             <a:r>
-              <a:rPr lang="en-US" sz="2000" dirty="0" b="0" u="none">
+              <a:rPr lang="en-US" sz="1100" dirty="0">
                 <a:solidFill>
                   <a:srgbClr val="1C2B3A"/>
                 </a:solidFill>
@@ -11687,7 +11694,7 @@
               <a:t> </a:t>
             </a:r>
             <a:r>
-              <a:rPr lang="en-US" sz="2000" dirty="0" err="1" b="0" u="none">
+              <a:rPr lang="en-US" sz="1100" dirty="0" err="1">
                 <a:solidFill>
                   <a:srgbClr val="1C2B3A"/>
                 </a:solidFill>
@@ -11698,7 +11705,7 @@
               <a:t>été</a:t>
             </a:r>
             <a:r>
-              <a:rPr lang="en-US" sz="2000" dirty="0" b="0" u="none">
+              <a:rPr lang="en-US" sz="1100" dirty="0">
                 <a:solidFill>
                   <a:srgbClr val="1C2B3A"/>
                 </a:solidFill>
@@ -11709,7 +11716,7 @@
               <a:t> </a:t>
             </a:r>
             <a:r>
-              <a:rPr lang="en-US" sz="2000" dirty="0" err="1" b="0" u="none">
+              <a:rPr lang="en-US" sz="1100" dirty="0" err="1">
                 <a:solidFill>
                   <a:srgbClr val="1C2B3A"/>
                 </a:solidFill>
@@ -11720,7 +11727,7 @@
               <a:t>étendus</a:t>
             </a:r>
             <a:r>
-              <a:rPr lang="en-US" sz="2000" dirty="0" b="0" u="none">
+              <a:rPr lang="en-US" sz="1100" dirty="0">
                 <a:solidFill>
                   <a:srgbClr val="1C2B3A"/>
                 </a:solidFill>
@@ -11731,7 +11738,7 @@
               <a:t> aux </a:t>
             </a:r>
             <a:r>
-              <a:rPr lang="en-US" sz="2000" b="0" dirty="0" u="none">
+              <a:rPr lang="en-US" sz="1100" b="1" dirty="0">
                 <a:solidFill>
                   <a:srgbClr val="1C2B3A"/>
                 </a:solidFill>
@@ -11742,7 +11749,7 @@
               <a:t>7P</a:t>
             </a:r>
             <a:r>
-              <a:rPr lang="en-US" sz="2000" dirty="0" b="0" u="none">
+              <a:rPr lang="en-US" sz="1100" dirty="0">
                 <a:solidFill>
                   <a:srgbClr val="1C2B3A"/>
                 </a:solidFill>
@@ -11784,7 +11791,6 @@
           <a:bodyPr/>
           <a:lstStyle/>
           <a:p>
-            <a:pPr algn="ctr"/>
             <a:endParaRPr lang="fr-FR"/>
           </a:p>
         </p:txBody>
@@ -11817,7 +11823,6 @@
           <a:bodyPr/>
           <a:lstStyle/>
           <a:p>
-            <a:pPr algn="ctr"/>
             <a:endParaRPr lang="fr-FR"/>
           </a:p>
         </p:txBody>
@@ -11843,11 +11848,11 @@
           <a:bodyPr wrap="square" lIns="0" tIns="0" rIns="0" bIns="0" rtlCol="0" anchor="ctr"/>
           <a:lstStyle/>
           <a:p>
-            <a:pPr marL="0" indent="0" algn="ctr">
-              <a:buNone/>
-            </a:pPr>
-            <a:r>
-              <a:rPr lang="en-US" sz="2000" b="0" dirty="0" u="none">
+            <a:pPr marL="0" indent="0">
+              <a:buNone/>
+            </a:pPr>
+            <a:r>
+              <a:rPr lang="en-US" sz="1200" b="1" dirty="0">
                 <a:solidFill>
                   <a:srgbClr val="1C2B3A"/>
                 </a:solidFill>
@@ -11882,11 +11887,11 @@
           <a:bodyPr wrap="square" lIns="0" tIns="0" rIns="0" bIns="0" rtlCol="0" anchor="ctr"/>
           <a:lstStyle/>
           <a:p>
-            <a:pPr marL="0" indent="0" algn="ctr">
-              <a:buNone/>
-            </a:pPr>
-            <a:r>
-              <a:rPr lang="en-US" sz="2000" dirty="0" b="0" u="none">
+            <a:pPr marL="0" indent="0">
+              <a:buNone/>
+            </a:pPr>
+            <a:r>
+              <a:rPr lang="en-US" sz="1100" dirty="0">
                 <a:solidFill>
                   <a:srgbClr val="1C2B3A"/>
                 </a:solidFill>
@@ -11897,7 +11902,7 @@
               <a:t>Les variables doivent former un </a:t>
             </a:r>
             <a:r>
-              <a:rPr lang="en-US" sz="2000" dirty="0" err="1" b="0" u="none">
+              <a:rPr lang="en-US" sz="1100" dirty="0" err="1">
                 <a:solidFill>
                   <a:srgbClr val="1C2B3A"/>
                 </a:solidFill>
@@ -11908,7 +11913,7 @@
               <a:t>système</a:t>
             </a:r>
             <a:r>
-              <a:rPr lang="en-US" sz="2000" dirty="0" b="0" u="none">
+              <a:rPr lang="en-US" sz="1100" dirty="0">
                 <a:solidFill>
                   <a:srgbClr val="1C2B3A"/>
                 </a:solidFill>
@@ -11919,7 +11924,7 @@
               <a:t> </a:t>
             </a:r>
             <a:r>
-              <a:rPr lang="en-US" sz="2000" dirty="0" err="1" b="0" u="none">
+              <a:rPr lang="en-US" sz="1100" dirty="0" err="1">
                 <a:solidFill>
                   <a:srgbClr val="1C2B3A"/>
                 </a:solidFill>
@@ -11930,7 +11935,7 @@
               <a:t>harmonisé</a:t>
             </a:r>
             <a:r>
-              <a:rPr lang="en-US" sz="2000" dirty="0" b="0" u="none">
+              <a:rPr lang="en-US" sz="1100" dirty="0">
                 <a:solidFill>
                   <a:srgbClr val="1C2B3A"/>
                 </a:solidFill>
@@ -11972,7 +11977,6 @@
           <a:bodyPr/>
           <a:lstStyle/>
           <a:p>
-            <a:pPr algn="ctr"/>
             <a:endParaRPr lang="fr-FR"/>
           </a:p>
         </p:txBody>
@@ -12005,7 +12009,6 @@
           <a:bodyPr/>
           <a:lstStyle/>
           <a:p>
-            <a:pPr algn="ctr"/>
             <a:endParaRPr lang="fr-FR"/>
           </a:p>
         </p:txBody>
@@ -12031,11 +12034,11 @@
           <a:bodyPr wrap="square" lIns="0" tIns="0" rIns="0" bIns="0" rtlCol="0" anchor="ctr"/>
           <a:lstStyle/>
           <a:p>
-            <a:pPr marL="0" indent="0" algn="ctr">
-              <a:buNone/>
-            </a:pPr>
-            <a:r>
-              <a:rPr lang="en-US" sz="2000" b="0" dirty="0" u="none">
+            <a:pPr marL="0" indent="0">
+              <a:buNone/>
+            </a:pPr>
+            <a:r>
+              <a:rPr lang="en-US" sz="1200" b="1" dirty="0">
                 <a:solidFill>
                   <a:srgbClr val="1C2B3A"/>
                 </a:solidFill>
@@ -12070,11 +12073,11 @@
           <a:bodyPr wrap="square" lIns="0" tIns="0" rIns="0" bIns="0" rtlCol="0" anchor="ctr"/>
           <a:lstStyle/>
           <a:p>
-            <a:pPr marL="0" indent="0" algn="ctr">
-              <a:buNone/>
-            </a:pPr>
-            <a:r>
-              <a:rPr lang="en-US" sz="2000" dirty="0" b="0" u="none">
+            <a:pPr marL="0" indent="0">
+              <a:buNone/>
+            </a:pPr>
+            <a:r>
+              <a:rPr lang="en-US" sz="1100" dirty="0">
                 <a:solidFill>
                   <a:srgbClr val="1C2B3A"/>
                 </a:solidFill>
@@ -12116,7 +12119,6 @@
           <a:bodyPr/>
           <a:lstStyle/>
           <a:p>
-            <a:pPr algn="ctr"/>
             <a:endParaRPr lang="fr-FR"/>
           </a:p>
         </p:txBody>
@@ -12149,7 +12151,6 @@
           <a:bodyPr/>
           <a:lstStyle/>
           <a:p>
-            <a:pPr algn="ctr"/>
             <a:endParaRPr lang="fr-FR"/>
           </a:p>
         </p:txBody>
@@ -12175,11 +12176,11 @@
           <a:bodyPr wrap="square" lIns="0" tIns="0" rIns="0" bIns="0" rtlCol="0" anchor="ctr"/>
           <a:lstStyle/>
           <a:p>
-            <a:pPr marL="0" indent="0" algn="ctr">
-              <a:buNone/>
-            </a:pPr>
-            <a:r>
-              <a:rPr lang="en-US" sz="2000" b="0" dirty="0" u="none">
+            <a:pPr marL="0" indent="0">
+              <a:buNone/>
+            </a:pPr>
+            <a:r>
+              <a:rPr lang="en-US" sz="1200" b="1" dirty="0">
                 <a:solidFill>
                   <a:srgbClr val="1C2B3A"/>
                 </a:solidFill>
@@ -12214,11 +12215,11 @@
           <a:bodyPr wrap="square" lIns="0" tIns="0" rIns="0" bIns="0" rtlCol="0" anchor="ctr"/>
           <a:lstStyle/>
           <a:p>
-            <a:pPr marL="0" indent="0" algn="ctr">
-              <a:buNone/>
-            </a:pPr>
-            <a:r>
-              <a:rPr lang="en-US" sz="2000" dirty="0" b="0" u="none">
+            <a:pPr marL="0" indent="0">
+              <a:buNone/>
+            </a:pPr>
+            <a:r>
+              <a:rPr lang="en-US" sz="1100" dirty="0">
                 <a:solidFill>
                   <a:srgbClr val="1C2B3A"/>
                 </a:solidFill>
@@ -12240,8 +12241,8 @@
         </p:nvSpPr>
         <p:spPr>
           <a:xfrm>
-            <a:off x="583806" y="109656"/>
-            <a:ext cx="1506098" cy="36576"/>
+            <a:off x="0" y="0"/>
+            <a:ext cx="9144000" cy="76200"/>
           </a:xfrm>
           <a:prstGeom prst="rect">
             <a:avLst/>
@@ -12280,7 +12281,7 @@
   <p:clrMapOvr>
     <a:masterClrMapping/>
   </p:clrMapOvr>
-  <p:transition spd="med" dur="522">
+  <p:transition spd="med" dur="525">
     <p:fade/>
   </p:transition>
 </p:sld>
@@ -12339,7 +12340,6 @@
           <a:bodyPr/>
           <a:lstStyle/>
           <a:p>
-            <a:pPr algn="l"/>
             <a:endParaRPr lang="fr-FR"/>
           </a:p>
         </p:txBody>
@@ -12365,11 +12365,11 @@
           <a:bodyPr wrap="square" lIns="0" tIns="0" rIns="0" bIns="0" rtlCol="0" anchor="ctr"/>
           <a:lstStyle/>
           <a:p>
-            <a:pPr marL="0" indent="0" algn="l">
-              <a:buNone/>
-            </a:pPr>
-            <a:r>
-              <a:rPr lang="en-US" sz="2000" b="0" kern="0" spc="200" dirty="0" u="none">
+            <a:pPr marL="0" indent="0">
+              <a:buNone/>
+            </a:pPr>
+            <a:r>
+              <a:rPr lang="en-US" sz="1100" b="1" kern="0" spc="200" dirty="0">
                 <a:solidFill>
                   <a:srgbClr val="1C2B3A"/>
                 </a:solidFill>
@@ -12404,11 +12404,11 @@
           <a:bodyPr wrap="square" lIns="0" tIns="0" rIns="0" bIns="0" rtlCol="0" anchor="ctr"/>
           <a:lstStyle/>
           <a:p>
-            <a:pPr marL="0" indent="0" algn="l">
-              <a:buNone/>
-            </a:pPr>
-            <a:r>
-              <a:rPr lang="en-US" sz="2000" b="0" dirty="0" u="none">
+            <a:pPr marL="0" indent="0">
+              <a:buNone/>
+            </a:pPr>
+            <a:r>
+              <a:rPr lang="en-US" sz="2800" b="1" dirty="0">
                 <a:solidFill>
                   <a:srgbClr val="1C2B3A"/>
                 </a:solidFill>
@@ -12445,7 +12445,6 @@
           <a:bodyPr/>
           <a:lstStyle/>
           <a:p>
-            <a:pPr algn="l"/>
             <a:endParaRPr lang="fr-FR"/>
           </a:p>
         </p:txBody>
@@ -12473,7 +12472,6 @@
           <a:bodyPr/>
           <a:lstStyle/>
           <a:p>
-            <a:pPr algn="l"/>
             <a:endParaRPr lang="fr-FR"/>
           </a:p>
         </p:txBody>
@@ -12499,11 +12497,11 @@
           <a:bodyPr wrap="square" lIns="0" tIns="0" rIns="0" bIns="0" rtlCol="0" anchor="ctr"/>
           <a:lstStyle/>
           <a:p>
-            <a:pPr marL="0" indent="0" algn="l">
-              <a:buNone/>
-            </a:pPr>
-            <a:r>
-              <a:rPr lang="en-US" sz="2000" dirty="0" b="0" u="none">
+            <a:pPr marL="0" indent="0" algn="r">
+              <a:buNone/>
+            </a:pPr>
+            <a:r>
+              <a:rPr lang="en-US" sz="900" dirty="0">
                 <a:solidFill>
                   <a:srgbClr val="1C2B3A"/>
                 </a:solidFill>
@@ -12538,11 +12536,11 @@
           <a:bodyPr wrap="square" lIns="0" tIns="0" rIns="0" bIns="0" rtlCol="0" anchor="ctr"/>
           <a:lstStyle/>
           <a:p>
-            <a:pPr marL="0" indent="0" algn="l">
-              <a:buNone/>
-            </a:pPr>
-            <a:r>
-              <a:rPr lang="en-US" sz="2000" i="1" dirty="0" b="0" u="none">
+            <a:pPr marL="0" indent="0">
+              <a:buNone/>
+            </a:pPr>
+            <a:r>
+              <a:rPr lang="en-US" sz="1100" i="1" dirty="0">
                 <a:solidFill>
                   <a:srgbClr val="1C2B3A"/>
                 </a:solidFill>
@@ -12584,7 +12582,6 @@
           <a:bodyPr/>
           <a:lstStyle/>
           <a:p>
-            <a:pPr algn="l"/>
             <a:endParaRPr lang="fr-FR"/>
           </a:p>
         </p:txBody>
@@ -12617,7 +12614,6 @@
           <a:bodyPr/>
           <a:lstStyle/>
           <a:p>
-            <a:pPr algn="l"/>
             <a:endParaRPr lang="fr-FR"/>
           </a:p>
         </p:txBody>
@@ -12643,11 +12639,11 @@
           <a:bodyPr wrap="square" lIns="0" tIns="0" rIns="0" bIns="0" rtlCol="0" anchor="ctr"/>
           <a:lstStyle/>
           <a:p>
-            <a:pPr marL="0" indent="0" algn="l">
-              <a:buNone/>
-            </a:pPr>
-            <a:r>
-              <a:rPr lang="en-US" sz="2000" b="0" dirty="0" u="none">
+            <a:pPr marL="0" indent="0" algn="ctr">
+              <a:buNone/>
+            </a:pPr>
+            <a:r>
+              <a:rPr lang="en-US" sz="2400" b="1" dirty="0">
                 <a:solidFill>
                   <a:srgbClr val="1C2B3A"/>
                 </a:solidFill>
@@ -12682,11 +12678,11 @@
           <a:bodyPr wrap="square" lIns="0" tIns="0" rIns="0" bIns="0" rtlCol="0" anchor="ctr"/>
           <a:lstStyle/>
           <a:p>
-            <a:pPr marL="0" indent="0" algn="l">
-              <a:buNone/>
-            </a:pPr>
-            <a:r>
-              <a:rPr lang="en-US" sz="2000" b="0" dirty="0" u="none">
+            <a:pPr marL="0" indent="0">
+              <a:buNone/>
+            </a:pPr>
+            <a:r>
+              <a:rPr lang="en-US" sz="1300" b="1" dirty="0">
                 <a:solidFill>
                   <a:srgbClr val="1C2B3A"/>
                 </a:solidFill>
@@ -12721,11 +12717,11 @@
           <a:bodyPr wrap="square" lIns="0" tIns="0" rIns="0" bIns="0" rtlCol="0" anchor="ctr"/>
           <a:lstStyle/>
           <a:p>
-            <a:pPr marL="0" indent="0" algn="l">
-              <a:buNone/>
-            </a:pPr>
-            <a:r>
-              <a:rPr lang="en-US" sz="2000" dirty="0" b="0" u="none">
+            <a:pPr marL="0" indent="0">
+              <a:buNone/>
+            </a:pPr>
+            <a:r>
+              <a:rPr lang="en-US" sz="950" dirty="0">
                 <a:solidFill>
                   <a:srgbClr val="1C2B3A"/>
                 </a:solidFill>
@@ -12767,7 +12763,6 @@
           <a:bodyPr/>
           <a:lstStyle/>
           <a:p>
-            <a:pPr algn="l"/>
             <a:endParaRPr lang="fr-FR"/>
           </a:p>
         </p:txBody>
@@ -12800,7 +12795,6 @@
           <a:bodyPr/>
           <a:lstStyle/>
           <a:p>
-            <a:pPr algn="l"/>
             <a:endParaRPr lang="fr-FR"/>
           </a:p>
         </p:txBody>
@@ -12826,11 +12820,11 @@
           <a:bodyPr wrap="square" lIns="0" tIns="0" rIns="0" bIns="0" rtlCol="0" anchor="ctr"/>
           <a:lstStyle/>
           <a:p>
-            <a:pPr marL="0" indent="0" algn="l">
-              <a:buNone/>
-            </a:pPr>
-            <a:r>
-              <a:rPr lang="en-US" sz="2000" b="0" dirty="0" u="none">
+            <a:pPr marL="0" indent="0" algn="ctr">
+              <a:buNone/>
+            </a:pPr>
+            <a:r>
+              <a:rPr lang="en-US" sz="2400" b="1" dirty="0">
                 <a:solidFill>
                   <a:srgbClr val="1C2B3A"/>
                 </a:solidFill>
@@ -12865,11 +12859,11 @@
           <a:bodyPr wrap="square" lIns="0" tIns="0" rIns="0" bIns="0" rtlCol="0" anchor="ctr"/>
           <a:lstStyle/>
           <a:p>
-            <a:pPr marL="0" indent="0" algn="l">
-              <a:buNone/>
-            </a:pPr>
-            <a:r>
-              <a:rPr lang="en-US" sz="2000" b="0" dirty="0" u="none">
+            <a:pPr marL="0" indent="0">
+              <a:buNone/>
+            </a:pPr>
+            <a:r>
+              <a:rPr lang="en-US" sz="1300" b="1" dirty="0">
                 <a:solidFill>
                   <a:srgbClr val="1C2B3A"/>
                 </a:solidFill>
@@ -12904,11 +12898,11 @@
           <a:bodyPr wrap="square" lIns="0" tIns="0" rIns="0" bIns="0" rtlCol="0" anchor="ctr"/>
           <a:lstStyle/>
           <a:p>
-            <a:pPr marL="0" indent="0" algn="l">
-              <a:buNone/>
-            </a:pPr>
-            <a:r>
-              <a:rPr lang="en-US" sz="2000" dirty="0" b="0" u="none">
+            <a:pPr marL="0" indent="0">
+              <a:buNone/>
+            </a:pPr>
+            <a:r>
+              <a:rPr lang="en-US" sz="950" dirty="0">
                 <a:solidFill>
                   <a:srgbClr val="1C2B3A"/>
                 </a:solidFill>
@@ -12950,7 +12944,6 @@
           <a:bodyPr/>
           <a:lstStyle/>
           <a:p>
-            <a:pPr algn="l"/>
             <a:endParaRPr lang="fr-FR"/>
           </a:p>
         </p:txBody>
@@ -12983,7 +12976,6 @@
           <a:bodyPr/>
           <a:lstStyle/>
           <a:p>
-            <a:pPr algn="l"/>
             <a:endParaRPr lang="fr-FR"/>
           </a:p>
         </p:txBody>
@@ -13009,11 +13001,11 @@
           <a:bodyPr wrap="square" lIns="0" tIns="0" rIns="0" bIns="0" rtlCol="0" anchor="ctr"/>
           <a:lstStyle/>
           <a:p>
-            <a:pPr marL="0" indent="0" algn="l">
-              <a:buNone/>
-            </a:pPr>
-            <a:r>
-              <a:rPr lang="en-US" sz="2000" b="0" dirty="0" u="none">
+            <a:pPr marL="0" indent="0" algn="ctr">
+              <a:buNone/>
+            </a:pPr>
+            <a:r>
+              <a:rPr lang="en-US" sz="2400" b="1" dirty="0">
                 <a:solidFill>
                   <a:srgbClr val="1C2B3A"/>
                 </a:solidFill>
@@ -13048,11 +13040,11 @@
           <a:bodyPr wrap="square" lIns="0" tIns="0" rIns="0" bIns="0" rtlCol="0" anchor="ctr"/>
           <a:lstStyle/>
           <a:p>
-            <a:pPr marL="0" indent="0" algn="l">
-              <a:buNone/>
-            </a:pPr>
-            <a:r>
-              <a:rPr lang="en-US" sz="2000" b="0" dirty="0" u="none">
+            <a:pPr marL="0" indent="0">
+              <a:buNone/>
+            </a:pPr>
+            <a:r>
+              <a:rPr lang="en-US" sz="1300" b="1" dirty="0">
                 <a:solidFill>
                   <a:srgbClr val="1C2B3A"/>
                 </a:solidFill>
@@ -13087,11 +13079,11 @@
           <a:bodyPr wrap="square" lIns="0" tIns="0" rIns="0" bIns="0" rtlCol="0" anchor="ctr"/>
           <a:lstStyle/>
           <a:p>
-            <a:pPr marL="0" indent="0" algn="l">
-              <a:buNone/>
-            </a:pPr>
-            <a:r>
-              <a:rPr lang="en-US" sz="2000" dirty="0" b="0" u="none">
+            <a:pPr marL="0" indent="0">
+              <a:buNone/>
+            </a:pPr>
+            <a:r>
+              <a:rPr lang="en-US" sz="950" dirty="0">
                 <a:solidFill>
                   <a:srgbClr val="1C2B3A"/>
                 </a:solidFill>
@@ -13133,7 +13125,6 @@
           <a:bodyPr/>
           <a:lstStyle/>
           <a:p>
-            <a:pPr algn="l"/>
             <a:endParaRPr lang="fr-FR"/>
           </a:p>
         </p:txBody>
@@ -13166,7 +13157,6 @@
           <a:bodyPr/>
           <a:lstStyle/>
           <a:p>
-            <a:pPr algn="l"/>
             <a:endParaRPr lang="fr-FR"/>
           </a:p>
         </p:txBody>
@@ -13192,11 +13182,11 @@
           <a:bodyPr wrap="square" lIns="0" tIns="0" rIns="0" bIns="0" rtlCol="0" anchor="ctr"/>
           <a:lstStyle/>
           <a:p>
-            <a:pPr marL="0" indent="0" algn="l">
-              <a:buNone/>
-            </a:pPr>
-            <a:r>
-              <a:rPr lang="en-US" sz="2000" b="0" dirty="0" u="none">
+            <a:pPr marL="0" indent="0" algn="ctr">
+              <a:buNone/>
+            </a:pPr>
+            <a:r>
+              <a:rPr lang="en-US" sz="2400" b="1" dirty="0">
                 <a:solidFill>
                   <a:srgbClr val="1C2B3A"/>
                 </a:solidFill>
@@ -13231,11 +13221,11 @@
           <a:bodyPr wrap="square" lIns="0" tIns="0" rIns="0" bIns="0" rtlCol="0" anchor="ctr"/>
           <a:lstStyle/>
           <a:p>
-            <a:pPr marL="0" indent="0" algn="l">
-              <a:buNone/>
-            </a:pPr>
-            <a:r>
-              <a:rPr lang="en-US" sz="2000" b="0" dirty="0" u="none">
+            <a:pPr marL="0" indent="0">
+              <a:buNone/>
+            </a:pPr>
+            <a:r>
+              <a:rPr lang="en-US" sz="1300" b="1" dirty="0">
                 <a:solidFill>
                   <a:srgbClr val="1C2B3A"/>
                 </a:solidFill>
@@ -13270,11 +13260,11 @@
           <a:bodyPr wrap="square" lIns="0" tIns="0" rIns="0" bIns="0" rtlCol="0" anchor="ctr"/>
           <a:lstStyle/>
           <a:p>
-            <a:pPr marL="0" indent="0" algn="l">
-              <a:buNone/>
-            </a:pPr>
-            <a:r>
-              <a:rPr lang="en-US" sz="2000" dirty="0" b="0" u="none">
+            <a:pPr marL="0" indent="0">
+              <a:buNone/>
+            </a:pPr>
+            <a:r>
+              <a:rPr lang="en-US" sz="950" dirty="0">
                 <a:solidFill>
                   <a:srgbClr val="1C2B3A"/>
                 </a:solidFill>
@@ -13285,6 +13275,49 @@
               <a:t>Publicité, promotion des ventes, RP, marketing digital, force de vente. Comment l'entreprise fait connaître et désirer son offre.</a:t>
             </a:r>
             <a:endParaRPr lang="en-US" sz="950" dirty="0"/>
+          </a:p>
+        </p:txBody>
+      </p:sp>
+      <p:sp>
+        <p:nvSpPr>
+          <p:cNvPr id="30" name="Rectangle 29"/>
+          <p:cNvSpPr/>
+          <p:nvPr/>
+        </p:nvSpPr>
+        <p:spPr>
+          <a:xfrm>
+            <a:off x="0" y="0"/>
+            <a:ext cx="9144000" cy="76200"/>
+          </a:xfrm>
+          <a:prstGeom prst="rect">
+            <a:avLst/>
+          </a:prstGeom>
+          <a:solidFill>
+            <a:srgbClr val="C8A84B"/>
+          </a:solidFill>
+          <a:ln>
+            <a:noFill/>
+          </a:ln>
+        </p:spPr>
+        <p:style>
+          <a:lnRef idx="1">
+            <a:schemeClr val="accent1"/>
+          </a:lnRef>
+          <a:fillRef idx="3">
+            <a:schemeClr val="accent1"/>
+          </a:fillRef>
+          <a:effectRef idx="2">
+            <a:schemeClr val="accent1"/>
+          </a:effectRef>
+          <a:fontRef idx="minor">
+            <a:schemeClr val="lt1"/>
+          </a:fontRef>
+        </p:style>
+        <p:txBody>
+          <a:bodyPr rtlCol="0" anchor="ctr"/>
+          <a:lstStyle/>
+          <a:p>
+            <a:pPr algn="ctr"/>
           </a:p>
         </p:txBody>
       </p:sp>
@@ -13349,7 +13382,6 @@
           <a:bodyPr/>
           <a:lstStyle/>
           <a:p>
-            <a:pPr algn="l"/>
             <a:endParaRPr lang="fr-FR"/>
           </a:p>
         </p:txBody>
@@ -13375,11 +13407,11 @@
           <a:bodyPr wrap="square" lIns="0" tIns="0" rIns="0" bIns="0" rtlCol="0" anchor="ctr"/>
           <a:lstStyle/>
           <a:p>
-            <a:pPr marL="0" indent="0" algn="l">
-              <a:buNone/>
-            </a:pPr>
-            <a:r>
-              <a:rPr lang="en-US" sz="2000" b="0" kern="0" spc="200" dirty="0" u="none">
+            <a:pPr marL="0" indent="0">
+              <a:buNone/>
+            </a:pPr>
+            <a:r>
+              <a:rPr lang="en-US" sz="1100" b="1" kern="0" spc="200" dirty="0">
                 <a:solidFill>
                   <a:srgbClr val="1C2B3A"/>
                 </a:solidFill>
@@ -13414,11 +13446,11 @@
           <a:bodyPr wrap="square" lIns="0" tIns="0" rIns="0" bIns="0" rtlCol="0" anchor="ctr"/>
           <a:lstStyle/>
           <a:p>
-            <a:pPr marL="0" indent="0" algn="l">
-              <a:buNone/>
-            </a:pPr>
-            <a:r>
-              <a:rPr lang="en-US" sz="2000" b="0" dirty="0" u="none">
+            <a:pPr marL="0" indent="0">
+              <a:buNone/>
+            </a:pPr>
+            <a:r>
+              <a:rPr lang="en-US" sz="2800" b="1" dirty="0">
                 <a:solidFill>
                   <a:srgbClr val="1C2B3A"/>
                 </a:solidFill>
@@ -13455,7 +13487,6 @@
           <a:bodyPr/>
           <a:lstStyle/>
           <a:p>
-            <a:pPr algn="l"/>
             <a:endParaRPr lang="fr-FR"/>
           </a:p>
         </p:txBody>
@@ -13483,7 +13514,6 @@
           <a:bodyPr/>
           <a:lstStyle/>
           <a:p>
-            <a:pPr algn="l"/>
             <a:endParaRPr lang="fr-FR"/>
           </a:p>
         </p:txBody>
@@ -13509,11 +13539,11 @@
           <a:bodyPr wrap="square" lIns="0" tIns="0" rIns="0" bIns="0" rtlCol="0" anchor="ctr"/>
           <a:lstStyle/>
           <a:p>
-            <a:pPr marL="0" indent="0" algn="l">
-              <a:buNone/>
-            </a:pPr>
-            <a:r>
-              <a:rPr lang="en-US" sz="2000" dirty="0" b="0" u="none">
+            <a:pPr marL="0" indent="0" algn="r">
+              <a:buNone/>
+            </a:pPr>
+            <a:r>
+              <a:rPr lang="en-US" sz="900" dirty="0">
                 <a:solidFill>
                   <a:srgbClr val="1C2B3A"/>
                 </a:solidFill>
@@ -13548,11 +13578,11 @@
           <a:bodyPr wrap="square" lIns="0" tIns="0" rIns="0" bIns="0" rtlCol="0" anchor="ctr"/>
           <a:lstStyle/>
           <a:p>
-            <a:pPr marL="0" indent="0" algn="l">
-              <a:buNone/>
-            </a:pPr>
-            <a:r>
-              <a:rPr lang="en-US" sz="2000" i="1" dirty="0" b="0" u="none">
+            <a:pPr marL="0" indent="0">
+              <a:buNone/>
+            </a:pPr>
+            <a:r>
+              <a:rPr lang="en-US" sz="1100" i="1" dirty="0">
                 <a:solidFill>
                   <a:srgbClr val="1C2B3A"/>
                 </a:solidFill>
@@ -13563,7 +13593,7 @@
               <a:t>Booms &amp; Bitner (1981) ajoutent trois P pour les activités de service </a:t>
             </a:r>
             <a:r>
-              <a:rPr lang="en-US" sz="2000" i="1" dirty="0" err="1" b="0" u="none">
+              <a:rPr lang="en-US" sz="1100" i="1" dirty="0" err="1">
                 <a:solidFill>
                   <a:srgbClr val="1C2B3A"/>
                 </a:solidFill>
@@ -13574,7 +13604,7 @@
               <a:t>ce</a:t>
             </a:r>
             <a:r>
-              <a:rPr lang="en-US" sz="2000" i="1" dirty="0" b="0" u="none">
+              <a:rPr lang="en-US" sz="1100" i="1" dirty="0">
                 <a:solidFill>
                   <a:srgbClr val="1C2B3A"/>
                 </a:solidFill>
@@ -13585,7 +13615,7 @@
               <a:t> qui est </a:t>
             </a:r>
             <a:r>
-              <a:rPr lang="en-US" sz="2000" i="1" dirty="0" err="1" b="0" u="none">
+              <a:rPr lang="en-US" sz="1100" i="1" dirty="0" err="1">
                 <a:solidFill>
                   <a:srgbClr val="1C2B3A"/>
                 </a:solidFill>
@@ -13596,7 +13626,7 @@
               <a:t>particulièrement</a:t>
             </a:r>
             <a:r>
-              <a:rPr lang="en-US" sz="2000" i="1" dirty="0" b="0" u="none">
+              <a:rPr lang="en-US" sz="1100" i="1" dirty="0">
                 <a:solidFill>
                   <a:srgbClr val="1C2B3A"/>
                 </a:solidFill>
@@ -13638,7 +13668,6 @@
           <a:bodyPr/>
           <a:lstStyle/>
           <a:p>
-            <a:pPr algn="l"/>
             <a:endParaRPr lang="fr-FR"/>
           </a:p>
         </p:txBody>
@@ -13664,11 +13693,11 @@
           <a:bodyPr wrap="square" lIns="0" tIns="0" rIns="0" bIns="0" rtlCol="0" anchor="ctr"/>
           <a:lstStyle/>
           <a:p>
-            <a:pPr marL="0" indent="0" algn="l">
-              <a:buNone/>
-            </a:pPr>
-            <a:r>
-              <a:rPr lang="en-US" sz="2000" b="0" dirty="0" u="none">
+            <a:pPr marL="0" indent="0">
+              <a:buNone/>
+            </a:pPr>
+            <a:r>
+              <a:rPr lang="en-US" sz="1300" b="1" dirty="0">
                 <a:solidFill>
                   <a:srgbClr val="1C2B3A"/>
                 </a:solidFill>
@@ -13705,7 +13734,6 @@
           <a:bodyPr/>
           <a:lstStyle/>
           <a:p>
-            <a:pPr algn="l"/>
             <a:endParaRPr lang="fr-FR"/>
           </a:p>
         </p:txBody>
@@ -13731,14 +13759,14 @@
           <a:bodyPr wrap="square" lIns="0" tIns="0" rIns="0" bIns="0" rtlCol="0" anchor="ctr"/>
           <a:lstStyle/>
           <a:p>
-            <a:pPr marL="0" indent="0" algn="l">
+            <a:pPr marL="0" indent="0">
               <a:spcAft>
                 <a:spcPts val="300"/>
               </a:spcAft>
               <a:buNone/>
             </a:pPr>
             <a:r>
-              <a:rPr lang="en-US" sz="2000" b="0" dirty="0" u="none">
+              <a:rPr lang="en-US" sz="1000" b="1" dirty="0">
                 <a:solidFill>
                   <a:srgbClr val="1C2B3A"/>
                 </a:solidFill>
@@ -13751,14 +13779,14 @@
             <a:endParaRPr lang="en-US" sz="1000" dirty="0"/>
           </a:p>
           <a:p>
-            <a:pPr marL="0" indent="0" algn="l">
+            <a:pPr marL="0" indent="0">
               <a:spcAft>
                 <a:spcPts val="300"/>
               </a:spcAft>
               <a:buNone/>
             </a:pPr>
             <a:r>
-              <a:rPr lang="en-US" sz="2000" dirty="0" b="0" u="none">
+              <a:rPr lang="en-US" sz="1000" dirty="0">
                 <a:solidFill>
                   <a:srgbClr val="1C2B3A"/>
                 </a:solidFill>
@@ -13771,14 +13799,14 @@
             <a:endParaRPr lang="en-US" sz="1000" dirty="0"/>
           </a:p>
           <a:p>
-            <a:pPr marL="0" indent="0" algn="l">
+            <a:pPr marL="0" indent="0">
               <a:spcAft>
                 <a:spcPts val="300"/>
               </a:spcAft>
               <a:buNone/>
             </a:pPr>
             <a:r>
-              <a:rPr lang="en-US" sz="2000" b="0" dirty="0" u="none">
+              <a:rPr lang="en-US" sz="1000" b="1" dirty="0">
                 <a:solidFill>
                   <a:srgbClr val="1C2B3A"/>
                 </a:solidFill>
@@ -13791,14 +13819,14 @@
             <a:endParaRPr lang="en-US" sz="1000" dirty="0"/>
           </a:p>
           <a:p>
-            <a:pPr marL="0" indent="0" algn="l">
+            <a:pPr marL="0" indent="0">
               <a:spcAft>
                 <a:spcPts val="300"/>
               </a:spcAft>
               <a:buNone/>
             </a:pPr>
             <a:r>
-              <a:rPr lang="en-US" sz="2000" dirty="0" b="0" u="none">
+              <a:rPr lang="en-US" sz="1000" dirty="0">
                 <a:solidFill>
                   <a:srgbClr val="1C2B3A"/>
                 </a:solidFill>
@@ -13811,14 +13839,14 @@
             <a:endParaRPr lang="en-US" sz="1000" dirty="0"/>
           </a:p>
           <a:p>
-            <a:pPr marL="0" indent="0" algn="l">
+            <a:pPr marL="0" indent="0">
               <a:spcAft>
                 <a:spcPts val="300"/>
               </a:spcAft>
               <a:buNone/>
             </a:pPr>
             <a:r>
-              <a:rPr lang="en-US" sz="2000" b="0" dirty="0" u="none">
+              <a:rPr lang="en-US" sz="1000" b="1" dirty="0">
                 <a:solidFill>
                   <a:srgbClr val="1C2B3A"/>
                 </a:solidFill>
@@ -13831,14 +13859,14 @@
             <a:endParaRPr lang="en-US" sz="1000" dirty="0"/>
           </a:p>
           <a:p>
-            <a:pPr marL="0" indent="0" algn="l">
+            <a:pPr marL="0" indent="0">
               <a:spcAft>
                 <a:spcPts val="300"/>
               </a:spcAft>
               <a:buNone/>
             </a:pPr>
             <a:r>
-              <a:rPr lang="en-US" sz="2000" dirty="0" b="0" u="none">
+              <a:rPr lang="en-US" sz="1000" dirty="0">
                 <a:solidFill>
                   <a:srgbClr val="1C2B3A"/>
                 </a:solidFill>
@@ -13851,14 +13879,14 @@
             <a:endParaRPr lang="en-US" sz="1000" dirty="0"/>
           </a:p>
           <a:p>
-            <a:pPr marL="0" indent="0" algn="l">
+            <a:pPr marL="0" indent="0">
               <a:spcAft>
                 <a:spcPts val="300"/>
               </a:spcAft>
               <a:buNone/>
             </a:pPr>
             <a:r>
-              <a:rPr lang="en-US" sz="2000" b="0" dirty="0" u="none">
+              <a:rPr lang="en-US" sz="1000" b="1" dirty="0">
                 <a:solidFill>
                   <a:srgbClr val="1C2B3A"/>
                 </a:solidFill>
@@ -13871,14 +13899,14 @@
             <a:endParaRPr lang="en-US" sz="1000" dirty="0"/>
           </a:p>
           <a:p>
-            <a:pPr marL="0" indent="0" algn="l">
+            <a:pPr marL="0" indent="0">
               <a:spcAft>
                 <a:spcPts val="300"/>
               </a:spcAft>
               <a:buNone/>
             </a:pPr>
             <a:r>
-              <a:rPr lang="en-US" sz="2000" dirty="0" b="0" u="none">
+              <a:rPr lang="en-US" sz="1000" dirty="0">
                 <a:solidFill>
                   <a:srgbClr val="1C2B3A"/>
                 </a:solidFill>
@@ -13920,7 +13948,6 @@
           <a:bodyPr/>
           <a:lstStyle/>
           <a:p>
-            <a:pPr algn="l"/>
             <a:endParaRPr lang="fr-FR"/>
           </a:p>
         </p:txBody>
@@ -13946,11 +13973,11 @@
           <a:bodyPr wrap="square" lIns="0" tIns="0" rIns="0" bIns="0" rtlCol="0" anchor="ctr"/>
           <a:lstStyle/>
           <a:p>
-            <a:pPr marL="0" indent="0" algn="l">
-              <a:buNone/>
-            </a:pPr>
-            <a:r>
-              <a:rPr lang="en-US" sz="2000" b="0" dirty="0" u="none">
+            <a:pPr marL="0" indent="0">
+              <a:buNone/>
+            </a:pPr>
+            <a:r>
+              <a:rPr lang="en-US" sz="1300" b="1" dirty="0">
                 <a:solidFill>
                   <a:srgbClr val="1C2B3A"/>
                 </a:solidFill>
@@ -13987,7 +14014,6 @@
           <a:bodyPr/>
           <a:lstStyle/>
           <a:p>
-            <a:pPr algn="l"/>
             <a:endParaRPr lang="fr-FR"/>
           </a:p>
         </p:txBody>
@@ -14013,14 +14039,14 @@
           <a:bodyPr wrap="square" lIns="0" tIns="0" rIns="0" bIns="0" rtlCol="0" anchor="ctr"/>
           <a:lstStyle/>
           <a:p>
-            <a:pPr marL="0" indent="0" algn="l">
+            <a:pPr marL="0" indent="0">
               <a:spcAft>
                 <a:spcPts val="300"/>
               </a:spcAft>
               <a:buNone/>
             </a:pPr>
             <a:r>
-              <a:rPr lang="en-US" sz="2000" b="0" dirty="0" u="none">
+              <a:rPr lang="en-US" sz="1000" b="1" dirty="0">
                 <a:solidFill>
                   <a:srgbClr val="1C2B3A"/>
                 </a:solidFill>
@@ -14033,14 +14059,14 @@
             <a:endParaRPr lang="en-US" sz="1000" dirty="0"/>
           </a:p>
           <a:p>
-            <a:pPr marL="0" indent="0" algn="l">
+            <a:pPr marL="0" indent="0">
               <a:spcAft>
                 <a:spcPts val="300"/>
               </a:spcAft>
               <a:buNone/>
             </a:pPr>
             <a:r>
-              <a:rPr lang="en-US" sz="2000" dirty="0" b="0" u="none">
+              <a:rPr lang="en-US" sz="1000" dirty="0">
                 <a:solidFill>
                   <a:srgbClr val="1C2B3A"/>
                 </a:solidFill>
@@ -14053,14 +14079,14 @@
             <a:endParaRPr lang="en-US" sz="1000" dirty="0"/>
           </a:p>
           <a:p>
-            <a:pPr marL="0" indent="0" algn="l">
+            <a:pPr marL="0" indent="0">
               <a:spcAft>
                 <a:spcPts val="300"/>
               </a:spcAft>
               <a:buNone/>
             </a:pPr>
             <a:r>
-              <a:rPr lang="en-US" sz="2000" b="0" dirty="0" u="none">
+              <a:rPr lang="en-US" sz="1000" b="1" dirty="0">
                 <a:solidFill>
                   <a:srgbClr val="1C2B3A"/>
                 </a:solidFill>
@@ -14073,14 +14099,14 @@
             <a:endParaRPr lang="en-US" sz="1000" dirty="0"/>
           </a:p>
           <a:p>
-            <a:pPr marL="0" indent="0" algn="l">
+            <a:pPr marL="0" indent="0">
               <a:spcAft>
                 <a:spcPts val="300"/>
               </a:spcAft>
               <a:buNone/>
             </a:pPr>
             <a:r>
-              <a:rPr lang="en-US" sz="2000" dirty="0" b="0" u="none">
+              <a:rPr lang="en-US" sz="1000" dirty="0">
                 <a:solidFill>
                   <a:srgbClr val="1C2B3A"/>
                 </a:solidFill>
@@ -14093,14 +14119,14 @@
             <a:endParaRPr lang="en-US" sz="1000" dirty="0"/>
           </a:p>
           <a:p>
-            <a:pPr marL="0" indent="0" algn="l">
+            <a:pPr marL="0" indent="0">
               <a:spcAft>
                 <a:spcPts val="300"/>
               </a:spcAft>
               <a:buNone/>
             </a:pPr>
             <a:r>
-              <a:rPr lang="en-US" sz="2000" b="0" dirty="0" u="none">
+              <a:rPr lang="en-US" sz="1000" b="1" dirty="0">
                 <a:solidFill>
                   <a:srgbClr val="1C2B3A"/>
                 </a:solidFill>
@@ -14113,14 +14139,14 @@
             <a:endParaRPr lang="en-US" sz="1000" dirty="0"/>
           </a:p>
           <a:p>
-            <a:pPr marL="0" indent="0" algn="l">
+            <a:pPr marL="0" indent="0">
               <a:spcAft>
                 <a:spcPts val="300"/>
               </a:spcAft>
               <a:buNone/>
             </a:pPr>
             <a:r>
-              <a:rPr lang="en-US" sz="2000" dirty="0" b="0" u="none">
+              <a:rPr lang="en-US" sz="1000" dirty="0">
                 <a:solidFill>
                   <a:srgbClr val="1C2B3A"/>
                 </a:solidFill>
@@ -14142,8 +14168,8 @@
         </p:nvSpPr>
         <p:spPr>
           <a:xfrm>
-            <a:off x="695756" y="134289"/>
-            <a:ext cx="2300025" cy="36576"/>
+            <a:off x="0" y="0"/>
+            <a:ext cx="9144000" cy="76200"/>
           </a:xfrm>
           <a:prstGeom prst="rect">
             <a:avLst/>
@@ -14182,7 +14208,7 @@
   <p:clrMapOvr>
     <a:masterClrMapping/>
   </p:clrMapOvr>
-  <p:transition spd="med" dur="488">
+  <p:transition spd="med" dur="418">
     <p:fade/>
   </p:transition>
 </p:sld>
@@ -14241,7 +14267,6 @@
           <a:bodyPr/>
           <a:lstStyle/>
           <a:p>
-            <a:pPr algn="ctr"/>
             <a:endParaRPr lang="fr-FR"/>
           </a:p>
         </p:txBody>
@@ -14267,11 +14292,11 @@
           <a:bodyPr wrap="square" lIns="0" tIns="0" rIns="0" bIns="0" rtlCol="0" anchor="ctr"/>
           <a:lstStyle/>
           <a:p>
-            <a:pPr marL="0" indent="0" algn="ctr">
-              <a:buNone/>
-            </a:pPr>
-            <a:r>
-              <a:rPr lang="en-US" sz="2000" b="0" kern="0" spc="200" dirty="0" u="none">
+            <a:pPr marL="0" indent="0">
+              <a:buNone/>
+            </a:pPr>
+            <a:r>
+              <a:rPr lang="en-US" sz="1100" b="1" kern="0" spc="200" dirty="0">
                 <a:solidFill>
                   <a:srgbClr val="1C2B3A"/>
                 </a:solidFill>
@@ -14306,11 +14331,11 @@
           <a:bodyPr wrap="square" lIns="0" tIns="0" rIns="0" bIns="0" rtlCol="0" anchor="ctr"/>
           <a:lstStyle/>
           <a:p>
-            <a:pPr marL="0" indent="0" algn="ctr">
-              <a:buNone/>
-            </a:pPr>
-            <a:r>
-              <a:rPr lang="en-US" sz="2000" b="0" dirty="0" u="none">
+            <a:pPr marL="0" indent="0">
+              <a:buNone/>
+            </a:pPr>
+            <a:r>
+              <a:rPr lang="en-US" sz="2800" b="1" dirty="0">
                 <a:solidFill>
                   <a:srgbClr val="1C2B3A"/>
                 </a:solidFill>
@@ -14347,7 +14372,6 @@
           <a:bodyPr/>
           <a:lstStyle/>
           <a:p>
-            <a:pPr algn="ctr"/>
             <a:endParaRPr lang="fr-FR"/>
           </a:p>
         </p:txBody>
@@ -14375,7 +14399,6 @@
           <a:bodyPr/>
           <a:lstStyle/>
           <a:p>
-            <a:pPr algn="ctr"/>
             <a:endParaRPr lang="fr-FR"/>
           </a:p>
         </p:txBody>
@@ -14401,11 +14424,11 @@
           <a:bodyPr wrap="square" lIns="0" tIns="0" rIns="0" bIns="0" rtlCol="0" anchor="ctr"/>
           <a:lstStyle/>
           <a:p>
-            <a:pPr marL="0" indent="0" algn="ctr">
-              <a:buNone/>
-            </a:pPr>
-            <a:r>
-              <a:rPr lang="en-US" sz="2000" dirty="0" b="0" u="none">
+            <a:pPr marL="0" indent="0" algn="r">
+              <a:buNone/>
+            </a:pPr>
+            <a:r>
+              <a:rPr lang="en-US" sz="900" dirty="0">
                 <a:solidFill>
                   <a:srgbClr val="1C2B3A"/>
                 </a:solidFill>
@@ -15470,8 +15493,8 @@
         </p:nvSpPr>
         <p:spPr>
           <a:xfrm>
-            <a:off x="669387" y="75884"/>
-            <a:ext cx="1884656" cy="36576"/>
+            <a:off x="0" y="0"/>
+            <a:ext cx="9144000" cy="76200"/>
           </a:xfrm>
           <a:prstGeom prst="rect">
             <a:avLst/>
@@ -15510,7 +15533,7 @@
   <p:clrMapOvr>
     <a:masterClrMapping/>
   </p:clrMapOvr>
-  <p:transition spd="med" dur="663">
+  <p:transition spd="med" dur="558">
     <p:fade/>
   </p:transition>
 </p:sld>
@@ -15564,7 +15587,6 @@
           <a:bodyPr/>
           <a:lstStyle/>
           <a:p>
-            <a:pPr algn="l"/>
             <a:endParaRPr lang="fr-FR"/>
           </a:p>
         </p:txBody>
@@ -15590,11 +15612,11 @@
           <a:bodyPr wrap="square" rtlCol="0" anchor="ctr"/>
           <a:lstStyle/>
           <a:p>
-            <a:pPr marL="0" indent="0" algn="l">
-              <a:buNone/>
-            </a:pPr>
-            <a:r>
-              <a:rPr lang="en-US" sz="2000" b="0" kern="0" spc="400" dirty="0" u="none">
+            <a:pPr marL="0" indent="0">
+              <a:buNone/>
+            </a:pPr>
+            <a:r>
+              <a:rPr lang="en-US" sz="1400" b="1" kern="0" spc="400" dirty="0">
                 <a:solidFill>
                   <a:srgbClr val="1C2B3A"/>
                 </a:solidFill>
@@ -15629,11 +15651,11 @@
           <a:bodyPr wrap="square" rtlCol="0" anchor="ctr"/>
           <a:lstStyle/>
           <a:p>
-            <a:pPr marL="0" indent="0" algn="l">
-              <a:buNone/>
-            </a:pPr>
-            <a:r>
-              <a:rPr lang="en-US" sz="2000" b="0" dirty="0" u="none">
+            <a:pPr marL="0" indent="0">
+              <a:buNone/>
+            </a:pPr>
+            <a:r>
+              <a:rPr lang="en-US" sz="4000" b="1" dirty="0">
                 <a:solidFill>
                   <a:srgbClr val="1C2B3A"/>
                 </a:solidFill>
@@ -15670,7 +15692,6 @@
           <a:bodyPr/>
           <a:lstStyle/>
           <a:p>
-            <a:pPr algn="l"/>
             <a:endParaRPr lang="fr-FR"/>
           </a:p>
         </p:txBody>
@@ -15696,7 +15717,7 @@
           <a:bodyPr wrap="square" rtlCol="0" anchor="ctr"/>
           <a:lstStyle/>
           <a:p>
-            <a:pPr marL="0" indent="0" algn="l">
+            <a:pPr marL="0" indent="0">
               <a:buNone/>
             </a:pPr>
             <a:endParaRPr lang="en-US" sz="1600" dirty="0"/>
@@ -15726,7 +15747,6 @@
           <a:bodyPr/>
           <a:lstStyle/>
           <a:p>
-            <a:pPr algn="l"/>
             <a:endParaRPr lang="fr-FR"/>
           </a:p>
         </p:txBody>
@@ -15752,11 +15772,11 @@
           <a:bodyPr wrap="square" lIns="0" tIns="0" rIns="0" bIns="0" rtlCol="0" anchor="ctr"/>
           <a:lstStyle/>
           <a:p>
-            <a:pPr marL="0" indent="0" algn="l">
-              <a:buNone/>
-            </a:pPr>
-            <a:r>
-              <a:rPr lang="en-US" sz="2000" dirty="0" b="0" u="none">
+            <a:pPr marL="0" indent="0" algn="r">
+              <a:buNone/>
+            </a:pPr>
+            <a:r>
+              <a:rPr lang="en-US" sz="900" dirty="0">
                 <a:solidFill>
                   <a:srgbClr val="1C2B3A"/>
                 </a:solidFill>
@@ -15778,8 +15798,8 @@
         </p:nvSpPr>
         <p:spPr>
           <a:xfrm>
-            <a:off x="828011" y="97138"/>
-            <a:ext cx="2628447" cy="36576"/>
+            <a:off x="0" y="0"/>
+            <a:ext cx="9144000" cy="76200"/>
           </a:xfrm>
           <a:prstGeom prst="rect">
             <a:avLst/>
@@ -15818,7 +15838,7 @@
   <p:clrMapOvr>
     <a:masterClrMapping/>
   </p:clrMapOvr>
-  <p:transition spd="med" dur="522">
+  <p:transition spd="med" dur="576">
     <p:fade/>
   </p:transition>
 </p:sld>
